--- a/slides/modules/m07-pipelines-fundamentals.pptx
+++ b/slides/modules/m07-pipelines-fundamentals.pptx
@@ -14,6 +14,9 @@
     <p:sldId id="262" r:id="rId14"/>
     <p:sldId id="263" r:id="rId15"/>
     <p:sldId id="264" r:id="rId16"/>
+    <p:sldId id="265" r:id="rId17"/>
+    <p:sldId id="266" r:id="rId18"/>
+    <p:sldId id="267" r:id="rId19"/>
   </p:sldIdLst>
   <p:sldSz cx="12191695" cy="6858000" type="screen4x3"/>
   <p:notesSz cx="6858000" cy="9144000"/>
@@ -535,6 +538,146 @@
 </p:notes>
 </file>
 
+<file path=ppt/notesSlides/notesSlide10.xml><?xml version="1.0" encoding="utf-8"?>
+<p:notes xmlns:a="http://schemas.openxmlformats.org/drawingml/2006/main" xmlns:p="http://schemas.openxmlformats.org/presentationml/2006/main" xmlns:r="http://schemas.openxmlformats.org/officeDocument/2006/relationships">
+  <p:cSld>
+    <p:spTree>
+      <p:nvGrpSpPr>
+        <p:cNvPr id="1" name=""/>
+        <p:cNvGrpSpPr/>
+        <p:nvPr/>
+      </p:nvGrpSpPr>
+      <p:grpSpPr>
+        <a:xfrm>
+          <a:off x="0" y="0"/>
+          <a:ext cx="0" cy="0"/>
+          <a:chOff x="0" y="0"/>
+          <a:chExt cx="0" cy="0"/>
+        </a:xfrm>
+      </p:grpSpPr>
+      <p:sp>
+        <p:nvSpPr>
+          <p:cNvPr id="2" name="Slide Image Placeholder 1"/>
+          <p:cNvSpPr>
+            <a:spLocks noGrp="1"/>
+          </p:cNvSpPr>
+          <p:nvPr>
+            <p:ph type="sldImg" idx="2"/>
+          </p:nvPr>
+        </p:nvSpPr>
+        <p:spPr/>
+      </p:sp>
+      <p:sp>
+        <p:nvSpPr>
+          <p:cNvPr id="3" name="Notes Placeholder 2"/>
+          <p:cNvSpPr>
+            <a:spLocks noGrp="1"/>
+          </p:cNvSpPr>
+          <p:nvPr>
+            <p:ph type="body" idx="3" sz="quarter"/>
+          </p:nvPr>
+        </p:nvSpPr>
+        <p:spPr/>
+        <p:txBody>
+          <a:bodyPr/>
+          <a:lstStyle/>
+          <a:p>
+            <a:r>
+              <a:t>Concept diagram: Pipeline choices.</a:t>
+            </a:r>
+          </a:p>
+        </p:txBody>
+      </p:sp>
+      <p:sp>
+        <p:nvSpPr>
+          <p:cNvPr id="4" name="Slide Number Placeholder 3"/>
+          <p:cNvSpPr>
+            <a:spLocks noGrp="1"/>
+          </p:cNvSpPr>
+          <p:nvPr>
+            <p:ph type="sldNum" idx="5" sz="quarter"/>
+          </p:nvPr>
+        </p:nvSpPr>
+        <p:spPr/>
+      </p:sp>
+    </p:spTree>
+  </p:cSld>
+  <p:clrMapOvr>
+    <a:masterClrMapping/>
+  </p:clrMapOvr>
+</p:notes>
+</file>
+
+<file path=ppt/notesSlides/notesSlide11.xml><?xml version="1.0" encoding="utf-8"?>
+<p:notes xmlns:a="http://schemas.openxmlformats.org/drawingml/2006/main" xmlns:p="http://schemas.openxmlformats.org/presentationml/2006/main" xmlns:r="http://schemas.openxmlformats.org/officeDocument/2006/relationships">
+  <p:cSld>
+    <p:spTree>
+      <p:nvGrpSpPr>
+        <p:cNvPr id="1" name=""/>
+        <p:cNvGrpSpPr/>
+        <p:nvPr/>
+      </p:nvGrpSpPr>
+      <p:grpSpPr>
+        <a:xfrm>
+          <a:off x="0" y="0"/>
+          <a:ext cx="0" cy="0"/>
+          <a:chOff x="0" y="0"/>
+          <a:chExt cx="0" cy="0"/>
+        </a:xfrm>
+      </p:grpSpPr>
+      <p:sp>
+        <p:nvSpPr>
+          <p:cNvPr id="2" name="Slide Image Placeholder 1"/>
+          <p:cNvSpPr>
+            <a:spLocks noGrp="1"/>
+          </p:cNvSpPr>
+          <p:nvPr>
+            <p:ph type="sldImg" idx="2"/>
+          </p:nvPr>
+        </p:nvSpPr>
+        <p:spPr/>
+      </p:sp>
+      <p:sp>
+        <p:nvSpPr>
+          <p:cNvPr id="3" name="Notes Placeholder 2"/>
+          <p:cNvSpPr>
+            <a:spLocks noGrp="1"/>
+          </p:cNvSpPr>
+          <p:nvPr>
+            <p:ph type="body" idx="3" sz="quarter"/>
+          </p:nvPr>
+        </p:nvSpPr>
+        <p:spPr/>
+        <p:txBody>
+          <a:bodyPr/>
+          <a:lstStyle/>
+          <a:p>
+            <a:r>
+              <a:t>Concept diagram: What you built.</a:t>
+            </a:r>
+          </a:p>
+        </p:txBody>
+      </p:sp>
+      <p:sp>
+        <p:nvSpPr>
+          <p:cNvPr id="4" name="Slide Number Placeholder 3"/>
+          <p:cNvSpPr>
+            <a:spLocks noGrp="1"/>
+          </p:cNvSpPr>
+          <p:nvPr>
+            <p:ph type="sldNum" idx="5" sz="quarter"/>
+          </p:nvPr>
+        </p:nvSpPr>
+        <p:spPr/>
+      </p:sp>
+    </p:spTree>
+  </p:cSld>
+  <p:clrMapOvr>
+    <a:masterClrMapping/>
+  </p:clrMapOvr>
+</p:notes>
+</file>
+
 <file path=ppt/notesSlides/notesSlide2.xml><?xml version="1.0" encoding="utf-8"?>
 <p:notes xmlns:a="http://schemas.openxmlformats.org/drawingml/2006/main" xmlns:p="http://schemas.openxmlformats.org/presentationml/2006/main" xmlns:r="http://schemas.openxmlformats.org/officeDocument/2006/relationships">
   <p:cSld>
@@ -1001,6 +1144,76 @@
           <a:p>
             <a:r>
               <a:t>Land the transfer and stay honest. Discussion prompts: where the real build of one of your services lives today — a reviewed pipeline, or a wiki and shell history; what the equivalent of the Java 17/21 gap is on your platform (a required scanner, a company base image, a standard deploy step every team solves differently) — that's your library's first Task; and the one test you wish had gated a past incident, and whether it was actually in the pipeline as a gate. Then the credibility close on restraint: a pipeline earns its keep through repetition, so don't build one for a throwaway; split a pipeline the moment it's hard to read rather than growing a monolith; reuse before you author; and never treat the module's CI-namespace deploy as promotion to production — building a trustworthy image is CI's job, and reconciling it into environments is GitOps' job (next up).</a:t>
+            </a:r>
+          </a:p>
+        </p:txBody>
+      </p:sp>
+      <p:sp>
+        <p:nvSpPr>
+          <p:cNvPr id="4" name="Slide Number Placeholder 3"/>
+          <p:cNvSpPr>
+            <a:spLocks noGrp="1"/>
+          </p:cNvSpPr>
+          <p:nvPr>
+            <p:ph type="sldNum" idx="5" sz="quarter"/>
+          </p:nvPr>
+        </p:nvSpPr>
+        <p:spPr/>
+      </p:sp>
+    </p:spTree>
+  </p:cSld>
+  <p:clrMapOvr>
+    <a:masterClrMapping/>
+  </p:clrMapOvr>
+</p:notes>
+</file>
+
+<file path=ppt/notesSlides/notesSlide9.xml><?xml version="1.0" encoding="utf-8"?>
+<p:notes xmlns:a="http://schemas.openxmlformats.org/drawingml/2006/main" xmlns:p="http://schemas.openxmlformats.org/presentationml/2006/main" xmlns:r="http://schemas.openxmlformats.org/officeDocument/2006/relationships">
+  <p:cSld>
+    <p:spTree>
+      <p:nvGrpSpPr>
+        <p:cNvPr id="1" name=""/>
+        <p:cNvGrpSpPr/>
+        <p:nvPr/>
+      </p:nvGrpSpPr>
+      <p:grpSpPr>
+        <a:xfrm>
+          <a:off x="0" y="0"/>
+          <a:ext cx="0" cy="0"/>
+          <a:chOff x="0" y="0"/>
+          <a:chExt cx="0" cy="0"/>
+        </a:xfrm>
+      </p:grpSpPr>
+      <p:sp>
+        <p:nvSpPr>
+          <p:cNvPr id="2" name="Slide Image Placeholder 1"/>
+          <p:cNvSpPr>
+            <a:spLocks noGrp="1"/>
+          </p:cNvSpPr>
+          <p:nvPr>
+            <p:ph type="sldImg" idx="2"/>
+          </p:nvPr>
+        </p:nvSpPr>
+        <p:spPr/>
+      </p:sp>
+      <p:sp>
+        <p:nvSpPr>
+          <p:cNvPr id="3" name="Notes Placeholder 2"/>
+          <p:cNvSpPr>
+            <a:spLocks noGrp="1"/>
+          </p:cNvSpPr>
+          <p:nvPr>
+            <p:ph type="body" idx="3" sz="quarter"/>
+          </p:nvPr>
+        </p:nvSpPr>
+        <p:spPr/>
+        <p:txBody>
+          <a:bodyPr/>
+          <a:lstStyle/>
+          <a:p>
+            <a:r>
+              <a:t>Concept diagram: Anatomy and layers.</a:t>
             </a:r>
           </a:p>
         </p:txBody>
@@ -4209,6 +4422,1104 @@
 </p:sld>
 </file>
 
+<file path=ppt/slides/slide10.xml><?xml version="1.0" encoding="utf-8"?>
+<p:sld xmlns:a="http://schemas.openxmlformats.org/drawingml/2006/main" xmlns:p="http://schemas.openxmlformats.org/presentationml/2006/main" xmlns:r="http://schemas.openxmlformats.org/officeDocument/2006/relationships">
+  <p:cSld>
+    <p:spTree>
+      <p:nvGrpSpPr>
+        <p:cNvPr id="1" name=""/>
+        <p:cNvGrpSpPr/>
+        <p:nvPr/>
+      </p:nvGrpSpPr>
+      <p:grpSpPr/>
+      <p:pic>
+        <p:nvPicPr>
+          <p:cNvPr id="2" name="Picture 1" descr="redhat_logo.jpg"/>
+          <p:cNvPicPr>
+            <a:picLocks noChangeAspect="1"/>
+          </p:cNvPicPr>
+          <p:nvPr/>
+        </p:nvPicPr>
+        <p:blipFill>
+          <a:blip r:embed="rId2"/>
+          <a:stretch>
+            <a:fillRect/>
+          </a:stretch>
+        </p:blipFill>
+        <p:spPr>
+          <a:xfrm>
+            <a:off x="10326319" y="475488"/>
+            <a:ext cx="1024128" cy="242248"/>
+          </a:xfrm>
+          <a:prstGeom prst="rect">
+            <a:avLst/>
+          </a:prstGeom>
+        </p:spPr>
+      </p:pic>
+      <p:sp>
+        <p:nvSpPr>
+          <p:cNvPr id="3" name="TextBox 2"/>
+          <p:cNvSpPr txBox="1"/>
+          <p:nvPr/>
+        </p:nvSpPr>
+        <p:spPr>
+          <a:xfrm>
+            <a:off x="841248" y="548640"/>
+            <a:ext cx="8595360" cy="274320"/>
+          </a:xfrm>
+          <a:prstGeom prst="rect">
+            <a:avLst/>
+          </a:prstGeom>
+          <a:noFill/>
+        </p:spPr>
+        <p:txBody>
+          <a:bodyPr wrap="square" anchor="t" lIns="0" rIns="0" tIns="0" bIns="0">
+            <a:spAutoFit/>
+          </a:bodyPr>
+          <a:lstStyle/>
+          <a:p>
+            <a:pPr algn="l">
+              <a:lnSpc>
+                <a:spcPct val="106000"/>
+              </a:lnSpc>
+              <a:spcBef>
+                <a:spcPts val="0"/>
+              </a:spcBef>
+              <a:spcAft>
+                <a:spcPts val="0"/>
+              </a:spcAft>
+            </a:pPr>
+            <a:r>
+              <a:rPr sz="1250" b="1" spc="220">
+                <a:solidFill>
+                  <a:srgbClr val="EE0000"/>
+                </a:solidFill>
+                <a:latin typeface="Red Hat Display"/>
+              </a:rPr>
+              <a:t>M07 · PIPELINES FUNDAMENTALS &amp; TASK LIBRARIES</a:t>
+            </a:r>
+          </a:p>
+        </p:txBody>
+      </p:sp>
+      <p:sp>
+        <p:nvSpPr>
+          <p:cNvPr id="4" name="TextBox 3"/>
+          <p:cNvSpPr txBox="1"/>
+          <p:nvPr/>
+        </p:nvSpPr>
+        <p:spPr>
+          <a:xfrm>
+            <a:off x="841248" y="877824"/>
+            <a:ext cx="10515600" cy="548640"/>
+          </a:xfrm>
+          <a:prstGeom prst="rect">
+            <a:avLst/>
+          </a:prstGeom>
+          <a:noFill/>
+        </p:spPr>
+        <p:txBody>
+          <a:bodyPr wrap="none" anchor="t" lIns="0" rIns="0" tIns="0" bIns="0">
+            <a:spAutoFit/>
+          </a:bodyPr>
+          <a:lstStyle/>
+          <a:p>
+            <a:pPr algn="l">
+              <a:lnSpc>
+                <a:spcPct val="100000"/>
+              </a:lnSpc>
+              <a:spcBef>
+                <a:spcPts val="0"/>
+              </a:spcBef>
+              <a:spcAft>
+                <a:spcPts val="0"/>
+              </a:spcAft>
+            </a:pPr>
+            <a:r>
+              <a:rPr sz="2500" b="1">
+                <a:solidFill>
+                  <a:srgbClr val="1A1A1A"/>
+                </a:solidFill>
+                <a:latin typeface="Red Hat Display"/>
+              </a:rPr>
+              <a:t>Anatomy and layers</a:t>
+            </a:r>
+          </a:p>
+        </p:txBody>
+      </p:sp>
+      <p:cxnSp>
+        <p:nvCxnSpPr>
+          <p:cNvPr id="5" name="Connector 4"/>
+          <p:cNvCxnSpPr/>
+          <p:nvPr/>
+        </p:nvCxnSpPr>
+        <p:spPr>
+          <a:xfrm>
+            <a:off x="841248" y="1554480"/>
+            <a:ext cx="1371600" cy="0"/>
+          </a:xfrm>
+          <a:prstGeom prst="bentConnector3">
+            <a:avLst/>
+          </a:prstGeom>
+          <a:ln w="31750">
+            <a:solidFill>
+              <a:srgbClr val="EE0000"/>
+            </a:solidFill>
+          </a:ln>
+          <a:effectLst/>
+        </p:spPr>
+        <p:style>
+          <a:lnRef idx="2">
+            <a:schemeClr val="accent1"/>
+          </a:lnRef>
+          <a:fillRef idx="0">
+            <a:schemeClr val="accent1"/>
+          </a:fillRef>
+          <a:effectRef idx="1">
+            <a:schemeClr val="accent1"/>
+          </a:effectRef>
+          <a:fontRef idx="minor">
+            <a:schemeClr val="tx1"/>
+          </a:fontRef>
+        </p:style>
+      </p:cxnSp>
+      <p:sp>
+        <p:nvSpPr>
+          <p:cNvPr id="6" name="Rounded Rectangle 5"/>
+          <p:cNvSpPr/>
+          <p:nvPr/>
+        </p:nvSpPr>
+        <p:spPr>
+          <a:xfrm>
+            <a:off x="841248" y="2331720"/>
+            <a:ext cx="10509199" cy="3794760"/>
+          </a:xfrm>
+          <a:prstGeom prst="roundRect">
+            <a:avLst>
+              <a:gd name="adj" fmla="val 4000"/>
+            </a:avLst>
+          </a:prstGeom>
+          <a:solidFill>
+            <a:srgbClr val="FFFFFF"/>
+          </a:solidFill>
+          <a:ln w="15240">
+            <a:solidFill>
+              <a:srgbClr val="DDE1E6"/>
+            </a:solidFill>
+          </a:ln>
+          <a:effectLst/>
+        </p:spPr>
+        <p:style>
+          <a:lnRef idx="1">
+            <a:schemeClr val="accent1"/>
+          </a:lnRef>
+          <a:fillRef idx="3">
+            <a:schemeClr val="accent1"/>
+          </a:fillRef>
+          <a:effectRef idx="2">
+            <a:schemeClr val="accent1"/>
+          </a:effectRef>
+          <a:fontRef idx="minor">
+            <a:schemeClr val="lt1"/>
+          </a:fontRef>
+        </p:style>
+        <p:txBody>
+          <a:bodyPr rtlCol="0" anchor="ctr"/>
+          <a:lstStyle/>
+          <a:p>
+            <a:pPr algn="ctr"/>
+          </a:p>
+        </p:txBody>
+      </p:sp>
+      <p:pic>
+        <p:nvPicPr>
+          <p:cNvPr id="7" name="Picture 6" descr="01-anatomy-and-layers.png"/>
+          <p:cNvPicPr>
+            <a:picLocks noChangeAspect="1"/>
+          </p:cNvPicPr>
+          <p:nvPr/>
+        </p:nvPicPr>
+        <p:blipFill>
+          <a:blip r:embed="rId3"/>
+          <a:stretch>
+            <a:fillRect/>
+          </a:stretch>
+        </p:blipFill>
+        <p:spPr>
+          <a:xfrm>
+            <a:off x="3297972" y="2532888"/>
+            <a:ext cx="5595750" cy="3392424"/>
+          </a:xfrm>
+          <a:prstGeom prst="rect">
+            <a:avLst/>
+          </a:prstGeom>
+        </p:spPr>
+      </p:pic>
+      <p:cxnSp>
+        <p:nvCxnSpPr>
+          <p:cNvPr id="8" name="Connector 7"/>
+          <p:cNvCxnSpPr/>
+          <p:nvPr/>
+        </p:nvCxnSpPr>
+        <p:spPr>
+          <a:xfrm>
+            <a:off x="841248" y="6437376"/>
+            <a:ext cx="10509199" cy="0"/>
+          </a:xfrm>
+          <a:prstGeom prst="bentConnector3">
+            <a:avLst/>
+          </a:prstGeom>
+          <a:ln w="12700">
+            <a:solidFill>
+              <a:srgbClr val="DDE1E6"/>
+            </a:solidFill>
+          </a:ln>
+          <a:effectLst/>
+        </p:spPr>
+        <p:style>
+          <a:lnRef idx="2">
+            <a:schemeClr val="accent1"/>
+          </a:lnRef>
+          <a:fillRef idx="0">
+            <a:schemeClr val="accent1"/>
+          </a:fillRef>
+          <a:effectRef idx="1">
+            <a:schemeClr val="accent1"/>
+          </a:effectRef>
+          <a:fontRef idx="minor">
+            <a:schemeClr val="tx1"/>
+          </a:fontRef>
+        </p:style>
+      </p:cxnSp>
+      <p:sp>
+        <p:nvSpPr>
+          <p:cNvPr id="9" name="TextBox 8"/>
+          <p:cNvSpPr txBox="1"/>
+          <p:nvPr/>
+        </p:nvSpPr>
+        <p:spPr>
+          <a:xfrm>
+            <a:off x="841248" y="6473952"/>
+            <a:ext cx="7315200" cy="274320"/>
+          </a:xfrm>
+          <a:prstGeom prst="rect">
+            <a:avLst/>
+          </a:prstGeom>
+          <a:noFill/>
+        </p:spPr>
+        <p:txBody>
+          <a:bodyPr wrap="square" anchor="t" lIns="0" rIns="0" tIns="0" bIns="0">
+            <a:spAutoFit/>
+          </a:bodyPr>
+          <a:lstStyle/>
+          <a:p>
+            <a:pPr algn="l">
+              <a:lnSpc>
+                <a:spcPct val="106000"/>
+              </a:lnSpc>
+              <a:spcBef>
+                <a:spcPts val="0"/>
+              </a:spcBef>
+              <a:spcAft>
+                <a:spcPts val="0"/>
+              </a:spcAft>
+            </a:pPr>
+            <a:r>
+              <a:rPr sz="950" b="0">
+                <a:solidFill>
+                  <a:srgbClr val="8A9099"/>
+                </a:solidFill>
+                <a:latin typeface="Red Hat Text"/>
+              </a:rPr>
+              <a:t>CONFIDENTIAL</a:t>
+            </a:r>
+          </a:p>
+        </p:txBody>
+      </p:sp>
+      <p:sp>
+        <p:nvSpPr>
+          <p:cNvPr id="10" name="TextBox 9"/>
+          <p:cNvSpPr txBox="1"/>
+          <p:nvPr/>
+        </p:nvSpPr>
+        <p:spPr>
+          <a:xfrm>
+            <a:off x="10801807" y="6473952"/>
+            <a:ext cx="548640" cy="274320"/>
+          </a:xfrm>
+          <a:prstGeom prst="rect">
+            <a:avLst/>
+          </a:prstGeom>
+          <a:noFill/>
+        </p:spPr>
+        <p:txBody>
+          <a:bodyPr wrap="square" anchor="t" lIns="0" rIns="0" tIns="0" bIns="0">
+            <a:spAutoFit/>
+          </a:bodyPr>
+          <a:lstStyle/>
+          <a:p>
+            <a:pPr algn="r">
+              <a:lnSpc>
+                <a:spcPct val="106000"/>
+              </a:lnSpc>
+              <a:spcBef>
+                <a:spcPts val="0"/>
+              </a:spcBef>
+              <a:spcAft>
+                <a:spcPts val="0"/>
+              </a:spcAft>
+            </a:pPr>
+            <a:r>
+              <a:rPr sz="950" b="0">
+                <a:solidFill>
+                  <a:srgbClr val="8A9099"/>
+                </a:solidFill>
+                <a:latin typeface="Red Hat Text"/>
+              </a:rPr>
+              <a:t>9</a:t>
+            </a:r>
+          </a:p>
+        </p:txBody>
+      </p:sp>
+    </p:spTree>
+  </p:cSld>
+  <p:clrMapOvr>
+    <a:masterClrMapping/>
+  </p:clrMapOvr>
+</p:sld>
+</file>
+
+<file path=ppt/slides/slide11.xml><?xml version="1.0" encoding="utf-8"?>
+<p:sld xmlns:a="http://schemas.openxmlformats.org/drawingml/2006/main" xmlns:p="http://schemas.openxmlformats.org/presentationml/2006/main" xmlns:r="http://schemas.openxmlformats.org/officeDocument/2006/relationships">
+  <p:cSld>
+    <p:spTree>
+      <p:nvGrpSpPr>
+        <p:cNvPr id="1" name=""/>
+        <p:cNvGrpSpPr/>
+        <p:nvPr/>
+      </p:nvGrpSpPr>
+      <p:grpSpPr/>
+      <p:pic>
+        <p:nvPicPr>
+          <p:cNvPr id="2" name="Picture 1" descr="redhat_logo.jpg"/>
+          <p:cNvPicPr>
+            <a:picLocks noChangeAspect="1"/>
+          </p:cNvPicPr>
+          <p:nvPr/>
+        </p:nvPicPr>
+        <p:blipFill>
+          <a:blip r:embed="rId2"/>
+          <a:stretch>
+            <a:fillRect/>
+          </a:stretch>
+        </p:blipFill>
+        <p:spPr>
+          <a:xfrm>
+            <a:off x="10326319" y="475488"/>
+            <a:ext cx="1024128" cy="242248"/>
+          </a:xfrm>
+          <a:prstGeom prst="rect">
+            <a:avLst/>
+          </a:prstGeom>
+        </p:spPr>
+      </p:pic>
+      <p:sp>
+        <p:nvSpPr>
+          <p:cNvPr id="3" name="TextBox 2"/>
+          <p:cNvSpPr txBox="1"/>
+          <p:nvPr/>
+        </p:nvSpPr>
+        <p:spPr>
+          <a:xfrm>
+            <a:off x="841248" y="548640"/>
+            <a:ext cx="8595360" cy="274320"/>
+          </a:xfrm>
+          <a:prstGeom prst="rect">
+            <a:avLst/>
+          </a:prstGeom>
+          <a:noFill/>
+        </p:spPr>
+        <p:txBody>
+          <a:bodyPr wrap="square" anchor="t" lIns="0" rIns="0" tIns="0" bIns="0">
+            <a:spAutoFit/>
+          </a:bodyPr>
+          <a:lstStyle/>
+          <a:p>
+            <a:pPr algn="l">
+              <a:lnSpc>
+                <a:spcPct val="106000"/>
+              </a:lnSpc>
+              <a:spcBef>
+                <a:spcPts val="0"/>
+              </a:spcBef>
+              <a:spcAft>
+                <a:spcPts val="0"/>
+              </a:spcAft>
+            </a:pPr>
+            <a:r>
+              <a:rPr sz="1250" b="1" spc="220">
+                <a:solidFill>
+                  <a:srgbClr val="EE0000"/>
+                </a:solidFill>
+                <a:latin typeface="Red Hat Display"/>
+              </a:rPr>
+              <a:t>M07 · PIPELINES FUNDAMENTALS &amp; TASK LIBRARIES</a:t>
+            </a:r>
+          </a:p>
+        </p:txBody>
+      </p:sp>
+      <p:sp>
+        <p:nvSpPr>
+          <p:cNvPr id="4" name="TextBox 3"/>
+          <p:cNvSpPr txBox="1"/>
+          <p:nvPr/>
+        </p:nvSpPr>
+        <p:spPr>
+          <a:xfrm>
+            <a:off x="841248" y="877824"/>
+            <a:ext cx="10515600" cy="548640"/>
+          </a:xfrm>
+          <a:prstGeom prst="rect">
+            <a:avLst/>
+          </a:prstGeom>
+          <a:noFill/>
+        </p:spPr>
+        <p:txBody>
+          <a:bodyPr wrap="none" anchor="t" lIns="0" rIns="0" tIns="0" bIns="0">
+            <a:spAutoFit/>
+          </a:bodyPr>
+          <a:lstStyle/>
+          <a:p>
+            <a:pPr algn="l">
+              <a:lnSpc>
+                <a:spcPct val="100000"/>
+              </a:lnSpc>
+              <a:spcBef>
+                <a:spcPts val="0"/>
+              </a:spcBef>
+              <a:spcAft>
+                <a:spcPts val="0"/>
+              </a:spcAft>
+            </a:pPr>
+            <a:r>
+              <a:rPr sz="2500" b="1">
+                <a:solidFill>
+                  <a:srgbClr val="1A1A1A"/>
+                </a:solidFill>
+                <a:latin typeface="Red Hat Display"/>
+              </a:rPr>
+              <a:t>Pipeline choices</a:t>
+            </a:r>
+          </a:p>
+        </p:txBody>
+      </p:sp>
+      <p:cxnSp>
+        <p:nvCxnSpPr>
+          <p:cNvPr id="5" name="Connector 4"/>
+          <p:cNvCxnSpPr/>
+          <p:nvPr/>
+        </p:nvCxnSpPr>
+        <p:spPr>
+          <a:xfrm>
+            <a:off x="841248" y="1554480"/>
+            <a:ext cx="1371600" cy="0"/>
+          </a:xfrm>
+          <a:prstGeom prst="bentConnector3">
+            <a:avLst/>
+          </a:prstGeom>
+          <a:ln w="31750">
+            <a:solidFill>
+              <a:srgbClr val="EE0000"/>
+            </a:solidFill>
+          </a:ln>
+          <a:effectLst/>
+        </p:spPr>
+        <p:style>
+          <a:lnRef idx="2">
+            <a:schemeClr val="accent1"/>
+          </a:lnRef>
+          <a:fillRef idx="0">
+            <a:schemeClr val="accent1"/>
+          </a:fillRef>
+          <a:effectRef idx="1">
+            <a:schemeClr val="accent1"/>
+          </a:effectRef>
+          <a:fontRef idx="minor">
+            <a:schemeClr val="tx1"/>
+          </a:fontRef>
+        </p:style>
+      </p:cxnSp>
+      <p:sp>
+        <p:nvSpPr>
+          <p:cNvPr id="6" name="Rounded Rectangle 5"/>
+          <p:cNvSpPr/>
+          <p:nvPr/>
+        </p:nvSpPr>
+        <p:spPr>
+          <a:xfrm>
+            <a:off x="841248" y="2331720"/>
+            <a:ext cx="10509199" cy="3794760"/>
+          </a:xfrm>
+          <a:prstGeom prst="roundRect">
+            <a:avLst>
+              <a:gd name="adj" fmla="val 4000"/>
+            </a:avLst>
+          </a:prstGeom>
+          <a:solidFill>
+            <a:srgbClr val="FFFFFF"/>
+          </a:solidFill>
+          <a:ln w="15240">
+            <a:solidFill>
+              <a:srgbClr val="DDE1E6"/>
+            </a:solidFill>
+          </a:ln>
+          <a:effectLst/>
+        </p:spPr>
+        <p:style>
+          <a:lnRef idx="1">
+            <a:schemeClr val="accent1"/>
+          </a:lnRef>
+          <a:fillRef idx="3">
+            <a:schemeClr val="accent1"/>
+          </a:fillRef>
+          <a:effectRef idx="2">
+            <a:schemeClr val="accent1"/>
+          </a:effectRef>
+          <a:fontRef idx="minor">
+            <a:schemeClr val="lt1"/>
+          </a:fontRef>
+        </p:style>
+        <p:txBody>
+          <a:bodyPr rtlCol="0" anchor="ctr"/>
+          <a:lstStyle/>
+          <a:p>
+            <a:pPr algn="ctr"/>
+          </a:p>
+        </p:txBody>
+      </p:sp>
+      <p:pic>
+        <p:nvPicPr>
+          <p:cNvPr id="7" name="Picture 6" descr="02-pipeline-choices.png"/>
+          <p:cNvPicPr>
+            <a:picLocks noChangeAspect="1"/>
+          </p:cNvPicPr>
+          <p:nvPr/>
+        </p:nvPicPr>
+        <p:blipFill>
+          <a:blip r:embed="rId3"/>
+          <a:stretch>
+            <a:fillRect/>
+          </a:stretch>
+        </p:blipFill>
+        <p:spPr>
+          <a:xfrm>
+            <a:off x="4050678" y="2532888"/>
+            <a:ext cx="4090337" cy="3392424"/>
+          </a:xfrm>
+          <a:prstGeom prst="rect">
+            <a:avLst/>
+          </a:prstGeom>
+        </p:spPr>
+      </p:pic>
+      <p:cxnSp>
+        <p:nvCxnSpPr>
+          <p:cNvPr id="8" name="Connector 7"/>
+          <p:cNvCxnSpPr/>
+          <p:nvPr/>
+        </p:nvCxnSpPr>
+        <p:spPr>
+          <a:xfrm>
+            <a:off x="841248" y="6437376"/>
+            <a:ext cx="10509199" cy="0"/>
+          </a:xfrm>
+          <a:prstGeom prst="bentConnector3">
+            <a:avLst/>
+          </a:prstGeom>
+          <a:ln w="12700">
+            <a:solidFill>
+              <a:srgbClr val="DDE1E6"/>
+            </a:solidFill>
+          </a:ln>
+          <a:effectLst/>
+        </p:spPr>
+        <p:style>
+          <a:lnRef idx="2">
+            <a:schemeClr val="accent1"/>
+          </a:lnRef>
+          <a:fillRef idx="0">
+            <a:schemeClr val="accent1"/>
+          </a:fillRef>
+          <a:effectRef idx="1">
+            <a:schemeClr val="accent1"/>
+          </a:effectRef>
+          <a:fontRef idx="minor">
+            <a:schemeClr val="tx1"/>
+          </a:fontRef>
+        </p:style>
+      </p:cxnSp>
+      <p:sp>
+        <p:nvSpPr>
+          <p:cNvPr id="9" name="TextBox 8"/>
+          <p:cNvSpPr txBox="1"/>
+          <p:nvPr/>
+        </p:nvSpPr>
+        <p:spPr>
+          <a:xfrm>
+            <a:off x="841248" y="6473952"/>
+            <a:ext cx="7315200" cy="274320"/>
+          </a:xfrm>
+          <a:prstGeom prst="rect">
+            <a:avLst/>
+          </a:prstGeom>
+          <a:noFill/>
+        </p:spPr>
+        <p:txBody>
+          <a:bodyPr wrap="square" anchor="t" lIns="0" rIns="0" tIns="0" bIns="0">
+            <a:spAutoFit/>
+          </a:bodyPr>
+          <a:lstStyle/>
+          <a:p>
+            <a:pPr algn="l">
+              <a:lnSpc>
+                <a:spcPct val="106000"/>
+              </a:lnSpc>
+              <a:spcBef>
+                <a:spcPts val="0"/>
+              </a:spcBef>
+              <a:spcAft>
+                <a:spcPts val="0"/>
+              </a:spcAft>
+            </a:pPr>
+            <a:r>
+              <a:rPr sz="950" b="0">
+                <a:solidFill>
+                  <a:srgbClr val="8A9099"/>
+                </a:solidFill>
+                <a:latin typeface="Red Hat Text"/>
+              </a:rPr>
+              <a:t>CONFIDENTIAL</a:t>
+            </a:r>
+          </a:p>
+        </p:txBody>
+      </p:sp>
+      <p:sp>
+        <p:nvSpPr>
+          <p:cNvPr id="10" name="TextBox 9"/>
+          <p:cNvSpPr txBox="1"/>
+          <p:nvPr/>
+        </p:nvSpPr>
+        <p:spPr>
+          <a:xfrm>
+            <a:off x="10801807" y="6473952"/>
+            <a:ext cx="548640" cy="274320"/>
+          </a:xfrm>
+          <a:prstGeom prst="rect">
+            <a:avLst/>
+          </a:prstGeom>
+          <a:noFill/>
+        </p:spPr>
+        <p:txBody>
+          <a:bodyPr wrap="square" anchor="t" lIns="0" rIns="0" tIns="0" bIns="0">
+            <a:spAutoFit/>
+          </a:bodyPr>
+          <a:lstStyle/>
+          <a:p>
+            <a:pPr algn="r">
+              <a:lnSpc>
+                <a:spcPct val="106000"/>
+              </a:lnSpc>
+              <a:spcBef>
+                <a:spcPts val="0"/>
+              </a:spcBef>
+              <a:spcAft>
+                <a:spcPts val="0"/>
+              </a:spcAft>
+            </a:pPr>
+            <a:r>
+              <a:rPr sz="950" b="0">
+                <a:solidFill>
+                  <a:srgbClr val="8A9099"/>
+                </a:solidFill>
+                <a:latin typeface="Red Hat Text"/>
+              </a:rPr>
+              <a:t>10</a:t>
+            </a:r>
+          </a:p>
+        </p:txBody>
+      </p:sp>
+    </p:spTree>
+  </p:cSld>
+  <p:clrMapOvr>
+    <a:masterClrMapping/>
+  </p:clrMapOvr>
+</p:sld>
+</file>
+
+<file path=ppt/slides/slide12.xml><?xml version="1.0" encoding="utf-8"?>
+<p:sld xmlns:a="http://schemas.openxmlformats.org/drawingml/2006/main" xmlns:p="http://schemas.openxmlformats.org/presentationml/2006/main" xmlns:r="http://schemas.openxmlformats.org/officeDocument/2006/relationships">
+  <p:cSld>
+    <p:spTree>
+      <p:nvGrpSpPr>
+        <p:cNvPr id="1" name=""/>
+        <p:cNvGrpSpPr/>
+        <p:nvPr/>
+      </p:nvGrpSpPr>
+      <p:grpSpPr/>
+      <p:pic>
+        <p:nvPicPr>
+          <p:cNvPr id="2" name="Picture 1" descr="redhat_logo.jpg"/>
+          <p:cNvPicPr>
+            <a:picLocks noChangeAspect="1"/>
+          </p:cNvPicPr>
+          <p:nvPr/>
+        </p:nvPicPr>
+        <p:blipFill>
+          <a:blip r:embed="rId2"/>
+          <a:stretch>
+            <a:fillRect/>
+          </a:stretch>
+        </p:blipFill>
+        <p:spPr>
+          <a:xfrm>
+            <a:off x="10326319" y="475488"/>
+            <a:ext cx="1024128" cy="242248"/>
+          </a:xfrm>
+          <a:prstGeom prst="rect">
+            <a:avLst/>
+          </a:prstGeom>
+        </p:spPr>
+      </p:pic>
+      <p:sp>
+        <p:nvSpPr>
+          <p:cNvPr id="3" name="TextBox 2"/>
+          <p:cNvSpPr txBox="1"/>
+          <p:nvPr/>
+        </p:nvSpPr>
+        <p:spPr>
+          <a:xfrm>
+            <a:off x="841248" y="548640"/>
+            <a:ext cx="8595360" cy="274320"/>
+          </a:xfrm>
+          <a:prstGeom prst="rect">
+            <a:avLst/>
+          </a:prstGeom>
+          <a:noFill/>
+        </p:spPr>
+        <p:txBody>
+          <a:bodyPr wrap="square" anchor="t" lIns="0" rIns="0" tIns="0" bIns="0">
+            <a:spAutoFit/>
+          </a:bodyPr>
+          <a:lstStyle/>
+          <a:p>
+            <a:pPr algn="l">
+              <a:lnSpc>
+                <a:spcPct val="106000"/>
+              </a:lnSpc>
+              <a:spcBef>
+                <a:spcPts val="0"/>
+              </a:spcBef>
+              <a:spcAft>
+                <a:spcPts val="0"/>
+              </a:spcAft>
+            </a:pPr>
+            <a:r>
+              <a:rPr sz="1250" b="1" spc="220">
+                <a:solidFill>
+                  <a:srgbClr val="EE0000"/>
+                </a:solidFill>
+                <a:latin typeface="Red Hat Display"/>
+              </a:rPr>
+              <a:t>M07 · PIPELINES FUNDAMENTALS &amp; TASK LIBRARIES</a:t>
+            </a:r>
+          </a:p>
+        </p:txBody>
+      </p:sp>
+      <p:sp>
+        <p:nvSpPr>
+          <p:cNvPr id="4" name="TextBox 3"/>
+          <p:cNvSpPr txBox="1"/>
+          <p:nvPr/>
+        </p:nvSpPr>
+        <p:spPr>
+          <a:xfrm>
+            <a:off x="841248" y="877824"/>
+            <a:ext cx="10515600" cy="548640"/>
+          </a:xfrm>
+          <a:prstGeom prst="rect">
+            <a:avLst/>
+          </a:prstGeom>
+          <a:noFill/>
+        </p:spPr>
+        <p:txBody>
+          <a:bodyPr wrap="none" anchor="t" lIns="0" rIns="0" tIns="0" bIns="0">
+            <a:spAutoFit/>
+          </a:bodyPr>
+          <a:lstStyle/>
+          <a:p>
+            <a:pPr algn="l">
+              <a:lnSpc>
+                <a:spcPct val="100000"/>
+              </a:lnSpc>
+              <a:spcBef>
+                <a:spcPts val="0"/>
+              </a:spcBef>
+              <a:spcAft>
+                <a:spcPts val="0"/>
+              </a:spcAft>
+            </a:pPr>
+            <a:r>
+              <a:rPr sz="2500" b="1">
+                <a:solidFill>
+                  <a:srgbClr val="1A1A1A"/>
+                </a:solidFill>
+                <a:latin typeface="Red Hat Display"/>
+              </a:rPr>
+              <a:t>What you built</a:t>
+            </a:r>
+          </a:p>
+        </p:txBody>
+      </p:sp>
+      <p:cxnSp>
+        <p:nvCxnSpPr>
+          <p:cNvPr id="5" name="Connector 4"/>
+          <p:cNvCxnSpPr/>
+          <p:nvPr/>
+        </p:nvCxnSpPr>
+        <p:spPr>
+          <a:xfrm>
+            <a:off x="841248" y="1554480"/>
+            <a:ext cx="1371600" cy="0"/>
+          </a:xfrm>
+          <a:prstGeom prst="bentConnector3">
+            <a:avLst/>
+          </a:prstGeom>
+          <a:ln w="31750">
+            <a:solidFill>
+              <a:srgbClr val="EE0000"/>
+            </a:solidFill>
+          </a:ln>
+          <a:effectLst/>
+        </p:spPr>
+        <p:style>
+          <a:lnRef idx="2">
+            <a:schemeClr val="accent1"/>
+          </a:lnRef>
+          <a:fillRef idx="0">
+            <a:schemeClr val="accent1"/>
+          </a:fillRef>
+          <a:effectRef idx="1">
+            <a:schemeClr val="accent1"/>
+          </a:effectRef>
+          <a:fontRef idx="minor">
+            <a:schemeClr val="tx1"/>
+          </a:fontRef>
+        </p:style>
+      </p:cxnSp>
+      <p:sp>
+        <p:nvSpPr>
+          <p:cNvPr id="6" name="Rounded Rectangle 5"/>
+          <p:cNvSpPr/>
+          <p:nvPr/>
+        </p:nvSpPr>
+        <p:spPr>
+          <a:xfrm>
+            <a:off x="841248" y="2331720"/>
+            <a:ext cx="10509199" cy="3794760"/>
+          </a:xfrm>
+          <a:prstGeom prst="roundRect">
+            <a:avLst>
+              <a:gd name="adj" fmla="val 4000"/>
+            </a:avLst>
+          </a:prstGeom>
+          <a:solidFill>
+            <a:srgbClr val="FFFFFF"/>
+          </a:solidFill>
+          <a:ln w="15240">
+            <a:solidFill>
+              <a:srgbClr val="DDE1E6"/>
+            </a:solidFill>
+          </a:ln>
+          <a:effectLst/>
+        </p:spPr>
+        <p:style>
+          <a:lnRef idx="1">
+            <a:schemeClr val="accent1"/>
+          </a:lnRef>
+          <a:fillRef idx="3">
+            <a:schemeClr val="accent1"/>
+          </a:fillRef>
+          <a:effectRef idx="2">
+            <a:schemeClr val="accent1"/>
+          </a:effectRef>
+          <a:fontRef idx="minor">
+            <a:schemeClr val="lt1"/>
+          </a:fontRef>
+        </p:style>
+        <p:txBody>
+          <a:bodyPr rtlCol="0" anchor="ctr"/>
+          <a:lstStyle/>
+          <a:p>
+            <a:pPr algn="ctr"/>
+          </a:p>
+        </p:txBody>
+      </p:sp>
+      <p:pic>
+        <p:nvPicPr>
+          <p:cNvPr id="7" name="Picture 6" descr="03-what-you-built.png"/>
+          <p:cNvPicPr>
+            <a:picLocks noChangeAspect="1"/>
+          </p:cNvPicPr>
+          <p:nvPr/>
+        </p:nvPicPr>
+        <p:blipFill>
+          <a:blip r:embed="rId3"/>
+          <a:stretch>
+            <a:fillRect/>
+          </a:stretch>
+        </p:blipFill>
+        <p:spPr>
+          <a:xfrm>
+            <a:off x="1042416" y="2968900"/>
+            <a:ext cx="10106863" cy="2520399"/>
+          </a:xfrm>
+          <a:prstGeom prst="rect">
+            <a:avLst/>
+          </a:prstGeom>
+        </p:spPr>
+      </p:pic>
+      <p:cxnSp>
+        <p:nvCxnSpPr>
+          <p:cNvPr id="8" name="Connector 7"/>
+          <p:cNvCxnSpPr/>
+          <p:nvPr/>
+        </p:nvCxnSpPr>
+        <p:spPr>
+          <a:xfrm>
+            <a:off x="841248" y="6437376"/>
+            <a:ext cx="10509199" cy="0"/>
+          </a:xfrm>
+          <a:prstGeom prst="bentConnector3">
+            <a:avLst/>
+          </a:prstGeom>
+          <a:ln w="12700">
+            <a:solidFill>
+              <a:srgbClr val="DDE1E6"/>
+            </a:solidFill>
+          </a:ln>
+          <a:effectLst/>
+        </p:spPr>
+        <p:style>
+          <a:lnRef idx="2">
+            <a:schemeClr val="accent1"/>
+          </a:lnRef>
+          <a:fillRef idx="0">
+            <a:schemeClr val="accent1"/>
+          </a:fillRef>
+          <a:effectRef idx="1">
+            <a:schemeClr val="accent1"/>
+          </a:effectRef>
+          <a:fontRef idx="minor">
+            <a:schemeClr val="tx1"/>
+          </a:fontRef>
+        </p:style>
+      </p:cxnSp>
+      <p:sp>
+        <p:nvSpPr>
+          <p:cNvPr id="9" name="TextBox 8"/>
+          <p:cNvSpPr txBox="1"/>
+          <p:nvPr/>
+        </p:nvSpPr>
+        <p:spPr>
+          <a:xfrm>
+            <a:off x="841248" y="6473952"/>
+            <a:ext cx="7315200" cy="274320"/>
+          </a:xfrm>
+          <a:prstGeom prst="rect">
+            <a:avLst/>
+          </a:prstGeom>
+          <a:noFill/>
+        </p:spPr>
+        <p:txBody>
+          <a:bodyPr wrap="square" anchor="t" lIns="0" rIns="0" tIns="0" bIns="0">
+            <a:spAutoFit/>
+          </a:bodyPr>
+          <a:lstStyle/>
+          <a:p>
+            <a:pPr algn="l">
+              <a:lnSpc>
+                <a:spcPct val="106000"/>
+              </a:lnSpc>
+              <a:spcBef>
+                <a:spcPts val="0"/>
+              </a:spcBef>
+              <a:spcAft>
+                <a:spcPts val="0"/>
+              </a:spcAft>
+            </a:pPr>
+            <a:r>
+              <a:rPr sz="950" b="0">
+                <a:solidFill>
+                  <a:srgbClr val="8A9099"/>
+                </a:solidFill>
+                <a:latin typeface="Red Hat Text"/>
+              </a:rPr>
+              <a:t>CONFIDENTIAL</a:t>
+            </a:r>
+          </a:p>
+        </p:txBody>
+      </p:sp>
+      <p:sp>
+        <p:nvSpPr>
+          <p:cNvPr id="10" name="TextBox 9"/>
+          <p:cNvSpPr txBox="1"/>
+          <p:nvPr/>
+        </p:nvSpPr>
+        <p:spPr>
+          <a:xfrm>
+            <a:off x="10801807" y="6473952"/>
+            <a:ext cx="548640" cy="274320"/>
+          </a:xfrm>
+          <a:prstGeom prst="rect">
+            <a:avLst/>
+          </a:prstGeom>
+          <a:noFill/>
+        </p:spPr>
+        <p:txBody>
+          <a:bodyPr wrap="square" anchor="t" lIns="0" rIns="0" tIns="0" bIns="0">
+            <a:spAutoFit/>
+          </a:bodyPr>
+          <a:lstStyle/>
+          <a:p>
+            <a:pPr algn="r">
+              <a:lnSpc>
+                <a:spcPct val="106000"/>
+              </a:lnSpc>
+              <a:spcBef>
+                <a:spcPts val="0"/>
+              </a:spcBef>
+              <a:spcAft>
+                <a:spcPts val="0"/>
+              </a:spcAft>
+            </a:pPr>
+            <a:r>
+              <a:rPr sz="950" b="0">
+                <a:solidFill>
+                  <a:srgbClr val="8A9099"/>
+                </a:solidFill>
+                <a:latin typeface="Red Hat Text"/>
+              </a:rPr>
+              <a:t>11</a:t>
+            </a:r>
+          </a:p>
+        </p:txBody>
+      </p:sp>
+    </p:spTree>
+  </p:cSld>
+  <p:clrMapOvr>
+    <a:masterClrMapping/>
+  </p:clrMapOvr>
+</p:sld>
+</file>
+
 <file path=ppt/slides/slide2.xml><?xml version="1.0" encoding="utf-8"?>
 <p:sld xmlns:a="http://schemas.openxmlformats.org/drawingml/2006/main" xmlns:p="http://schemas.openxmlformats.org/presentationml/2006/main" xmlns:r="http://schemas.openxmlformats.org/officeDocument/2006/relationships">
   <p:cSld>
@@ -4423,11 +5734,11 @@
         <p:spPr>
           <a:xfrm>
             <a:off x="841248" y="2670048"/>
-            <a:ext cx="5715000" cy="530352"/>
+            <a:ext cx="5138928" cy="786384"/>
           </a:xfrm>
           <a:prstGeom prst="roundRect">
             <a:avLst>
-              <a:gd name="adj" fmla="val 6000"/>
+              <a:gd name="adj" fmla="val 7000"/>
             </a:avLst>
           </a:prstGeom>
           <a:solidFill>
@@ -4462,9 +5773,55 @@
           </a:p>
         </p:txBody>
       </p:sp>
+      <p:sp>
+        <p:nvSpPr>
+          <p:cNvPr id="8" name="Rounded Rectangle 7"/>
+          <p:cNvSpPr/>
+          <p:nvPr/>
+        </p:nvSpPr>
+        <p:spPr>
+          <a:xfrm>
+            <a:off x="987552" y="2807208"/>
+            <a:ext cx="512064" cy="512064"/>
+          </a:xfrm>
+          <a:prstGeom prst="roundRect">
+            <a:avLst>
+              <a:gd name="adj" fmla="val 26000"/>
+            </a:avLst>
+          </a:prstGeom>
+          <a:solidFill>
+            <a:srgbClr val="EE0000"/>
+          </a:solidFill>
+          <a:ln>
+            <a:noFill/>
+          </a:ln>
+          <a:effectLst/>
+        </p:spPr>
+        <p:style>
+          <a:lnRef idx="1">
+            <a:schemeClr val="accent1"/>
+          </a:lnRef>
+          <a:fillRef idx="3">
+            <a:schemeClr val="accent1"/>
+          </a:fillRef>
+          <a:effectRef idx="2">
+            <a:schemeClr val="accent1"/>
+          </a:effectRef>
+          <a:fontRef idx="minor">
+            <a:schemeClr val="lt1"/>
+          </a:fontRef>
+        </p:style>
+        <p:txBody>
+          <a:bodyPr rtlCol="0" anchor="ctr"/>
+          <a:lstStyle/>
+          <a:p>
+            <a:pPr algn="ctr"/>
+          </a:p>
+        </p:txBody>
+      </p:sp>
       <p:pic>
         <p:nvPicPr>
-          <p:cNvPr id="8" name="Picture 7" descr="check_steel.png"/>
+          <p:cNvPr id="9" name="Picture 8" descr="check_white.png"/>
           <p:cNvPicPr>
             <a:picLocks noChangeAspect="1"/>
           </p:cNvPicPr>
@@ -4478,8 +5835,8 @@
         </p:blipFill>
         <p:spPr>
           <a:xfrm>
-            <a:off x="987552" y="2816352"/>
-            <a:ext cx="237744" cy="237744"/>
+            <a:off x="1110447" y="2930103"/>
+            <a:ext cx="266273" cy="266273"/>
           </a:xfrm>
           <a:prstGeom prst="rect">
             <a:avLst/>
@@ -4488,14 +5845,14 @@
       </p:pic>
       <p:sp>
         <p:nvSpPr>
-          <p:cNvPr id="9" name="TextBox 8"/>
+          <p:cNvPr id="10" name="TextBox 9"/>
           <p:cNvSpPr txBox="1"/>
           <p:nvPr/>
         </p:nvSpPr>
         <p:spPr>
           <a:xfrm>
-            <a:off x="1353312" y="2670048"/>
-            <a:ext cx="5029200" cy="530352"/>
+            <a:off x="1627632" y="2670048"/>
+            <a:ext cx="4206240" cy="786384"/>
           </a:xfrm>
           <a:prstGeom prst="rect">
             <a:avLst/>
@@ -4520,7 +5877,7 @@
               </a:spcAft>
             </a:pPr>
             <a:r>
-              <a:rPr sz="1200" b="0">
+              <a:rPr sz="1150" b="0">
                 <a:solidFill>
                   <a:srgbClr val="1A1A1A"/>
                 </a:solidFill>
@@ -4533,18 +5890,18 @@
       </p:sp>
       <p:sp>
         <p:nvSpPr>
-          <p:cNvPr id="10" name="Rounded Rectangle 9"/>
+          <p:cNvPr id="11" name="Rounded Rectangle 10"/>
           <p:cNvSpPr/>
           <p:nvPr/>
         </p:nvSpPr>
         <p:spPr>
           <a:xfrm>
-            <a:off x="841248" y="3273552"/>
-            <a:ext cx="5715000" cy="530352"/>
+            <a:off x="6254496" y="2670048"/>
+            <a:ext cx="5138928" cy="786384"/>
           </a:xfrm>
           <a:prstGeom prst="roundRect">
             <a:avLst>
-              <a:gd name="adj" fmla="val 6000"/>
+              <a:gd name="adj" fmla="val 7000"/>
             </a:avLst>
           </a:prstGeom>
           <a:solidFill>
@@ -4579,9 +5936,55 @@
           </a:p>
         </p:txBody>
       </p:sp>
+      <p:sp>
+        <p:nvSpPr>
+          <p:cNvPr id="12" name="Rounded Rectangle 11"/>
+          <p:cNvSpPr/>
+          <p:nvPr/>
+        </p:nvSpPr>
+        <p:spPr>
+          <a:xfrm>
+            <a:off x="6400800" y="2807208"/>
+            <a:ext cx="512064" cy="512064"/>
+          </a:xfrm>
+          <a:prstGeom prst="roundRect">
+            <a:avLst>
+              <a:gd name="adj" fmla="val 26000"/>
+            </a:avLst>
+          </a:prstGeom>
+          <a:solidFill>
+            <a:srgbClr val="EE0000"/>
+          </a:solidFill>
+          <a:ln>
+            <a:noFill/>
+          </a:ln>
+          <a:effectLst/>
+        </p:spPr>
+        <p:style>
+          <a:lnRef idx="1">
+            <a:schemeClr val="accent1"/>
+          </a:lnRef>
+          <a:fillRef idx="3">
+            <a:schemeClr val="accent1"/>
+          </a:fillRef>
+          <a:effectRef idx="2">
+            <a:schemeClr val="accent1"/>
+          </a:effectRef>
+          <a:fontRef idx="minor">
+            <a:schemeClr val="lt1"/>
+          </a:fontRef>
+        </p:style>
+        <p:txBody>
+          <a:bodyPr rtlCol="0" anchor="ctr"/>
+          <a:lstStyle/>
+          <a:p>
+            <a:pPr algn="ctr"/>
+          </a:p>
+        </p:txBody>
+      </p:sp>
       <p:pic>
         <p:nvPicPr>
-          <p:cNvPr id="11" name="Picture 10" descr="check_steel.png"/>
+          <p:cNvPr id="13" name="Picture 12" descr="check_white.png"/>
           <p:cNvPicPr>
             <a:picLocks noChangeAspect="1"/>
           </p:cNvPicPr>
@@ -4595,8 +5998,8 @@
         </p:blipFill>
         <p:spPr>
           <a:xfrm>
-            <a:off x="987552" y="3419856"/>
-            <a:ext cx="237744" cy="237744"/>
+            <a:off x="6523695" y="2930103"/>
+            <a:ext cx="266273" cy="266273"/>
           </a:xfrm>
           <a:prstGeom prst="rect">
             <a:avLst/>
@@ -4605,14 +6008,14 @@
       </p:pic>
       <p:sp>
         <p:nvSpPr>
-          <p:cNvPr id="12" name="TextBox 11"/>
+          <p:cNvPr id="14" name="TextBox 13"/>
           <p:cNvSpPr txBox="1"/>
           <p:nvPr/>
         </p:nvSpPr>
         <p:spPr>
           <a:xfrm>
-            <a:off x="1353312" y="3273552"/>
-            <a:ext cx="5029200" cy="530352"/>
+            <a:off x="7040880" y="2670048"/>
+            <a:ext cx="4206240" cy="786384"/>
           </a:xfrm>
           <a:prstGeom prst="rect">
             <a:avLst/>
@@ -4637,7 +6040,7 @@
               </a:spcAft>
             </a:pPr>
             <a:r>
-              <a:rPr sz="1200" b="0">
+              <a:rPr sz="1150" b="0">
                 <a:solidFill>
                   <a:srgbClr val="1A1A1A"/>
                 </a:solidFill>
@@ -4650,18 +6053,18 @@
       </p:sp>
       <p:sp>
         <p:nvSpPr>
-          <p:cNvPr id="13" name="Rounded Rectangle 12"/>
+          <p:cNvPr id="15" name="Rounded Rectangle 14"/>
           <p:cNvSpPr/>
           <p:nvPr/>
         </p:nvSpPr>
         <p:spPr>
           <a:xfrm>
-            <a:off x="841248" y="3877056"/>
-            <a:ext cx="5715000" cy="530352"/>
+            <a:off x="841248" y="3602736"/>
+            <a:ext cx="5138928" cy="786384"/>
           </a:xfrm>
           <a:prstGeom prst="roundRect">
             <a:avLst>
-              <a:gd name="adj" fmla="val 6000"/>
+              <a:gd name="adj" fmla="val 7000"/>
             </a:avLst>
           </a:prstGeom>
           <a:solidFill>
@@ -4696,9 +6099,55 @@
           </a:p>
         </p:txBody>
       </p:sp>
+      <p:sp>
+        <p:nvSpPr>
+          <p:cNvPr id="16" name="Rounded Rectangle 15"/>
+          <p:cNvSpPr/>
+          <p:nvPr/>
+        </p:nvSpPr>
+        <p:spPr>
+          <a:xfrm>
+            <a:off x="987552" y="3739896"/>
+            <a:ext cx="512064" cy="512064"/>
+          </a:xfrm>
+          <a:prstGeom prst="roundRect">
+            <a:avLst>
+              <a:gd name="adj" fmla="val 26000"/>
+            </a:avLst>
+          </a:prstGeom>
+          <a:solidFill>
+            <a:srgbClr val="EE0000"/>
+          </a:solidFill>
+          <a:ln>
+            <a:noFill/>
+          </a:ln>
+          <a:effectLst/>
+        </p:spPr>
+        <p:style>
+          <a:lnRef idx="1">
+            <a:schemeClr val="accent1"/>
+          </a:lnRef>
+          <a:fillRef idx="3">
+            <a:schemeClr val="accent1"/>
+          </a:fillRef>
+          <a:effectRef idx="2">
+            <a:schemeClr val="accent1"/>
+          </a:effectRef>
+          <a:fontRef idx="minor">
+            <a:schemeClr val="lt1"/>
+          </a:fontRef>
+        </p:style>
+        <p:txBody>
+          <a:bodyPr rtlCol="0" anchor="ctr"/>
+          <a:lstStyle/>
+          <a:p>
+            <a:pPr algn="ctr"/>
+          </a:p>
+        </p:txBody>
+      </p:sp>
       <p:pic>
         <p:nvPicPr>
-          <p:cNvPr id="14" name="Picture 13" descr="check_steel.png"/>
+          <p:cNvPr id="17" name="Picture 16" descr="check_white.png"/>
           <p:cNvPicPr>
             <a:picLocks noChangeAspect="1"/>
           </p:cNvPicPr>
@@ -4712,8 +6161,8 @@
         </p:blipFill>
         <p:spPr>
           <a:xfrm>
-            <a:off x="987552" y="4023360"/>
-            <a:ext cx="237744" cy="237744"/>
+            <a:off x="1110447" y="3862791"/>
+            <a:ext cx="266273" cy="266273"/>
           </a:xfrm>
           <a:prstGeom prst="rect">
             <a:avLst/>
@@ -4722,14 +6171,14 @@
       </p:pic>
       <p:sp>
         <p:nvSpPr>
-          <p:cNvPr id="15" name="TextBox 14"/>
+          <p:cNvPr id="18" name="TextBox 17"/>
           <p:cNvSpPr txBox="1"/>
           <p:nvPr/>
         </p:nvSpPr>
         <p:spPr>
           <a:xfrm>
-            <a:off x="1353312" y="3877056"/>
-            <a:ext cx="5029200" cy="530352"/>
+            <a:off x="1627632" y="3602736"/>
+            <a:ext cx="4206240" cy="786384"/>
           </a:xfrm>
           <a:prstGeom prst="rect">
             <a:avLst/>
@@ -4754,7 +6203,7 @@
               </a:spcAft>
             </a:pPr>
             <a:r>
-              <a:rPr sz="1200" b="0">
+              <a:rPr sz="1150" b="0">
                 <a:solidFill>
                   <a:srgbClr val="1A1A1A"/>
                 </a:solidFill>
@@ -4767,18 +6216,18 @@
       </p:sp>
       <p:sp>
         <p:nvSpPr>
-          <p:cNvPr id="16" name="Rounded Rectangle 15"/>
+          <p:cNvPr id="19" name="Rounded Rectangle 18"/>
           <p:cNvSpPr/>
           <p:nvPr/>
         </p:nvSpPr>
         <p:spPr>
           <a:xfrm>
-            <a:off x="841248" y="4480560"/>
-            <a:ext cx="5715000" cy="530352"/>
+            <a:off x="6254496" y="3602736"/>
+            <a:ext cx="5138928" cy="786384"/>
           </a:xfrm>
           <a:prstGeom prst="roundRect">
             <a:avLst>
-              <a:gd name="adj" fmla="val 6000"/>
+              <a:gd name="adj" fmla="val 7000"/>
             </a:avLst>
           </a:prstGeom>
           <a:solidFill>
@@ -4813,9 +6262,55 @@
           </a:p>
         </p:txBody>
       </p:sp>
+      <p:sp>
+        <p:nvSpPr>
+          <p:cNvPr id="20" name="Rounded Rectangle 19"/>
+          <p:cNvSpPr/>
+          <p:nvPr/>
+        </p:nvSpPr>
+        <p:spPr>
+          <a:xfrm>
+            <a:off x="6400800" y="3739896"/>
+            <a:ext cx="512064" cy="512064"/>
+          </a:xfrm>
+          <a:prstGeom prst="roundRect">
+            <a:avLst>
+              <a:gd name="adj" fmla="val 26000"/>
+            </a:avLst>
+          </a:prstGeom>
+          <a:solidFill>
+            <a:srgbClr val="EE0000"/>
+          </a:solidFill>
+          <a:ln>
+            <a:noFill/>
+          </a:ln>
+          <a:effectLst/>
+        </p:spPr>
+        <p:style>
+          <a:lnRef idx="1">
+            <a:schemeClr val="accent1"/>
+          </a:lnRef>
+          <a:fillRef idx="3">
+            <a:schemeClr val="accent1"/>
+          </a:fillRef>
+          <a:effectRef idx="2">
+            <a:schemeClr val="accent1"/>
+          </a:effectRef>
+          <a:fontRef idx="minor">
+            <a:schemeClr val="lt1"/>
+          </a:fontRef>
+        </p:style>
+        <p:txBody>
+          <a:bodyPr rtlCol="0" anchor="ctr"/>
+          <a:lstStyle/>
+          <a:p>
+            <a:pPr algn="ctr"/>
+          </a:p>
+        </p:txBody>
+      </p:sp>
       <p:pic>
         <p:nvPicPr>
-          <p:cNvPr id="17" name="Picture 16" descr="check_steel.png"/>
+          <p:cNvPr id="21" name="Picture 20" descr="check_white.png"/>
           <p:cNvPicPr>
             <a:picLocks noChangeAspect="1"/>
           </p:cNvPicPr>
@@ -4829,8 +6324,8 @@
         </p:blipFill>
         <p:spPr>
           <a:xfrm>
-            <a:off x="987552" y="4626864"/>
-            <a:ext cx="237744" cy="237744"/>
+            <a:off x="6523695" y="3862791"/>
+            <a:ext cx="266273" cy="266273"/>
           </a:xfrm>
           <a:prstGeom prst="rect">
             <a:avLst/>
@@ -4839,14 +6334,14 @@
       </p:pic>
       <p:sp>
         <p:nvSpPr>
-          <p:cNvPr id="18" name="TextBox 17"/>
+          <p:cNvPr id="22" name="TextBox 21"/>
           <p:cNvSpPr txBox="1"/>
           <p:nvPr/>
         </p:nvSpPr>
         <p:spPr>
           <a:xfrm>
-            <a:off x="1353312" y="4480560"/>
-            <a:ext cx="5029200" cy="530352"/>
+            <a:off x="7040880" y="3602736"/>
+            <a:ext cx="4206240" cy="786384"/>
           </a:xfrm>
           <a:prstGeom prst="rect">
             <a:avLst/>
@@ -4871,7 +6366,7 @@
               </a:spcAft>
             </a:pPr>
             <a:r>
-              <a:rPr sz="1200" b="0">
+              <a:rPr sz="1150" b="0">
                 <a:solidFill>
                   <a:srgbClr val="1A1A1A"/>
                 </a:solidFill>
@@ -4884,18 +6379,18 @@
       </p:sp>
       <p:sp>
         <p:nvSpPr>
-          <p:cNvPr id="19" name="Rounded Rectangle 18"/>
+          <p:cNvPr id="23" name="Rounded Rectangle 22"/>
           <p:cNvSpPr/>
           <p:nvPr/>
         </p:nvSpPr>
         <p:spPr>
           <a:xfrm>
-            <a:off x="841248" y="5084064"/>
-            <a:ext cx="5715000" cy="530352"/>
+            <a:off x="841248" y="4535424"/>
+            <a:ext cx="5138928" cy="786384"/>
           </a:xfrm>
           <a:prstGeom prst="roundRect">
             <a:avLst>
-              <a:gd name="adj" fmla="val 6000"/>
+              <a:gd name="adj" fmla="val 7000"/>
             </a:avLst>
           </a:prstGeom>
           <a:solidFill>
@@ -4930,9 +6425,55 @@
           </a:p>
         </p:txBody>
       </p:sp>
+      <p:sp>
+        <p:nvSpPr>
+          <p:cNvPr id="24" name="Rounded Rectangle 23"/>
+          <p:cNvSpPr/>
+          <p:nvPr/>
+        </p:nvSpPr>
+        <p:spPr>
+          <a:xfrm>
+            <a:off x="987552" y="4672584"/>
+            <a:ext cx="512064" cy="512064"/>
+          </a:xfrm>
+          <a:prstGeom prst="roundRect">
+            <a:avLst>
+              <a:gd name="adj" fmla="val 26000"/>
+            </a:avLst>
+          </a:prstGeom>
+          <a:solidFill>
+            <a:srgbClr val="EE0000"/>
+          </a:solidFill>
+          <a:ln>
+            <a:noFill/>
+          </a:ln>
+          <a:effectLst/>
+        </p:spPr>
+        <p:style>
+          <a:lnRef idx="1">
+            <a:schemeClr val="accent1"/>
+          </a:lnRef>
+          <a:fillRef idx="3">
+            <a:schemeClr val="accent1"/>
+          </a:fillRef>
+          <a:effectRef idx="2">
+            <a:schemeClr val="accent1"/>
+          </a:effectRef>
+          <a:fontRef idx="minor">
+            <a:schemeClr val="lt1"/>
+          </a:fontRef>
+        </p:style>
+        <p:txBody>
+          <a:bodyPr rtlCol="0" anchor="ctr"/>
+          <a:lstStyle/>
+          <a:p>
+            <a:pPr algn="ctr"/>
+          </a:p>
+        </p:txBody>
+      </p:sp>
       <p:pic>
         <p:nvPicPr>
-          <p:cNvPr id="20" name="Picture 19" descr="check_steel.png"/>
+          <p:cNvPr id="25" name="Picture 24" descr="check_white.png"/>
           <p:cNvPicPr>
             <a:picLocks noChangeAspect="1"/>
           </p:cNvPicPr>
@@ -4946,8 +6487,8 @@
         </p:blipFill>
         <p:spPr>
           <a:xfrm>
-            <a:off x="987552" y="5230368"/>
-            <a:ext cx="237744" cy="237744"/>
+            <a:off x="1110447" y="4795479"/>
+            <a:ext cx="266273" cy="266273"/>
           </a:xfrm>
           <a:prstGeom prst="rect">
             <a:avLst/>
@@ -4956,14 +6497,14 @@
       </p:pic>
       <p:sp>
         <p:nvSpPr>
-          <p:cNvPr id="21" name="TextBox 20"/>
+          <p:cNvPr id="26" name="TextBox 25"/>
           <p:cNvSpPr txBox="1"/>
           <p:nvPr/>
         </p:nvSpPr>
         <p:spPr>
           <a:xfrm>
-            <a:off x="1353312" y="5084064"/>
-            <a:ext cx="5029200" cy="530352"/>
+            <a:off x="1627632" y="4535424"/>
+            <a:ext cx="4206240" cy="786384"/>
           </a:xfrm>
           <a:prstGeom prst="rect">
             <a:avLst/>
@@ -4988,221 +6529,13 @@
               </a:spcAft>
             </a:pPr>
             <a:r>
-              <a:rPr sz="1200" b="0">
+              <a:rPr sz="1150" b="0">
                 <a:solidFill>
                   <a:srgbClr val="1A1A1A"/>
                 </a:solidFill>
                 <a:latin typeface="Red Hat Text"/>
               </a:rPr>
               <a:t>A pipeline makes it reviewed and repeatable</a:t>
-            </a:r>
-          </a:p>
-        </p:txBody>
-      </p:sp>
-      <p:sp>
-        <p:nvSpPr>
-          <p:cNvPr id="22" name="Rounded Rectangle 21"/>
-          <p:cNvSpPr/>
-          <p:nvPr/>
-        </p:nvSpPr>
-        <p:spPr>
-          <a:xfrm>
-            <a:off x="6812280" y="2670048"/>
-            <a:ext cx="4538167" cy="2944368"/>
-          </a:xfrm>
-          <a:prstGeom prst="roundRect">
-            <a:avLst>
-              <a:gd name="adj" fmla="val 4000"/>
-            </a:avLst>
-          </a:prstGeom>
-          <a:solidFill>
-            <a:srgbClr val="FFFFFF"/>
-          </a:solidFill>
-          <a:ln w="15240">
-            <a:solidFill>
-              <a:srgbClr val="DDE1E6"/>
-            </a:solidFill>
-          </a:ln>
-          <a:effectLst/>
-        </p:spPr>
-        <p:style>
-          <a:lnRef idx="1">
-            <a:schemeClr val="accent1"/>
-          </a:lnRef>
-          <a:fillRef idx="3">
-            <a:schemeClr val="accent1"/>
-          </a:fillRef>
-          <a:effectRef idx="2">
-            <a:schemeClr val="accent1"/>
-          </a:effectRef>
-          <a:fontRef idx="minor">
-            <a:schemeClr val="lt1"/>
-          </a:fontRef>
-        </p:style>
-        <p:txBody>
-          <a:bodyPr rtlCol="0" anchor="ctr"/>
-          <a:lstStyle/>
-          <a:p>
-            <a:pPr algn="ctr"/>
-          </a:p>
-        </p:txBody>
-      </p:sp>
-      <p:sp>
-        <p:nvSpPr>
-          <p:cNvPr id="23" name="Rounded Rectangle 22"/>
-          <p:cNvSpPr/>
-          <p:nvPr/>
-        </p:nvSpPr>
-        <p:spPr>
-          <a:xfrm>
-            <a:off x="7013448" y="2871216"/>
-            <a:ext cx="1298448" cy="310896"/>
-          </a:xfrm>
-          <a:prstGeom prst="roundRect">
-            <a:avLst>
-              <a:gd name="adj" fmla="val 50000"/>
-            </a:avLst>
-          </a:prstGeom>
-          <a:solidFill>
-            <a:srgbClr val="FCECEC"/>
-          </a:solidFill>
-          <a:ln>
-            <a:noFill/>
-          </a:ln>
-          <a:effectLst/>
-        </p:spPr>
-        <p:style>
-          <a:lnRef idx="1">
-            <a:schemeClr val="accent1"/>
-          </a:lnRef>
-          <a:fillRef idx="3">
-            <a:schemeClr val="accent1"/>
-          </a:fillRef>
-          <a:effectRef idx="2">
-            <a:schemeClr val="accent1"/>
-          </a:effectRef>
-          <a:fontRef idx="minor">
-            <a:schemeClr val="lt1"/>
-          </a:fontRef>
-        </p:style>
-        <p:txBody>
-          <a:bodyPr rtlCol="0" anchor="ctr"/>
-          <a:lstStyle/>
-          <a:p>
-            <a:pPr algn="ctr"/>
-          </a:p>
-        </p:txBody>
-      </p:sp>
-      <p:sp>
-        <p:nvSpPr>
-          <p:cNvPr id="24" name="TextBox 23"/>
-          <p:cNvSpPr txBox="1"/>
-          <p:nvPr/>
-        </p:nvSpPr>
-        <p:spPr>
-          <a:xfrm>
-            <a:off x="7013448" y="2871216"/>
-            <a:ext cx="1298448" cy="310896"/>
-          </a:xfrm>
-          <a:prstGeom prst="rect">
-            <a:avLst/>
-          </a:prstGeom>
-          <a:noFill/>
-        </p:spPr>
-        <p:txBody>
-          <a:bodyPr wrap="none" anchor="ctr" lIns="0" rIns="0" tIns="0" bIns="0">
-            <a:spAutoFit/>
-          </a:bodyPr>
-          <a:lstStyle/>
-          <a:p>
-            <a:pPr algn="ctr">
-              <a:lnSpc>
-                <a:spcPct val="106000"/>
-              </a:lnSpc>
-              <a:spcBef>
-                <a:spcPts val="0"/>
-              </a:spcBef>
-              <a:spcAft>
-                <a:spcPts val="0"/>
-              </a:spcAft>
-            </a:pPr>
-            <a:r>
-              <a:rPr sz="850" b="1">
-                <a:solidFill>
-                  <a:srgbClr val="B80000"/>
-                </a:solidFill>
-                <a:latin typeface="Red Hat Display"/>
-              </a:rPr>
-              <a:t>MEDIA PASS</a:t>
-            </a:r>
-          </a:p>
-        </p:txBody>
-      </p:sp>
-      <p:pic>
-        <p:nvPicPr>
-          <p:cNvPr id="25" name="Picture 24" descr="eye_slate.png"/>
-          <p:cNvPicPr>
-            <a:picLocks noChangeAspect="1"/>
-          </p:cNvPicPr>
-          <p:nvPr/>
-        </p:nvPicPr>
-        <p:blipFill>
-          <a:blip r:embed="rId4"/>
-          <a:stretch>
-            <a:fillRect/>
-          </a:stretch>
-        </p:blipFill>
-        <p:spPr>
-          <a:xfrm>
-            <a:off x="8843619" y="3383280"/>
-            <a:ext cx="475488" cy="475488"/>
-          </a:xfrm>
-          <a:prstGeom prst="rect">
-            <a:avLst/>
-          </a:prstGeom>
-        </p:spPr>
-      </p:pic>
-      <p:sp>
-        <p:nvSpPr>
-          <p:cNvPr id="26" name="TextBox 25"/>
-          <p:cNvSpPr txBox="1"/>
-          <p:nvPr/>
-        </p:nvSpPr>
-        <p:spPr>
-          <a:xfrm>
-            <a:off x="7050024" y="3995928"/>
-            <a:ext cx="4062679" cy="1481328"/>
-          </a:xfrm>
-          <a:prstGeom prst="rect">
-            <a:avLst/>
-          </a:prstGeom>
-          <a:noFill/>
-        </p:spPr>
-        <p:txBody>
-          <a:bodyPr wrap="square" anchor="t" lIns="0" rIns="0" tIns="0" bIns="0">
-            <a:spAutoFit/>
-          </a:bodyPr>
-          <a:lstStyle/>
-          <a:p>
-            <a:pPr algn="l">
-              <a:lnSpc>
-                <a:spcPct val="120000"/>
-              </a:lnSpc>
-              <a:spcBef>
-                <a:spcPts val="0"/>
-              </a:spcBef>
-              <a:spcAft>
-                <a:spcPts val="0"/>
-              </a:spcAft>
-            </a:pPr>
-            <a:r>
-              <a:rPr sz="950" b="0">
-                <a:solidFill>
-                  <a:srgbClr val="8A9099"/>
-                </a:solidFill>
-                <a:latin typeface="Red Hat Text"/>
-              </a:rPr>
-              <a:t>A messy "shell history + stale wiki" box on the left, an arrow to a clean "pipeline in Git" box on the right.</a:t>
             </a:r>
           </a:p>
         </p:txBody>
@@ -5510,11 +6843,11 @@
         <p:spPr>
           <a:xfrm>
             <a:off x="841248" y="2395728"/>
-            <a:ext cx="5715000" cy="530352"/>
+            <a:ext cx="5138928" cy="786384"/>
           </a:xfrm>
           <a:prstGeom prst="roundRect">
             <a:avLst>
-              <a:gd name="adj" fmla="val 6000"/>
+              <a:gd name="adj" fmla="val 7000"/>
             </a:avLst>
           </a:prstGeom>
           <a:solidFill>
@@ -5549,9 +6882,55 @@
           </a:p>
         </p:txBody>
       </p:sp>
+      <p:sp>
+        <p:nvSpPr>
+          <p:cNvPr id="7" name="Rounded Rectangle 6"/>
+          <p:cNvSpPr/>
+          <p:nvPr/>
+        </p:nvSpPr>
+        <p:spPr>
+          <a:xfrm>
+            <a:off x="987552" y="2532888"/>
+            <a:ext cx="512064" cy="512064"/>
+          </a:xfrm>
+          <a:prstGeom prst="roundRect">
+            <a:avLst>
+              <a:gd name="adj" fmla="val 26000"/>
+            </a:avLst>
+          </a:prstGeom>
+          <a:solidFill>
+            <a:srgbClr val="EE0000"/>
+          </a:solidFill>
+          <a:ln>
+            <a:noFill/>
+          </a:ln>
+          <a:effectLst/>
+        </p:spPr>
+        <p:style>
+          <a:lnRef idx="1">
+            <a:schemeClr val="accent1"/>
+          </a:lnRef>
+          <a:fillRef idx="3">
+            <a:schemeClr val="accent1"/>
+          </a:fillRef>
+          <a:effectRef idx="2">
+            <a:schemeClr val="accent1"/>
+          </a:effectRef>
+          <a:fontRef idx="minor">
+            <a:schemeClr val="lt1"/>
+          </a:fontRef>
+        </p:style>
+        <p:txBody>
+          <a:bodyPr rtlCol="0" anchor="ctr"/>
+          <a:lstStyle/>
+          <a:p>
+            <a:pPr algn="ctr"/>
+          </a:p>
+        </p:txBody>
+      </p:sp>
       <p:pic>
         <p:nvPicPr>
-          <p:cNvPr id="7" name="Picture 6" descr="check_steel.png"/>
+          <p:cNvPr id="8" name="Picture 7" descr="check_white.png"/>
           <p:cNvPicPr>
             <a:picLocks noChangeAspect="1"/>
           </p:cNvPicPr>
@@ -5565,8 +6944,8 @@
         </p:blipFill>
         <p:spPr>
           <a:xfrm>
-            <a:off x="987552" y="2542032"/>
-            <a:ext cx="237744" cy="237744"/>
+            <a:off x="1110447" y="2655783"/>
+            <a:ext cx="266273" cy="266273"/>
           </a:xfrm>
           <a:prstGeom prst="rect">
             <a:avLst/>
@@ -5575,14 +6954,14 @@
       </p:pic>
       <p:sp>
         <p:nvSpPr>
-          <p:cNvPr id="8" name="TextBox 7"/>
+          <p:cNvPr id="9" name="TextBox 8"/>
           <p:cNvSpPr txBox="1"/>
           <p:nvPr/>
         </p:nvSpPr>
         <p:spPr>
           <a:xfrm>
-            <a:off x="1353312" y="2395728"/>
-            <a:ext cx="5029200" cy="530352"/>
+            <a:off x="1627632" y="2395728"/>
+            <a:ext cx="4206240" cy="786384"/>
           </a:xfrm>
           <a:prstGeom prst="rect">
             <a:avLst/>
@@ -5607,7 +6986,7 @@
               </a:spcAft>
             </a:pPr>
             <a:r>
-              <a:rPr sz="1200" b="0">
+              <a:rPr sz="1150" b="0">
                 <a:solidFill>
                   <a:srgbClr val="1A1A1A"/>
                 </a:solidFill>
@@ -5620,18 +6999,18 @@
       </p:sp>
       <p:sp>
         <p:nvSpPr>
-          <p:cNvPr id="9" name="Rounded Rectangle 8"/>
+          <p:cNvPr id="10" name="Rounded Rectangle 9"/>
           <p:cNvSpPr/>
           <p:nvPr/>
         </p:nvSpPr>
         <p:spPr>
           <a:xfrm>
-            <a:off x="841248" y="2999232"/>
-            <a:ext cx="5715000" cy="530352"/>
+            <a:off x="6254496" y="2395728"/>
+            <a:ext cx="5138928" cy="786384"/>
           </a:xfrm>
           <a:prstGeom prst="roundRect">
             <a:avLst>
-              <a:gd name="adj" fmla="val 6000"/>
+              <a:gd name="adj" fmla="val 7000"/>
             </a:avLst>
           </a:prstGeom>
           <a:solidFill>
@@ -5666,9 +7045,55 @@
           </a:p>
         </p:txBody>
       </p:sp>
+      <p:sp>
+        <p:nvSpPr>
+          <p:cNvPr id="11" name="Rounded Rectangle 10"/>
+          <p:cNvSpPr/>
+          <p:nvPr/>
+        </p:nvSpPr>
+        <p:spPr>
+          <a:xfrm>
+            <a:off x="6400800" y="2532888"/>
+            <a:ext cx="512064" cy="512064"/>
+          </a:xfrm>
+          <a:prstGeom prst="roundRect">
+            <a:avLst>
+              <a:gd name="adj" fmla="val 26000"/>
+            </a:avLst>
+          </a:prstGeom>
+          <a:solidFill>
+            <a:srgbClr val="EE0000"/>
+          </a:solidFill>
+          <a:ln>
+            <a:noFill/>
+          </a:ln>
+          <a:effectLst/>
+        </p:spPr>
+        <p:style>
+          <a:lnRef idx="1">
+            <a:schemeClr val="accent1"/>
+          </a:lnRef>
+          <a:fillRef idx="3">
+            <a:schemeClr val="accent1"/>
+          </a:fillRef>
+          <a:effectRef idx="2">
+            <a:schemeClr val="accent1"/>
+          </a:effectRef>
+          <a:fontRef idx="minor">
+            <a:schemeClr val="lt1"/>
+          </a:fontRef>
+        </p:style>
+        <p:txBody>
+          <a:bodyPr rtlCol="0" anchor="ctr"/>
+          <a:lstStyle/>
+          <a:p>
+            <a:pPr algn="ctr"/>
+          </a:p>
+        </p:txBody>
+      </p:sp>
       <p:pic>
         <p:nvPicPr>
-          <p:cNvPr id="10" name="Picture 9" descr="check_steel.png"/>
+          <p:cNvPr id="12" name="Picture 11" descr="check_white.png"/>
           <p:cNvPicPr>
             <a:picLocks noChangeAspect="1"/>
           </p:cNvPicPr>
@@ -5682,8 +7107,8 @@
         </p:blipFill>
         <p:spPr>
           <a:xfrm>
-            <a:off x="987552" y="3145536"/>
-            <a:ext cx="237744" cy="237744"/>
+            <a:off x="6523695" y="2655783"/>
+            <a:ext cx="266273" cy="266273"/>
           </a:xfrm>
           <a:prstGeom prst="rect">
             <a:avLst/>
@@ -5692,14 +7117,14 @@
       </p:pic>
       <p:sp>
         <p:nvSpPr>
-          <p:cNvPr id="11" name="TextBox 10"/>
+          <p:cNvPr id="13" name="TextBox 12"/>
           <p:cNvSpPr txBox="1"/>
           <p:nvPr/>
         </p:nvSpPr>
         <p:spPr>
           <a:xfrm>
-            <a:off x="1353312" y="2999232"/>
-            <a:ext cx="5029200" cy="530352"/>
+            <a:off x="7040880" y="2395728"/>
+            <a:ext cx="4206240" cy="786384"/>
           </a:xfrm>
           <a:prstGeom prst="rect">
             <a:avLst/>
@@ -5724,7 +7149,7 @@
               </a:spcAft>
             </a:pPr>
             <a:r>
-              <a:rPr sz="1200" b="0">
+              <a:rPr sz="1150" b="0">
                 <a:solidFill>
                   <a:srgbClr val="1A1A1A"/>
                 </a:solidFill>
@@ -5737,18 +7162,18 @@
       </p:sp>
       <p:sp>
         <p:nvSpPr>
-          <p:cNvPr id="12" name="Rounded Rectangle 11"/>
+          <p:cNvPr id="14" name="Rounded Rectangle 13"/>
           <p:cNvSpPr/>
           <p:nvPr/>
         </p:nvSpPr>
         <p:spPr>
           <a:xfrm>
-            <a:off x="841248" y="3602736"/>
-            <a:ext cx="5715000" cy="530352"/>
+            <a:off x="841248" y="3328416"/>
+            <a:ext cx="5138928" cy="786384"/>
           </a:xfrm>
           <a:prstGeom prst="roundRect">
             <a:avLst>
-              <a:gd name="adj" fmla="val 6000"/>
+              <a:gd name="adj" fmla="val 7000"/>
             </a:avLst>
           </a:prstGeom>
           <a:solidFill>
@@ -5783,9 +7208,55 @@
           </a:p>
         </p:txBody>
       </p:sp>
+      <p:sp>
+        <p:nvSpPr>
+          <p:cNvPr id="15" name="Rounded Rectangle 14"/>
+          <p:cNvSpPr/>
+          <p:nvPr/>
+        </p:nvSpPr>
+        <p:spPr>
+          <a:xfrm>
+            <a:off x="987552" y="3465576"/>
+            <a:ext cx="512064" cy="512064"/>
+          </a:xfrm>
+          <a:prstGeom prst="roundRect">
+            <a:avLst>
+              <a:gd name="adj" fmla="val 26000"/>
+            </a:avLst>
+          </a:prstGeom>
+          <a:solidFill>
+            <a:srgbClr val="EE0000"/>
+          </a:solidFill>
+          <a:ln>
+            <a:noFill/>
+          </a:ln>
+          <a:effectLst/>
+        </p:spPr>
+        <p:style>
+          <a:lnRef idx="1">
+            <a:schemeClr val="accent1"/>
+          </a:lnRef>
+          <a:fillRef idx="3">
+            <a:schemeClr val="accent1"/>
+          </a:fillRef>
+          <a:effectRef idx="2">
+            <a:schemeClr val="accent1"/>
+          </a:effectRef>
+          <a:fontRef idx="minor">
+            <a:schemeClr val="lt1"/>
+          </a:fontRef>
+        </p:style>
+        <p:txBody>
+          <a:bodyPr rtlCol="0" anchor="ctr"/>
+          <a:lstStyle/>
+          <a:p>
+            <a:pPr algn="ctr"/>
+          </a:p>
+        </p:txBody>
+      </p:sp>
       <p:pic>
         <p:nvPicPr>
-          <p:cNvPr id="13" name="Picture 12" descr="check_steel.png"/>
+          <p:cNvPr id="16" name="Picture 15" descr="check_white.png"/>
           <p:cNvPicPr>
             <a:picLocks noChangeAspect="1"/>
           </p:cNvPicPr>
@@ -5799,8 +7270,8 @@
         </p:blipFill>
         <p:spPr>
           <a:xfrm>
-            <a:off x="987552" y="3749040"/>
-            <a:ext cx="237744" cy="237744"/>
+            <a:off x="1110447" y="3588471"/>
+            <a:ext cx="266273" cy="266273"/>
           </a:xfrm>
           <a:prstGeom prst="rect">
             <a:avLst/>
@@ -5809,14 +7280,14 @@
       </p:pic>
       <p:sp>
         <p:nvSpPr>
-          <p:cNvPr id="14" name="TextBox 13"/>
+          <p:cNvPr id="17" name="TextBox 16"/>
           <p:cNvSpPr txBox="1"/>
           <p:nvPr/>
         </p:nvSpPr>
         <p:spPr>
           <a:xfrm>
-            <a:off x="1353312" y="3602736"/>
-            <a:ext cx="5029200" cy="530352"/>
+            <a:off x="1627632" y="3328416"/>
+            <a:ext cx="4206240" cy="786384"/>
           </a:xfrm>
           <a:prstGeom prst="rect">
             <a:avLst/>
@@ -5841,7 +7312,7 @@
               </a:spcAft>
             </a:pPr>
             <a:r>
-              <a:rPr sz="1200" b="0">
+              <a:rPr sz="1150" b="0">
                 <a:solidFill>
                   <a:srgbClr val="1A1A1A"/>
                 </a:solidFill>
@@ -5854,18 +7325,18 @@
       </p:sp>
       <p:sp>
         <p:nvSpPr>
-          <p:cNvPr id="15" name="Rounded Rectangle 14"/>
+          <p:cNvPr id="18" name="Rounded Rectangle 17"/>
           <p:cNvSpPr/>
           <p:nvPr/>
         </p:nvSpPr>
         <p:spPr>
           <a:xfrm>
-            <a:off x="841248" y="4206240"/>
-            <a:ext cx="5715000" cy="530352"/>
+            <a:off x="6254496" y="3328416"/>
+            <a:ext cx="5138928" cy="786384"/>
           </a:xfrm>
           <a:prstGeom prst="roundRect">
             <a:avLst>
-              <a:gd name="adj" fmla="val 6000"/>
+              <a:gd name="adj" fmla="val 7000"/>
             </a:avLst>
           </a:prstGeom>
           <a:solidFill>
@@ -5900,9 +7371,55 @@
           </a:p>
         </p:txBody>
       </p:sp>
+      <p:sp>
+        <p:nvSpPr>
+          <p:cNvPr id="19" name="Rounded Rectangle 18"/>
+          <p:cNvSpPr/>
+          <p:nvPr/>
+        </p:nvSpPr>
+        <p:spPr>
+          <a:xfrm>
+            <a:off x="6400800" y="3465576"/>
+            <a:ext cx="512064" cy="512064"/>
+          </a:xfrm>
+          <a:prstGeom prst="roundRect">
+            <a:avLst>
+              <a:gd name="adj" fmla="val 26000"/>
+            </a:avLst>
+          </a:prstGeom>
+          <a:solidFill>
+            <a:srgbClr val="EE0000"/>
+          </a:solidFill>
+          <a:ln>
+            <a:noFill/>
+          </a:ln>
+          <a:effectLst/>
+        </p:spPr>
+        <p:style>
+          <a:lnRef idx="1">
+            <a:schemeClr val="accent1"/>
+          </a:lnRef>
+          <a:fillRef idx="3">
+            <a:schemeClr val="accent1"/>
+          </a:fillRef>
+          <a:effectRef idx="2">
+            <a:schemeClr val="accent1"/>
+          </a:effectRef>
+          <a:fontRef idx="minor">
+            <a:schemeClr val="lt1"/>
+          </a:fontRef>
+        </p:style>
+        <p:txBody>
+          <a:bodyPr rtlCol="0" anchor="ctr"/>
+          <a:lstStyle/>
+          <a:p>
+            <a:pPr algn="ctr"/>
+          </a:p>
+        </p:txBody>
+      </p:sp>
       <p:pic>
         <p:nvPicPr>
-          <p:cNvPr id="16" name="Picture 15" descr="check_steel.png"/>
+          <p:cNvPr id="20" name="Picture 19" descr="check_white.png"/>
           <p:cNvPicPr>
             <a:picLocks noChangeAspect="1"/>
           </p:cNvPicPr>
@@ -5916,8 +7433,8 @@
         </p:blipFill>
         <p:spPr>
           <a:xfrm>
-            <a:off x="987552" y="4352544"/>
-            <a:ext cx="237744" cy="237744"/>
+            <a:off x="6523695" y="3588471"/>
+            <a:ext cx="266273" cy="266273"/>
           </a:xfrm>
           <a:prstGeom prst="rect">
             <a:avLst/>
@@ -5926,14 +7443,14 @@
       </p:pic>
       <p:sp>
         <p:nvSpPr>
-          <p:cNvPr id="17" name="TextBox 16"/>
+          <p:cNvPr id="21" name="TextBox 20"/>
           <p:cNvSpPr txBox="1"/>
           <p:nvPr/>
         </p:nvSpPr>
         <p:spPr>
           <a:xfrm>
-            <a:off x="1353312" y="4206240"/>
-            <a:ext cx="5029200" cy="530352"/>
+            <a:off x="7040880" y="3328416"/>
+            <a:ext cx="4206240" cy="786384"/>
           </a:xfrm>
           <a:prstGeom prst="rect">
             <a:avLst/>
@@ -5958,7 +7475,7 @@
               </a:spcAft>
             </a:pPr>
             <a:r>
-              <a:rPr sz="1200" b="0">
+              <a:rPr sz="1150" b="0">
                 <a:solidFill>
                   <a:srgbClr val="1A1A1A"/>
                 </a:solidFill>
@@ -5971,18 +7488,18 @@
       </p:sp>
       <p:sp>
         <p:nvSpPr>
-          <p:cNvPr id="18" name="Rounded Rectangle 17"/>
+          <p:cNvPr id="22" name="Rounded Rectangle 21"/>
           <p:cNvSpPr/>
           <p:nvPr/>
         </p:nvSpPr>
         <p:spPr>
           <a:xfrm>
-            <a:off x="841248" y="4809744"/>
-            <a:ext cx="5715000" cy="530352"/>
+            <a:off x="841248" y="4261104"/>
+            <a:ext cx="5138928" cy="786384"/>
           </a:xfrm>
           <a:prstGeom prst="roundRect">
             <a:avLst>
-              <a:gd name="adj" fmla="val 6000"/>
+              <a:gd name="adj" fmla="val 7000"/>
             </a:avLst>
           </a:prstGeom>
           <a:solidFill>
@@ -6017,9 +7534,55 @@
           </a:p>
         </p:txBody>
       </p:sp>
+      <p:sp>
+        <p:nvSpPr>
+          <p:cNvPr id="23" name="Rounded Rectangle 22"/>
+          <p:cNvSpPr/>
+          <p:nvPr/>
+        </p:nvSpPr>
+        <p:spPr>
+          <a:xfrm>
+            <a:off x="987552" y="4398264"/>
+            <a:ext cx="512064" cy="512064"/>
+          </a:xfrm>
+          <a:prstGeom prst="roundRect">
+            <a:avLst>
+              <a:gd name="adj" fmla="val 26000"/>
+            </a:avLst>
+          </a:prstGeom>
+          <a:solidFill>
+            <a:srgbClr val="EE0000"/>
+          </a:solidFill>
+          <a:ln>
+            <a:noFill/>
+          </a:ln>
+          <a:effectLst/>
+        </p:spPr>
+        <p:style>
+          <a:lnRef idx="1">
+            <a:schemeClr val="accent1"/>
+          </a:lnRef>
+          <a:fillRef idx="3">
+            <a:schemeClr val="accent1"/>
+          </a:fillRef>
+          <a:effectRef idx="2">
+            <a:schemeClr val="accent1"/>
+          </a:effectRef>
+          <a:fontRef idx="minor">
+            <a:schemeClr val="lt1"/>
+          </a:fontRef>
+        </p:style>
+        <p:txBody>
+          <a:bodyPr rtlCol="0" anchor="ctr"/>
+          <a:lstStyle/>
+          <a:p>
+            <a:pPr algn="ctr"/>
+          </a:p>
+        </p:txBody>
+      </p:sp>
       <p:pic>
         <p:nvPicPr>
-          <p:cNvPr id="19" name="Picture 18" descr="check_steel.png"/>
+          <p:cNvPr id="24" name="Picture 23" descr="check_white.png"/>
           <p:cNvPicPr>
             <a:picLocks noChangeAspect="1"/>
           </p:cNvPicPr>
@@ -6033,8 +7596,8 @@
         </p:blipFill>
         <p:spPr>
           <a:xfrm>
-            <a:off x="987552" y="4956048"/>
-            <a:ext cx="237744" cy="237744"/>
+            <a:off x="1110447" y="4521159"/>
+            <a:ext cx="266273" cy="266273"/>
           </a:xfrm>
           <a:prstGeom prst="rect">
             <a:avLst/>
@@ -6043,14 +7606,14 @@
       </p:pic>
       <p:sp>
         <p:nvSpPr>
-          <p:cNvPr id="20" name="TextBox 19"/>
+          <p:cNvPr id="25" name="TextBox 24"/>
           <p:cNvSpPr txBox="1"/>
           <p:nvPr/>
         </p:nvSpPr>
         <p:spPr>
           <a:xfrm>
-            <a:off x="1353312" y="4809744"/>
-            <a:ext cx="5029200" cy="530352"/>
+            <a:off x="1627632" y="4261104"/>
+            <a:ext cx="4206240" cy="786384"/>
           </a:xfrm>
           <a:prstGeom prst="rect">
             <a:avLst/>
@@ -6075,221 +7638,13 @@
               </a:spcAft>
             </a:pPr>
             <a:r>
-              <a:rPr sz="1200" b="0">
+              <a:rPr sz="1150" b="0">
                 <a:solidFill>
                   <a:srgbClr val="1A1A1A"/>
                 </a:solidFill>
                 <a:latin typeface="Red Hat Text"/>
               </a:rPr>
               <a:t>Params in, files shared, facts out</a:t>
-            </a:r>
-          </a:p>
-        </p:txBody>
-      </p:sp>
-      <p:sp>
-        <p:nvSpPr>
-          <p:cNvPr id="21" name="Rounded Rectangle 20"/>
-          <p:cNvSpPr/>
-          <p:nvPr/>
-        </p:nvSpPr>
-        <p:spPr>
-          <a:xfrm>
-            <a:off x="6812280" y="2395728"/>
-            <a:ext cx="4538167" cy="2944368"/>
-          </a:xfrm>
-          <a:prstGeom prst="roundRect">
-            <a:avLst>
-              <a:gd name="adj" fmla="val 4000"/>
-            </a:avLst>
-          </a:prstGeom>
-          <a:solidFill>
-            <a:srgbClr val="FFFFFF"/>
-          </a:solidFill>
-          <a:ln w="15240">
-            <a:solidFill>
-              <a:srgbClr val="DDE1E6"/>
-            </a:solidFill>
-          </a:ln>
-          <a:effectLst/>
-        </p:spPr>
-        <p:style>
-          <a:lnRef idx="1">
-            <a:schemeClr val="accent1"/>
-          </a:lnRef>
-          <a:fillRef idx="3">
-            <a:schemeClr val="accent1"/>
-          </a:fillRef>
-          <a:effectRef idx="2">
-            <a:schemeClr val="accent1"/>
-          </a:effectRef>
-          <a:fontRef idx="minor">
-            <a:schemeClr val="lt1"/>
-          </a:fontRef>
-        </p:style>
-        <p:txBody>
-          <a:bodyPr rtlCol="0" anchor="ctr"/>
-          <a:lstStyle/>
-          <a:p>
-            <a:pPr algn="ctr"/>
-          </a:p>
-        </p:txBody>
-      </p:sp>
-      <p:sp>
-        <p:nvSpPr>
-          <p:cNvPr id="22" name="Rounded Rectangle 21"/>
-          <p:cNvSpPr/>
-          <p:nvPr/>
-        </p:nvSpPr>
-        <p:spPr>
-          <a:xfrm>
-            <a:off x="7013448" y="2596896"/>
-            <a:ext cx="1298448" cy="310896"/>
-          </a:xfrm>
-          <a:prstGeom prst="roundRect">
-            <a:avLst>
-              <a:gd name="adj" fmla="val 50000"/>
-            </a:avLst>
-          </a:prstGeom>
-          <a:solidFill>
-            <a:srgbClr val="FCECEC"/>
-          </a:solidFill>
-          <a:ln>
-            <a:noFill/>
-          </a:ln>
-          <a:effectLst/>
-        </p:spPr>
-        <p:style>
-          <a:lnRef idx="1">
-            <a:schemeClr val="accent1"/>
-          </a:lnRef>
-          <a:fillRef idx="3">
-            <a:schemeClr val="accent1"/>
-          </a:fillRef>
-          <a:effectRef idx="2">
-            <a:schemeClr val="accent1"/>
-          </a:effectRef>
-          <a:fontRef idx="minor">
-            <a:schemeClr val="lt1"/>
-          </a:fontRef>
-        </p:style>
-        <p:txBody>
-          <a:bodyPr rtlCol="0" anchor="ctr"/>
-          <a:lstStyle/>
-          <a:p>
-            <a:pPr algn="ctr"/>
-          </a:p>
-        </p:txBody>
-      </p:sp>
-      <p:sp>
-        <p:nvSpPr>
-          <p:cNvPr id="23" name="TextBox 22"/>
-          <p:cNvSpPr txBox="1"/>
-          <p:nvPr/>
-        </p:nvSpPr>
-        <p:spPr>
-          <a:xfrm>
-            <a:off x="7013448" y="2596896"/>
-            <a:ext cx="1298448" cy="310896"/>
-          </a:xfrm>
-          <a:prstGeom prst="rect">
-            <a:avLst/>
-          </a:prstGeom>
-          <a:noFill/>
-        </p:spPr>
-        <p:txBody>
-          <a:bodyPr wrap="none" anchor="ctr" lIns="0" rIns="0" tIns="0" bIns="0">
-            <a:spAutoFit/>
-          </a:bodyPr>
-          <a:lstStyle/>
-          <a:p>
-            <a:pPr algn="ctr">
-              <a:lnSpc>
-                <a:spcPct val="106000"/>
-              </a:lnSpc>
-              <a:spcBef>
-                <a:spcPts val="0"/>
-              </a:spcBef>
-              <a:spcAft>
-                <a:spcPts val="0"/>
-              </a:spcAft>
-            </a:pPr>
-            <a:r>
-              <a:rPr sz="850" b="1">
-                <a:solidFill>
-                  <a:srgbClr val="B80000"/>
-                </a:solidFill>
-                <a:latin typeface="Red Hat Display"/>
-              </a:rPr>
-              <a:t>MEDIA PASS</a:t>
-            </a:r>
-          </a:p>
-        </p:txBody>
-      </p:sp>
-      <p:pic>
-        <p:nvPicPr>
-          <p:cNvPr id="24" name="Picture 23" descr="eye_slate.png"/>
-          <p:cNvPicPr>
-            <a:picLocks noChangeAspect="1"/>
-          </p:cNvPicPr>
-          <p:nvPr/>
-        </p:nvPicPr>
-        <p:blipFill>
-          <a:blip r:embed="rId4"/>
-          <a:stretch>
-            <a:fillRect/>
-          </a:stretch>
-        </p:blipFill>
-        <p:spPr>
-          <a:xfrm>
-            <a:off x="8843619" y="3108960"/>
-            <a:ext cx="475488" cy="475488"/>
-          </a:xfrm>
-          <a:prstGeom prst="rect">
-            <a:avLst/>
-          </a:prstGeom>
-        </p:spPr>
-      </p:pic>
-      <p:sp>
-        <p:nvSpPr>
-          <p:cNvPr id="25" name="TextBox 24"/>
-          <p:cNvSpPr txBox="1"/>
-          <p:nvPr/>
-        </p:nvSpPr>
-        <p:spPr>
-          <a:xfrm>
-            <a:off x="7050024" y="3721608"/>
-            <a:ext cx="4062679" cy="1481328"/>
-          </a:xfrm>
-          <a:prstGeom prst="rect">
-            <a:avLst/>
-          </a:prstGeom>
-          <a:noFill/>
-        </p:spPr>
-        <p:txBody>
-          <a:bodyPr wrap="square" anchor="t" lIns="0" rIns="0" tIns="0" bIns="0">
-            <a:spAutoFit/>
-          </a:bodyPr>
-          <a:lstStyle/>
-          <a:p>
-            <a:pPr algn="l">
-              <a:lnSpc>
-                <a:spcPct val="120000"/>
-              </a:lnSpc>
-              <a:spcBef>
-                <a:spcPts val="0"/>
-              </a:spcBef>
-              <a:spcAft>
-                <a:spcPts val="0"/>
-              </a:spcAft>
-            </a:pPr>
-            <a:r>
-              <a:rPr sz="950" b="0">
-                <a:solidFill>
-                  <a:srgbClr val="8A9099"/>
-                </a:solidFill>
-                <a:latin typeface="Red Hat Text"/>
-              </a:rPr>
-              <a:t>Reuse concept diagram pipelines-fundamentals-...-01 (top half) — Task → Pipeline → PipelineRun with params-in / workspace / results-out labels.</a:t>
             </a:r>
           </a:p>
         </p:txBody>
@@ -6642,11 +7997,11 @@
         <p:spPr>
           <a:xfrm>
             <a:off x="841248" y="2670048"/>
-            <a:ext cx="5715000" cy="530352"/>
+            <a:ext cx="5138928" cy="786384"/>
           </a:xfrm>
           <a:prstGeom prst="roundRect">
             <a:avLst>
-              <a:gd name="adj" fmla="val 6000"/>
+              <a:gd name="adj" fmla="val 7000"/>
             </a:avLst>
           </a:prstGeom>
           <a:solidFill>
@@ -6681,9 +8036,55 @@
           </a:p>
         </p:txBody>
       </p:sp>
+      <p:sp>
+        <p:nvSpPr>
+          <p:cNvPr id="8" name="Rounded Rectangle 7"/>
+          <p:cNvSpPr/>
+          <p:nvPr/>
+        </p:nvSpPr>
+        <p:spPr>
+          <a:xfrm>
+            <a:off x="987552" y="2807208"/>
+            <a:ext cx="512064" cy="512064"/>
+          </a:xfrm>
+          <a:prstGeom prst="roundRect">
+            <a:avLst>
+              <a:gd name="adj" fmla="val 26000"/>
+            </a:avLst>
+          </a:prstGeom>
+          <a:solidFill>
+            <a:srgbClr val="EE0000"/>
+          </a:solidFill>
+          <a:ln>
+            <a:noFill/>
+          </a:ln>
+          <a:effectLst/>
+        </p:spPr>
+        <p:style>
+          <a:lnRef idx="1">
+            <a:schemeClr val="accent1"/>
+          </a:lnRef>
+          <a:fillRef idx="3">
+            <a:schemeClr val="accent1"/>
+          </a:fillRef>
+          <a:effectRef idx="2">
+            <a:schemeClr val="accent1"/>
+          </a:effectRef>
+          <a:fontRef idx="minor">
+            <a:schemeClr val="lt1"/>
+          </a:fontRef>
+        </p:style>
+        <p:txBody>
+          <a:bodyPr rtlCol="0" anchor="ctr"/>
+          <a:lstStyle/>
+          <a:p>
+            <a:pPr algn="ctr"/>
+          </a:p>
+        </p:txBody>
+      </p:sp>
       <p:pic>
         <p:nvPicPr>
-          <p:cNvPr id="8" name="Picture 7" descr="check_steel.png"/>
+          <p:cNvPr id="9" name="Picture 8" descr="check_white.png"/>
           <p:cNvPicPr>
             <a:picLocks noChangeAspect="1"/>
           </p:cNvPicPr>
@@ -6697,8 +8098,8 @@
         </p:blipFill>
         <p:spPr>
           <a:xfrm>
-            <a:off x="987552" y="2816352"/>
-            <a:ext cx="237744" cy="237744"/>
+            <a:off x="1110447" y="2930103"/>
+            <a:ext cx="266273" cy="266273"/>
           </a:xfrm>
           <a:prstGeom prst="rect">
             <a:avLst/>
@@ -6707,14 +8108,14 @@
       </p:pic>
       <p:sp>
         <p:nvSpPr>
-          <p:cNvPr id="9" name="TextBox 8"/>
+          <p:cNvPr id="10" name="TextBox 9"/>
           <p:cNvSpPr txBox="1"/>
           <p:nvPr/>
         </p:nvSpPr>
         <p:spPr>
           <a:xfrm>
-            <a:off x="1353312" y="2670048"/>
-            <a:ext cx="5029200" cy="530352"/>
+            <a:off x="1627632" y="2670048"/>
+            <a:ext cx="4206240" cy="786384"/>
           </a:xfrm>
           <a:prstGeom prst="rect">
             <a:avLst/>
@@ -6739,7 +8140,7 @@
               </a:spcAft>
             </a:pPr>
             <a:r>
-              <a:rPr sz="1200" b="0">
+              <a:rPr sz="1150" b="0">
                 <a:solidFill>
                   <a:srgbClr val="1A1A1A"/>
                 </a:solidFill>
@@ -6752,18 +8153,18 @@
       </p:sp>
       <p:sp>
         <p:nvSpPr>
-          <p:cNvPr id="10" name="Rounded Rectangle 9"/>
+          <p:cNvPr id="11" name="Rounded Rectangle 10"/>
           <p:cNvSpPr/>
           <p:nvPr/>
         </p:nvSpPr>
         <p:spPr>
           <a:xfrm>
-            <a:off x="841248" y="3273552"/>
-            <a:ext cx="5715000" cy="530352"/>
+            <a:off x="6254496" y="2670048"/>
+            <a:ext cx="5138928" cy="786384"/>
           </a:xfrm>
           <a:prstGeom prst="roundRect">
             <a:avLst>
-              <a:gd name="adj" fmla="val 6000"/>
+              <a:gd name="adj" fmla="val 7000"/>
             </a:avLst>
           </a:prstGeom>
           <a:solidFill>
@@ -6798,9 +8199,55 @@
           </a:p>
         </p:txBody>
       </p:sp>
+      <p:sp>
+        <p:nvSpPr>
+          <p:cNvPr id="12" name="Rounded Rectangle 11"/>
+          <p:cNvSpPr/>
+          <p:nvPr/>
+        </p:nvSpPr>
+        <p:spPr>
+          <a:xfrm>
+            <a:off x="6400800" y="2807208"/>
+            <a:ext cx="512064" cy="512064"/>
+          </a:xfrm>
+          <a:prstGeom prst="roundRect">
+            <a:avLst>
+              <a:gd name="adj" fmla="val 26000"/>
+            </a:avLst>
+          </a:prstGeom>
+          <a:solidFill>
+            <a:srgbClr val="EE0000"/>
+          </a:solidFill>
+          <a:ln>
+            <a:noFill/>
+          </a:ln>
+          <a:effectLst/>
+        </p:spPr>
+        <p:style>
+          <a:lnRef idx="1">
+            <a:schemeClr val="accent1"/>
+          </a:lnRef>
+          <a:fillRef idx="3">
+            <a:schemeClr val="accent1"/>
+          </a:fillRef>
+          <a:effectRef idx="2">
+            <a:schemeClr val="accent1"/>
+          </a:effectRef>
+          <a:fontRef idx="minor">
+            <a:schemeClr val="lt1"/>
+          </a:fontRef>
+        </p:style>
+        <p:txBody>
+          <a:bodyPr rtlCol="0" anchor="ctr"/>
+          <a:lstStyle/>
+          <a:p>
+            <a:pPr algn="ctr"/>
+          </a:p>
+        </p:txBody>
+      </p:sp>
       <p:pic>
         <p:nvPicPr>
-          <p:cNvPr id="11" name="Picture 10" descr="check_steel.png"/>
+          <p:cNvPr id="13" name="Picture 12" descr="check_white.png"/>
           <p:cNvPicPr>
             <a:picLocks noChangeAspect="1"/>
           </p:cNvPicPr>
@@ -6814,8 +8261,8 @@
         </p:blipFill>
         <p:spPr>
           <a:xfrm>
-            <a:off x="987552" y="3419856"/>
-            <a:ext cx="237744" cy="237744"/>
+            <a:off x="6523695" y="2930103"/>
+            <a:ext cx="266273" cy="266273"/>
           </a:xfrm>
           <a:prstGeom prst="rect">
             <a:avLst/>
@@ -6824,14 +8271,14 @@
       </p:pic>
       <p:sp>
         <p:nvSpPr>
-          <p:cNvPr id="12" name="TextBox 11"/>
+          <p:cNvPr id="14" name="TextBox 13"/>
           <p:cNvSpPr txBox="1"/>
           <p:nvPr/>
         </p:nvSpPr>
         <p:spPr>
           <a:xfrm>
-            <a:off x="1353312" y="3273552"/>
-            <a:ext cx="5029200" cy="530352"/>
+            <a:off x="7040880" y="2670048"/>
+            <a:ext cx="4206240" cy="786384"/>
           </a:xfrm>
           <a:prstGeom prst="rect">
             <a:avLst/>
@@ -6856,7 +8303,7 @@
               </a:spcAft>
             </a:pPr>
             <a:r>
-              <a:rPr sz="1200" b="0">
+              <a:rPr sz="1150" b="0">
                 <a:solidFill>
                   <a:srgbClr val="1A1A1A"/>
                 </a:solidFill>
@@ -6869,18 +8316,18 @@
       </p:sp>
       <p:sp>
         <p:nvSpPr>
-          <p:cNvPr id="13" name="Rounded Rectangle 12"/>
+          <p:cNvPr id="15" name="Rounded Rectangle 14"/>
           <p:cNvSpPr/>
           <p:nvPr/>
         </p:nvSpPr>
         <p:spPr>
           <a:xfrm>
-            <a:off x="841248" y="3877056"/>
-            <a:ext cx="5715000" cy="530352"/>
+            <a:off x="841248" y="3602736"/>
+            <a:ext cx="5138928" cy="786384"/>
           </a:xfrm>
           <a:prstGeom prst="roundRect">
             <a:avLst>
-              <a:gd name="adj" fmla="val 6000"/>
+              <a:gd name="adj" fmla="val 7000"/>
             </a:avLst>
           </a:prstGeom>
           <a:solidFill>
@@ -6915,9 +8362,55 @@
           </a:p>
         </p:txBody>
       </p:sp>
+      <p:sp>
+        <p:nvSpPr>
+          <p:cNvPr id="16" name="Rounded Rectangle 15"/>
+          <p:cNvSpPr/>
+          <p:nvPr/>
+        </p:nvSpPr>
+        <p:spPr>
+          <a:xfrm>
+            <a:off x="987552" y="3739896"/>
+            <a:ext cx="512064" cy="512064"/>
+          </a:xfrm>
+          <a:prstGeom prst="roundRect">
+            <a:avLst>
+              <a:gd name="adj" fmla="val 26000"/>
+            </a:avLst>
+          </a:prstGeom>
+          <a:solidFill>
+            <a:srgbClr val="EE0000"/>
+          </a:solidFill>
+          <a:ln>
+            <a:noFill/>
+          </a:ln>
+          <a:effectLst/>
+        </p:spPr>
+        <p:style>
+          <a:lnRef idx="1">
+            <a:schemeClr val="accent1"/>
+          </a:lnRef>
+          <a:fillRef idx="3">
+            <a:schemeClr val="accent1"/>
+          </a:fillRef>
+          <a:effectRef idx="2">
+            <a:schemeClr val="accent1"/>
+          </a:effectRef>
+          <a:fontRef idx="minor">
+            <a:schemeClr val="lt1"/>
+          </a:fontRef>
+        </p:style>
+        <p:txBody>
+          <a:bodyPr rtlCol="0" anchor="ctr"/>
+          <a:lstStyle/>
+          <a:p>
+            <a:pPr algn="ctr"/>
+          </a:p>
+        </p:txBody>
+      </p:sp>
       <p:pic>
         <p:nvPicPr>
-          <p:cNvPr id="14" name="Picture 13" descr="check_steel.png"/>
+          <p:cNvPr id="17" name="Picture 16" descr="check_white.png"/>
           <p:cNvPicPr>
             <a:picLocks noChangeAspect="1"/>
           </p:cNvPicPr>
@@ -6931,8 +8424,8 @@
         </p:blipFill>
         <p:spPr>
           <a:xfrm>
-            <a:off x="987552" y="4023360"/>
-            <a:ext cx="237744" cy="237744"/>
+            <a:off x="1110447" y="3862791"/>
+            <a:ext cx="266273" cy="266273"/>
           </a:xfrm>
           <a:prstGeom prst="rect">
             <a:avLst/>
@@ -6941,14 +8434,14 @@
       </p:pic>
       <p:sp>
         <p:nvSpPr>
-          <p:cNvPr id="15" name="TextBox 14"/>
+          <p:cNvPr id="18" name="TextBox 17"/>
           <p:cNvSpPr txBox="1"/>
           <p:nvPr/>
         </p:nvSpPr>
         <p:spPr>
           <a:xfrm>
-            <a:off x="1353312" y="3877056"/>
-            <a:ext cx="5029200" cy="530352"/>
+            <a:off x="1627632" y="3602736"/>
+            <a:ext cx="4206240" cy="786384"/>
           </a:xfrm>
           <a:prstGeom prst="rect">
             <a:avLst/>
@@ -6973,7 +8466,7 @@
               </a:spcAft>
             </a:pPr>
             <a:r>
-              <a:rPr sz="1200" b="0">
+              <a:rPr sz="1150" b="0">
                 <a:solidFill>
                   <a:srgbClr val="1A1A1A"/>
                 </a:solidFill>
@@ -6986,18 +8479,18 @@
       </p:sp>
       <p:sp>
         <p:nvSpPr>
-          <p:cNvPr id="16" name="Rounded Rectangle 15"/>
+          <p:cNvPr id="19" name="Rounded Rectangle 18"/>
           <p:cNvSpPr/>
           <p:nvPr/>
         </p:nvSpPr>
         <p:spPr>
           <a:xfrm>
-            <a:off x="841248" y="4480560"/>
-            <a:ext cx="5715000" cy="530352"/>
+            <a:off x="6254496" y="3602736"/>
+            <a:ext cx="5138928" cy="786384"/>
           </a:xfrm>
           <a:prstGeom prst="roundRect">
             <a:avLst>
-              <a:gd name="adj" fmla="val 6000"/>
+              <a:gd name="adj" fmla="val 7000"/>
             </a:avLst>
           </a:prstGeom>
           <a:solidFill>
@@ -7032,9 +8525,55 @@
           </a:p>
         </p:txBody>
       </p:sp>
+      <p:sp>
+        <p:nvSpPr>
+          <p:cNvPr id="20" name="Rounded Rectangle 19"/>
+          <p:cNvSpPr/>
+          <p:nvPr/>
+        </p:nvSpPr>
+        <p:spPr>
+          <a:xfrm>
+            <a:off x="6400800" y="3739896"/>
+            <a:ext cx="512064" cy="512064"/>
+          </a:xfrm>
+          <a:prstGeom prst="roundRect">
+            <a:avLst>
+              <a:gd name="adj" fmla="val 26000"/>
+            </a:avLst>
+          </a:prstGeom>
+          <a:solidFill>
+            <a:srgbClr val="EE0000"/>
+          </a:solidFill>
+          <a:ln>
+            <a:noFill/>
+          </a:ln>
+          <a:effectLst/>
+        </p:spPr>
+        <p:style>
+          <a:lnRef idx="1">
+            <a:schemeClr val="accent1"/>
+          </a:lnRef>
+          <a:fillRef idx="3">
+            <a:schemeClr val="accent1"/>
+          </a:fillRef>
+          <a:effectRef idx="2">
+            <a:schemeClr val="accent1"/>
+          </a:effectRef>
+          <a:fontRef idx="minor">
+            <a:schemeClr val="lt1"/>
+          </a:fontRef>
+        </p:style>
+        <p:txBody>
+          <a:bodyPr rtlCol="0" anchor="ctr"/>
+          <a:lstStyle/>
+          <a:p>
+            <a:pPr algn="ctr"/>
+          </a:p>
+        </p:txBody>
+      </p:sp>
       <p:pic>
         <p:nvPicPr>
-          <p:cNvPr id="17" name="Picture 16" descr="check_steel.png"/>
+          <p:cNvPr id="21" name="Picture 20" descr="check_white.png"/>
           <p:cNvPicPr>
             <a:picLocks noChangeAspect="1"/>
           </p:cNvPicPr>
@@ -7048,8 +8587,8 @@
         </p:blipFill>
         <p:spPr>
           <a:xfrm>
-            <a:off x="987552" y="4626864"/>
-            <a:ext cx="237744" cy="237744"/>
+            <a:off x="6523695" y="3862791"/>
+            <a:ext cx="266273" cy="266273"/>
           </a:xfrm>
           <a:prstGeom prst="rect">
             <a:avLst/>
@@ -7058,14 +8597,14 @@
       </p:pic>
       <p:sp>
         <p:nvSpPr>
-          <p:cNvPr id="18" name="TextBox 17"/>
+          <p:cNvPr id="22" name="TextBox 21"/>
           <p:cNvSpPr txBox="1"/>
           <p:nvPr/>
         </p:nvSpPr>
         <p:spPr>
           <a:xfrm>
-            <a:off x="1353312" y="4480560"/>
-            <a:ext cx="5029200" cy="530352"/>
+            <a:off x="7040880" y="3602736"/>
+            <a:ext cx="4206240" cy="786384"/>
           </a:xfrm>
           <a:prstGeom prst="rect">
             <a:avLst/>
@@ -7090,7 +8629,7 @@
               </a:spcAft>
             </a:pPr>
             <a:r>
-              <a:rPr sz="1200" b="0">
+              <a:rPr sz="1150" b="0">
                 <a:solidFill>
                   <a:srgbClr val="1A1A1A"/>
                 </a:solidFill>
@@ -7103,18 +8642,18 @@
       </p:sp>
       <p:sp>
         <p:nvSpPr>
-          <p:cNvPr id="19" name="Rounded Rectangle 18"/>
+          <p:cNvPr id="23" name="Rounded Rectangle 22"/>
           <p:cNvSpPr/>
           <p:nvPr/>
         </p:nvSpPr>
         <p:spPr>
           <a:xfrm>
-            <a:off x="841248" y="5084064"/>
-            <a:ext cx="5715000" cy="530352"/>
+            <a:off x="841248" y="4535424"/>
+            <a:ext cx="5138928" cy="786384"/>
           </a:xfrm>
           <a:prstGeom prst="roundRect">
             <a:avLst>
-              <a:gd name="adj" fmla="val 6000"/>
+              <a:gd name="adj" fmla="val 7000"/>
             </a:avLst>
           </a:prstGeom>
           <a:solidFill>
@@ -7149,9 +8688,55 @@
           </a:p>
         </p:txBody>
       </p:sp>
+      <p:sp>
+        <p:nvSpPr>
+          <p:cNvPr id="24" name="Rounded Rectangle 23"/>
+          <p:cNvSpPr/>
+          <p:nvPr/>
+        </p:nvSpPr>
+        <p:spPr>
+          <a:xfrm>
+            <a:off x="987552" y="4672584"/>
+            <a:ext cx="512064" cy="512064"/>
+          </a:xfrm>
+          <a:prstGeom prst="roundRect">
+            <a:avLst>
+              <a:gd name="adj" fmla="val 26000"/>
+            </a:avLst>
+          </a:prstGeom>
+          <a:solidFill>
+            <a:srgbClr val="EE0000"/>
+          </a:solidFill>
+          <a:ln>
+            <a:noFill/>
+          </a:ln>
+          <a:effectLst/>
+        </p:spPr>
+        <p:style>
+          <a:lnRef idx="1">
+            <a:schemeClr val="accent1"/>
+          </a:lnRef>
+          <a:fillRef idx="3">
+            <a:schemeClr val="accent1"/>
+          </a:fillRef>
+          <a:effectRef idx="2">
+            <a:schemeClr val="accent1"/>
+          </a:effectRef>
+          <a:fontRef idx="minor">
+            <a:schemeClr val="lt1"/>
+          </a:fontRef>
+        </p:style>
+        <p:txBody>
+          <a:bodyPr rtlCol="0" anchor="ctr"/>
+          <a:lstStyle/>
+          <a:p>
+            <a:pPr algn="ctr"/>
+          </a:p>
+        </p:txBody>
+      </p:sp>
       <p:pic>
         <p:nvPicPr>
-          <p:cNvPr id="20" name="Picture 19" descr="check_steel.png"/>
+          <p:cNvPr id="25" name="Picture 24" descr="check_white.png"/>
           <p:cNvPicPr>
             <a:picLocks noChangeAspect="1"/>
           </p:cNvPicPr>
@@ -7165,8 +8750,8 @@
         </p:blipFill>
         <p:spPr>
           <a:xfrm>
-            <a:off x="987552" y="5230368"/>
-            <a:ext cx="237744" cy="237744"/>
+            <a:off x="1110447" y="4795479"/>
+            <a:ext cx="266273" cy="266273"/>
           </a:xfrm>
           <a:prstGeom prst="rect">
             <a:avLst/>
@@ -7175,14 +8760,14 @@
       </p:pic>
       <p:sp>
         <p:nvSpPr>
-          <p:cNvPr id="21" name="TextBox 20"/>
+          <p:cNvPr id="26" name="TextBox 25"/>
           <p:cNvSpPr txBox="1"/>
           <p:nvPr/>
         </p:nvSpPr>
         <p:spPr>
           <a:xfrm>
-            <a:off x="1353312" y="5084064"/>
-            <a:ext cx="5029200" cy="530352"/>
+            <a:off x="1627632" y="4535424"/>
+            <a:ext cx="4206240" cy="786384"/>
           </a:xfrm>
           <a:prstGeom prst="rect">
             <a:avLst/>
@@ -7207,221 +8792,13 @@
               </a:spcAft>
             </a:pPr>
             <a:r>
-              <a:rPr sz="1200" b="0">
+              <a:rPr sz="1150" b="0">
                 <a:solidFill>
                   <a:srgbClr val="1A1A1A"/>
                 </a:solidFill>
                 <a:latin typeface="Red Hat Text"/>
               </a:rPr>
               <a:t>ClusterTask is gone (1.17); resolver replaced it</a:t>
-            </a:r>
-          </a:p>
-        </p:txBody>
-      </p:sp>
-      <p:sp>
-        <p:nvSpPr>
-          <p:cNvPr id="22" name="Rounded Rectangle 21"/>
-          <p:cNvSpPr/>
-          <p:nvPr/>
-        </p:nvSpPr>
-        <p:spPr>
-          <a:xfrm>
-            <a:off x="6812280" y="2670048"/>
-            <a:ext cx="4538167" cy="2944368"/>
-          </a:xfrm>
-          <a:prstGeom prst="roundRect">
-            <a:avLst>
-              <a:gd name="adj" fmla="val 4000"/>
-            </a:avLst>
-          </a:prstGeom>
-          <a:solidFill>
-            <a:srgbClr val="FFFFFF"/>
-          </a:solidFill>
-          <a:ln w="15240">
-            <a:solidFill>
-              <a:srgbClr val="DDE1E6"/>
-            </a:solidFill>
-          </a:ln>
-          <a:effectLst/>
-        </p:spPr>
-        <p:style>
-          <a:lnRef idx="1">
-            <a:schemeClr val="accent1"/>
-          </a:lnRef>
-          <a:fillRef idx="3">
-            <a:schemeClr val="accent1"/>
-          </a:fillRef>
-          <a:effectRef idx="2">
-            <a:schemeClr val="accent1"/>
-          </a:effectRef>
-          <a:fontRef idx="minor">
-            <a:schemeClr val="lt1"/>
-          </a:fontRef>
-        </p:style>
-        <p:txBody>
-          <a:bodyPr rtlCol="0" anchor="ctr"/>
-          <a:lstStyle/>
-          <a:p>
-            <a:pPr algn="ctr"/>
-          </a:p>
-        </p:txBody>
-      </p:sp>
-      <p:sp>
-        <p:nvSpPr>
-          <p:cNvPr id="23" name="Rounded Rectangle 22"/>
-          <p:cNvSpPr/>
-          <p:nvPr/>
-        </p:nvSpPr>
-        <p:spPr>
-          <a:xfrm>
-            <a:off x="7013448" y="2871216"/>
-            <a:ext cx="1298448" cy="310896"/>
-          </a:xfrm>
-          <a:prstGeom prst="roundRect">
-            <a:avLst>
-              <a:gd name="adj" fmla="val 50000"/>
-            </a:avLst>
-          </a:prstGeom>
-          <a:solidFill>
-            <a:srgbClr val="FCECEC"/>
-          </a:solidFill>
-          <a:ln>
-            <a:noFill/>
-          </a:ln>
-          <a:effectLst/>
-        </p:spPr>
-        <p:style>
-          <a:lnRef idx="1">
-            <a:schemeClr val="accent1"/>
-          </a:lnRef>
-          <a:fillRef idx="3">
-            <a:schemeClr val="accent1"/>
-          </a:fillRef>
-          <a:effectRef idx="2">
-            <a:schemeClr val="accent1"/>
-          </a:effectRef>
-          <a:fontRef idx="minor">
-            <a:schemeClr val="lt1"/>
-          </a:fontRef>
-        </p:style>
-        <p:txBody>
-          <a:bodyPr rtlCol="0" anchor="ctr"/>
-          <a:lstStyle/>
-          <a:p>
-            <a:pPr algn="ctr"/>
-          </a:p>
-        </p:txBody>
-      </p:sp>
-      <p:sp>
-        <p:nvSpPr>
-          <p:cNvPr id="24" name="TextBox 23"/>
-          <p:cNvSpPr txBox="1"/>
-          <p:nvPr/>
-        </p:nvSpPr>
-        <p:spPr>
-          <a:xfrm>
-            <a:off x="7013448" y="2871216"/>
-            <a:ext cx="1298448" cy="310896"/>
-          </a:xfrm>
-          <a:prstGeom prst="rect">
-            <a:avLst/>
-          </a:prstGeom>
-          <a:noFill/>
-        </p:spPr>
-        <p:txBody>
-          <a:bodyPr wrap="none" anchor="ctr" lIns="0" rIns="0" tIns="0" bIns="0">
-            <a:spAutoFit/>
-          </a:bodyPr>
-          <a:lstStyle/>
-          <a:p>
-            <a:pPr algn="ctr">
-              <a:lnSpc>
-                <a:spcPct val="106000"/>
-              </a:lnSpc>
-              <a:spcBef>
-                <a:spcPts val="0"/>
-              </a:spcBef>
-              <a:spcAft>
-                <a:spcPts val="0"/>
-              </a:spcAft>
-            </a:pPr>
-            <a:r>
-              <a:rPr sz="850" b="1">
-                <a:solidFill>
-                  <a:srgbClr val="B80000"/>
-                </a:solidFill>
-                <a:latin typeface="Red Hat Display"/>
-              </a:rPr>
-              <a:t>MEDIA PASS</a:t>
-            </a:r>
-          </a:p>
-        </p:txBody>
-      </p:sp>
-      <p:pic>
-        <p:nvPicPr>
-          <p:cNvPr id="25" name="Picture 24" descr="eye_slate.png"/>
-          <p:cNvPicPr>
-            <a:picLocks noChangeAspect="1"/>
-          </p:cNvPicPr>
-          <p:nvPr/>
-        </p:nvPicPr>
-        <p:blipFill>
-          <a:blip r:embed="rId4"/>
-          <a:stretch>
-            <a:fillRect/>
-          </a:stretch>
-        </p:blipFill>
-        <p:spPr>
-          <a:xfrm>
-            <a:off x="8843619" y="3383280"/>
-            <a:ext cx="475488" cy="475488"/>
-          </a:xfrm>
-          <a:prstGeom prst="rect">
-            <a:avLst/>
-          </a:prstGeom>
-        </p:spPr>
-      </p:pic>
-      <p:sp>
-        <p:nvSpPr>
-          <p:cNvPr id="26" name="TextBox 25"/>
-          <p:cNvSpPr txBox="1"/>
-          <p:nvPr/>
-        </p:nvSpPr>
-        <p:spPr>
-          <a:xfrm>
-            <a:off x="7050024" y="3995928"/>
-            <a:ext cx="4062679" cy="1481328"/>
-          </a:xfrm>
-          <a:prstGeom prst="rect">
-            <a:avLst/>
-          </a:prstGeom>
-          <a:noFill/>
-        </p:spPr>
-        <p:txBody>
-          <a:bodyPr wrap="square" anchor="t" lIns="0" rIns="0" tIns="0" bIns="0">
-            <a:spAutoFit/>
-          </a:bodyPr>
-          <a:lstStyle/>
-          <a:p>
-            <a:pPr algn="l">
-              <a:lnSpc>
-                <a:spcPct val="120000"/>
-              </a:lnSpc>
-              <a:spcBef>
-                <a:spcPts val="0"/>
-              </a:spcBef>
-              <a:spcAft>
-                <a:spcPts val="0"/>
-              </a:spcAft>
-            </a:pPr>
-            <a:r>
-              <a:rPr sz="950" b="0">
-                <a:solidFill>
-                  <a:srgbClr val="8A9099"/>
-                </a:solidFill>
-                <a:latin typeface="Red Hat Text"/>
-              </a:rPr>
-              <a:t>Reuse concept diagram pipelines-fundamentals-...-01 (full) — three colored layers, each Task dotted to a resolver: cluster arrow into the app pipeline.</a:t>
             </a:r>
           </a:p>
         </p:txBody>
@@ -7729,11 +9106,11 @@
         <p:spPr>
           <a:xfrm>
             <a:off x="841248" y="2395728"/>
-            <a:ext cx="5715000" cy="530352"/>
+            <a:ext cx="5138928" cy="786384"/>
           </a:xfrm>
           <a:prstGeom prst="roundRect">
             <a:avLst>
-              <a:gd name="adj" fmla="val 6000"/>
+              <a:gd name="adj" fmla="val 7000"/>
             </a:avLst>
           </a:prstGeom>
           <a:solidFill>
@@ -7768,9 +9145,55 @@
           </a:p>
         </p:txBody>
       </p:sp>
+      <p:sp>
+        <p:nvSpPr>
+          <p:cNvPr id="7" name="Rounded Rectangle 6"/>
+          <p:cNvSpPr/>
+          <p:nvPr/>
+        </p:nvSpPr>
+        <p:spPr>
+          <a:xfrm>
+            <a:off x="987552" y="2532888"/>
+            <a:ext cx="512064" cy="512064"/>
+          </a:xfrm>
+          <a:prstGeom prst="roundRect">
+            <a:avLst>
+              <a:gd name="adj" fmla="val 26000"/>
+            </a:avLst>
+          </a:prstGeom>
+          <a:solidFill>
+            <a:srgbClr val="EE0000"/>
+          </a:solidFill>
+          <a:ln>
+            <a:noFill/>
+          </a:ln>
+          <a:effectLst/>
+        </p:spPr>
+        <p:style>
+          <a:lnRef idx="1">
+            <a:schemeClr val="accent1"/>
+          </a:lnRef>
+          <a:fillRef idx="3">
+            <a:schemeClr val="accent1"/>
+          </a:fillRef>
+          <a:effectRef idx="2">
+            <a:schemeClr val="accent1"/>
+          </a:effectRef>
+          <a:fontRef idx="minor">
+            <a:schemeClr val="lt1"/>
+          </a:fontRef>
+        </p:style>
+        <p:txBody>
+          <a:bodyPr rtlCol="0" anchor="ctr"/>
+          <a:lstStyle/>
+          <a:p>
+            <a:pPr algn="ctr"/>
+          </a:p>
+        </p:txBody>
+      </p:sp>
       <p:pic>
         <p:nvPicPr>
-          <p:cNvPr id="7" name="Picture 6" descr="check_steel.png"/>
+          <p:cNvPr id="8" name="Picture 7" descr="check_white.png"/>
           <p:cNvPicPr>
             <a:picLocks noChangeAspect="1"/>
           </p:cNvPicPr>
@@ -7784,8 +9207,8 @@
         </p:blipFill>
         <p:spPr>
           <a:xfrm>
-            <a:off x="987552" y="2542032"/>
-            <a:ext cx="237744" cy="237744"/>
+            <a:off x="1110447" y="2655783"/>
+            <a:ext cx="266273" cy="266273"/>
           </a:xfrm>
           <a:prstGeom prst="rect">
             <a:avLst/>
@@ -7794,14 +9217,14 @@
       </p:pic>
       <p:sp>
         <p:nvSpPr>
-          <p:cNvPr id="8" name="TextBox 7"/>
+          <p:cNvPr id="9" name="TextBox 8"/>
           <p:cNvSpPr txBox="1"/>
           <p:nvPr/>
         </p:nvSpPr>
         <p:spPr>
           <a:xfrm>
-            <a:off x="1353312" y="2395728"/>
-            <a:ext cx="5029200" cy="530352"/>
+            <a:off x="1627632" y="2395728"/>
+            <a:ext cx="4206240" cy="786384"/>
           </a:xfrm>
           <a:prstGeom prst="rect">
             <a:avLst/>
@@ -7826,7 +9249,7 @@
               </a:spcAft>
             </a:pPr>
             <a:r>
-              <a:rPr sz="1200" b="0">
+              <a:rPr sz="1150" b="0">
                 <a:solidFill>
                   <a:srgbClr val="1A1A1A"/>
                 </a:solidFill>
@@ -7839,18 +9262,18 @@
       </p:sp>
       <p:sp>
         <p:nvSpPr>
-          <p:cNvPr id="9" name="Rounded Rectangle 8"/>
+          <p:cNvPr id="10" name="Rounded Rectangle 9"/>
           <p:cNvSpPr/>
           <p:nvPr/>
         </p:nvSpPr>
         <p:spPr>
           <a:xfrm>
-            <a:off x="841248" y="2999232"/>
-            <a:ext cx="5715000" cy="530352"/>
+            <a:off x="6254496" y="2395728"/>
+            <a:ext cx="5138928" cy="786384"/>
           </a:xfrm>
           <a:prstGeom prst="roundRect">
             <a:avLst>
-              <a:gd name="adj" fmla="val 6000"/>
+              <a:gd name="adj" fmla="val 7000"/>
             </a:avLst>
           </a:prstGeom>
           <a:solidFill>
@@ -7885,9 +9308,55 @@
           </a:p>
         </p:txBody>
       </p:sp>
+      <p:sp>
+        <p:nvSpPr>
+          <p:cNvPr id="11" name="Rounded Rectangle 10"/>
+          <p:cNvSpPr/>
+          <p:nvPr/>
+        </p:nvSpPr>
+        <p:spPr>
+          <a:xfrm>
+            <a:off x="6400800" y="2532888"/>
+            <a:ext cx="512064" cy="512064"/>
+          </a:xfrm>
+          <a:prstGeom prst="roundRect">
+            <a:avLst>
+              <a:gd name="adj" fmla="val 26000"/>
+            </a:avLst>
+          </a:prstGeom>
+          <a:solidFill>
+            <a:srgbClr val="EE0000"/>
+          </a:solidFill>
+          <a:ln>
+            <a:noFill/>
+          </a:ln>
+          <a:effectLst/>
+        </p:spPr>
+        <p:style>
+          <a:lnRef idx="1">
+            <a:schemeClr val="accent1"/>
+          </a:lnRef>
+          <a:fillRef idx="3">
+            <a:schemeClr val="accent1"/>
+          </a:fillRef>
+          <a:effectRef idx="2">
+            <a:schemeClr val="accent1"/>
+          </a:effectRef>
+          <a:fontRef idx="minor">
+            <a:schemeClr val="lt1"/>
+          </a:fontRef>
+        </p:style>
+        <p:txBody>
+          <a:bodyPr rtlCol="0" anchor="ctr"/>
+          <a:lstStyle/>
+          <a:p>
+            <a:pPr algn="ctr"/>
+          </a:p>
+        </p:txBody>
+      </p:sp>
       <p:pic>
         <p:nvPicPr>
-          <p:cNvPr id="10" name="Picture 9" descr="check_steel.png"/>
+          <p:cNvPr id="12" name="Picture 11" descr="check_white.png"/>
           <p:cNvPicPr>
             <a:picLocks noChangeAspect="1"/>
           </p:cNvPicPr>
@@ -7901,8 +9370,8 @@
         </p:blipFill>
         <p:spPr>
           <a:xfrm>
-            <a:off x="987552" y="3145536"/>
-            <a:ext cx="237744" cy="237744"/>
+            <a:off x="6523695" y="2655783"/>
+            <a:ext cx="266273" cy="266273"/>
           </a:xfrm>
           <a:prstGeom prst="rect">
             <a:avLst/>
@@ -7911,14 +9380,14 @@
       </p:pic>
       <p:sp>
         <p:nvSpPr>
-          <p:cNvPr id="11" name="TextBox 10"/>
+          <p:cNvPr id="13" name="TextBox 12"/>
           <p:cNvSpPr txBox="1"/>
           <p:nvPr/>
         </p:nvSpPr>
         <p:spPr>
           <a:xfrm>
-            <a:off x="1353312" y="2999232"/>
-            <a:ext cx="5029200" cy="530352"/>
+            <a:off x="7040880" y="2395728"/>
+            <a:ext cx="4206240" cy="786384"/>
           </a:xfrm>
           <a:prstGeom prst="rect">
             <a:avLst/>
@@ -7943,7 +9412,7 @@
               </a:spcAft>
             </a:pPr>
             <a:r>
-              <a:rPr sz="1200" b="0">
+              <a:rPr sz="1150" b="0">
                 <a:solidFill>
                   <a:srgbClr val="1A1A1A"/>
                 </a:solidFill>
@@ -7956,18 +9425,18 @@
       </p:sp>
       <p:sp>
         <p:nvSpPr>
-          <p:cNvPr id="12" name="Rounded Rectangle 11"/>
+          <p:cNvPr id="14" name="Rounded Rectangle 13"/>
           <p:cNvSpPr/>
           <p:nvPr/>
         </p:nvSpPr>
         <p:spPr>
           <a:xfrm>
-            <a:off x="841248" y="3602736"/>
-            <a:ext cx="5715000" cy="530352"/>
+            <a:off x="841248" y="3328416"/>
+            <a:ext cx="5138928" cy="786384"/>
           </a:xfrm>
           <a:prstGeom prst="roundRect">
             <a:avLst>
-              <a:gd name="adj" fmla="val 6000"/>
+              <a:gd name="adj" fmla="val 7000"/>
             </a:avLst>
           </a:prstGeom>
           <a:solidFill>
@@ -8002,9 +9471,55 @@
           </a:p>
         </p:txBody>
       </p:sp>
+      <p:sp>
+        <p:nvSpPr>
+          <p:cNvPr id="15" name="Rounded Rectangle 14"/>
+          <p:cNvSpPr/>
+          <p:nvPr/>
+        </p:nvSpPr>
+        <p:spPr>
+          <a:xfrm>
+            <a:off x="987552" y="3465576"/>
+            <a:ext cx="512064" cy="512064"/>
+          </a:xfrm>
+          <a:prstGeom prst="roundRect">
+            <a:avLst>
+              <a:gd name="adj" fmla="val 26000"/>
+            </a:avLst>
+          </a:prstGeom>
+          <a:solidFill>
+            <a:srgbClr val="EE0000"/>
+          </a:solidFill>
+          <a:ln>
+            <a:noFill/>
+          </a:ln>
+          <a:effectLst/>
+        </p:spPr>
+        <p:style>
+          <a:lnRef idx="1">
+            <a:schemeClr val="accent1"/>
+          </a:lnRef>
+          <a:fillRef idx="3">
+            <a:schemeClr val="accent1"/>
+          </a:fillRef>
+          <a:effectRef idx="2">
+            <a:schemeClr val="accent1"/>
+          </a:effectRef>
+          <a:fontRef idx="minor">
+            <a:schemeClr val="lt1"/>
+          </a:fontRef>
+        </p:style>
+        <p:txBody>
+          <a:bodyPr rtlCol="0" anchor="ctr"/>
+          <a:lstStyle/>
+          <a:p>
+            <a:pPr algn="ctr"/>
+          </a:p>
+        </p:txBody>
+      </p:sp>
       <p:pic>
         <p:nvPicPr>
-          <p:cNvPr id="13" name="Picture 12" descr="check_steel.png"/>
+          <p:cNvPr id="16" name="Picture 15" descr="check_white.png"/>
           <p:cNvPicPr>
             <a:picLocks noChangeAspect="1"/>
           </p:cNvPicPr>
@@ -8018,8 +9533,8 @@
         </p:blipFill>
         <p:spPr>
           <a:xfrm>
-            <a:off x="987552" y="3749040"/>
-            <a:ext cx="237744" cy="237744"/>
+            <a:off x="1110447" y="3588471"/>
+            <a:ext cx="266273" cy="266273"/>
           </a:xfrm>
           <a:prstGeom prst="rect">
             <a:avLst/>
@@ -8028,14 +9543,14 @@
       </p:pic>
       <p:sp>
         <p:nvSpPr>
-          <p:cNvPr id="14" name="TextBox 13"/>
+          <p:cNvPr id="17" name="TextBox 16"/>
           <p:cNvSpPr txBox="1"/>
           <p:nvPr/>
         </p:nvSpPr>
         <p:spPr>
           <a:xfrm>
-            <a:off x="1353312" y="3602736"/>
-            <a:ext cx="5029200" cy="530352"/>
+            <a:off x="1627632" y="3328416"/>
+            <a:ext cx="4206240" cy="786384"/>
           </a:xfrm>
           <a:prstGeom prst="rect">
             <a:avLst/>
@@ -8060,7 +9575,7 @@
               </a:spcAft>
             </a:pPr>
             <a:r>
-              <a:rPr sz="1200" b="0">
+              <a:rPr sz="1150" b="0">
                 <a:solidFill>
                   <a:srgbClr val="1A1A1A"/>
                 </a:solidFill>
@@ -8073,18 +9588,18 @@
       </p:sp>
       <p:sp>
         <p:nvSpPr>
-          <p:cNvPr id="15" name="Rounded Rectangle 14"/>
+          <p:cNvPr id="18" name="Rounded Rectangle 17"/>
           <p:cNvSpPr/>
           <p:nvPr/>
         </p:nvSpPr>
         <p:spPr>
           <a:xfrm>
-            <a:off x="841248" y="4206240"/>
-            <a:ext cx="5715000" cy="530352"/>
+            <a:off x="6254496" y="3328416"/>
+            <a:ext cx="5138928" cy="786384"/>
           </a:xfrm>
           <a:prstGeom prst="roundRect">
             <a:avLst>
-              <a:gd name="adj" fmla="val 6000"/>
+              <a:gd name="adj" fmla="val 7000"/>
             </a:avLst>
           </a:prstGeom>
           <a:solidFill>
@@ -8119,9 +9634,55 @@
           </a:p>
         </p:txBody>
       </p:sp>
+      <p:sp>
+        <p:nvSpPr>
+          <p:cNvPr id="19" name="Rounded Rectangle 18"/>
+          <p:cNvSpPr/>
+          <p:nvPr/>
+        </p:nvSpPr>
+        <p:spPr>
+          <a:xfrm>
+            <a:off x="6400800" y="3465576"/>
+            <a:ext cx="512064" cy="512064"/>
+          </a:xfrm>
+          <a:prstGeom prst="roundRect">
+            <a:avLst>
+              <a:gd name="adj" fmla="val 26000"/>
+            </a:avLst>
+          </a:prstGeom>
+          <a:solidFill>
+            <a:srgbClr val="EE0000"/>
+          </a:solidFill>
+          <a:ln>
+            <a:noFill/>
+          </a:ln>
+          <a:effectLst/>
+        </p:spPr>
+        <p:style>
+          <a:lnRef idx="1">
+            <a:schemeClr val="accent1"/>
+          </a:lnRef>
+          <a:fillRef idx="3">
+            <a:schemeClr val="accent1"/>
+          </a:fillRef>
+          <a:effectRef idx="2">
+            <a:schemeClr val="accent1"/>
+          </a:effectRef>
+          <a:fontRef idx="minor">
+            <a:schemeClr val="lt1"/>
+          </a:fontRef>
+        </p:style>
+        <p:txBody>
+          <a:bodyPr rtlCol="0" anchor="ctr"/>
+          <a:lstStyle/>
+          <a:p>
+            <a:pPr algn="ctr"/>
+          </a:p>
+        </p:txBody>
+      </p:sp>
       <p:pic>
         <p:nvPicPr>
-          <p:cNvPr id="16" name="Picture 15" descr="check_steel.png"/>
+          <p:cNvPr id="20" name="Picture 19" descr="check_white.png"/>
           <p:cNvPicPr>
             <a:picLocks noChangeAspect="1"/>
           </p:cNvPicPr>
@@ -8135,8 +9696,8 @@
         </p:blipFill>
         <p:spPr>
           <a:xfrm>
-            <a:off x="987552" y="4352544"/>
-            <a:ext cx="237744" cy="237744"/>
+            <a:off x="6523695" y="3588471"/>
+            <a:ext cx="266273" cy="266273"/>
           </a:xfrm>
           <a:prstGeom prst="rect">
             <a:avLst/>
@@ -8145,14 +9706,14 @@
       </p:pic>
       <p:sp>
         <p:nvSpPr>
-          <p:cNvPr id="17" name="TextBox 16"/>
+          <p:cNvPr id="21" name="TextBox 20"/>
           <p:cNvSpPr txBox="1"/>
           <p:nvPr/>
         </p:nvSpPr>
         <p:spPr>
           <a:xfrm>
-            <a:off x="1353312" y="4206240"/>
-            <a:ext cx="5029200" cy="530352"/>
+            <a:off x="7040880" y="3328416"/>
+            <a:ext cx="4206240" cy="786384"/>
           </a:xfrm>
           <a:prstGeom prst="rect">
             <a:avLst/>
@@ -8177,7 +9738,7 @@
               </a:spcAft>
             </a:pPr>
             <a:r>
-              <a:rPr sz="1200" b="0">
+              <a:rPr sz="1150" b="0">
                 <a:solidFill>
                   <a:srgbClr val="1A1A1A"/>
                 </a:solidFill>
@@ -8190,18 +9751,18 @@
       </p:sp>
       <p:sp>
         <p:nvSpPr>
-          <p:cNvPr id="18" name="Rounded Rectangle 17"/>
+          <p:cNvPr id="22" name="Rounded Rectangle 21"/>
           <p:cNvSpPr/>
           <p:nvPr/>
         </p:nvSpPr>
         <p:spPr>
           <a:xfrm>
-            <a:off x="841248" y="4809744"/>
-            <a:ext cx="5715000" cy="530352"/>
+            <a:off x="841248" y="4261104"/>
+            <a:ext cx="5138928" cy="786384"/>
           </a:xfrm>
           <a:prstGeom prst="roundRect">
             <a:avLst>
-              <a:gd name="adj" fmla="val 6000"/>
+              <a:gd name="adj" fmla="val 7000"/>
             </a:avLst>
           </a:prstGeom>
           <a:solidFill>
@@ -8236,9 +9797,55 @@
           </a:p>
         </p:txBody>
       </p:sp>
+      <p:sp>
+        <p:nvSpPr>
+          <p:cNvPr id="23" name="Rounded Rectangle 22"/>
+          <p:cNvSpPr/>
+          <p:nvPr/>
+        </p:nvSpPr>
+        <p:spPr>
+          <a:xfrm>
+            <a:off x="987552" y="4398264"/>
+            <a:ext cx="512064" cy="512064"/>
+          </a:xfrm>
+          <a:prstGeom prst="roundRect">
+            <a:avLst>
+              <a:gd name="adj" fmla="val 26000"/>
+            </a:avLst>
+          </a:prstGeom>
+          <a:solidFill>
+            <a:srgbClr val="EE0000"/>
+          </a:solidFill>
+          <a:ln>
+            <a:noFill/>
+          </a:ln>
+          <a:effectLst/>
+        </p:spPr>
+        <p:style>
+          <a:lnRef idx="1">
+            <a:schemeClr val="accent1"/>
+          </a:lnRef>
+          <a:fillRef idx="3">
+            <a:schemeClr val="accent1"/>
+          </a:fillRef>
+          <a:effectRef idx="2">
+            <a:schemeClr val="accent1"/>
+          </a:effectRef>
+          <a:fontRef idx="minor">
+            <a:schemeClr val="lt1"/>
+          </a:fontRef>
+        </p:style>
+        <p:txBody>
+          <a:bodyPr rtlCol="0" anchor="ctr"/>
+          <a:lstStyle/>
+          <a:p>
+            <a:pPr algn="ctr"/>
+          </a:p>
+        </p:txBody>
+      </p:sp>
       <p:pic>
         <p:nvPicPr>
-          <p:cNvPr id="19" name="Picture 18" descr="check_steel.png"/>
+          <p:cNvPr id="24" name="Picture 23" descr="check_white.png"/>
           <p:cNvPicPr>
             <a:picLocks noChangeAspect="1"/>
           </p:cNvPicPr>
@@ -8252,8 +9859,8 @@
         </p:blipFill>
         <p:spPr>
           <a:xfrm>
-            <a:off x="987552" y="4956048"/>
-            <a:ext cx="237744" cy="237744"/>
+            <a:off x="1110447" y="4521159"/>
+            <a:ext cx="266273" cy="266273"/>
           </a:xfrm>
           <a:prstGeom prst="rect">
             <a:avLst/>
@@ -8262,14 +9869,14 @@
       </p:pic>
       <p:sp>
         <p:nvSpPr>
-          <p:cNvPr id="20" name="TextBox 19"/>
+          <p:cNvPr id="25" name="TextBox 24"/>
           <p:cNvSpPr txBox="1"/>
           <p:nvPr/>
         </p:nvSpPr>
         <p:spPr>
           <a:xfrm>
-            <a:off x="1353312" y="4809744"/>
-            <a:ext cx="5029200" cy="530352"/>
+            <a:off x="1627632" y="4261104"/>
+            <a:ext cx="4206240" cy="786384"/>
           </a:xfrm>
           <a:prstGeom prst="rect">
             <a:avLst/>
@@ -8294,221 +9901,13 @@
               </a:spcAft>
             </a:pPr>
             <a:r>
-              <a:rPr sz="1200" b="0">
+              <a:rPr sz="1150" b="0">
                 <a:solidFill>
                   <a:srgbClr val="1A1A1A"/>
                 </a:solidFill>
                 <a:latin typeface="Red Hat Text"/>
               </a:rPr>
               <a:t>Every pipeline references it — that's the leverage</a:t>
-            </a:r>
-          </a:p>
-        </p:txBody>
-      </p:sp>
-      <p:sp>
-        <p:nvSpPr>
-          <p:cNvPr id="21" name="Rounded Rectangle 20"/>
-          <p:cNvSpPr/>
-          <p:nvPr/>
-        </p:nvSpPr>
-        <p:spPr>
-          <a:xfrm>
-            <a:off x="6812280" y="2395728"/>
-            <a:ext cx="4538167" cy="2944368"/>
-          </a:xfrm>
-          <a:prstGeom prst="roundRect">
-            <a:avLst>
-              <a:gd name="adj" fmla="val 4000"/>
-            </a:avLst>
-          </a:prstGeom>
-          <a:solidFill>
-            <a:srgbClr val="FFFFFF"/>
-          </a:solidFill>
-          <a:ln w="15240">
-            <a:solidFill>
-              <a:srgbClr val="DDE1E6"/>
-            </a:solidFill>
-          </a:ln>
-          <a:effectLst/>
-        </p:spPr>
-        <p:style>
-          <a:lnRef idx="1">
-            <a:schemeClr val="accent1"/>
-          </a:lnRef>
-          <a:fillRef idx="3">
-            <a:schemeClr val="accent1"/>
-          </a:fillRef>
-          <a:effectRef idx="2">
-            <a:schemeClr val="accent1"/>
-          </a:effectRef>
-          <a:fontRef idx="minor">
-            <a:schemeClr val="lt1"/>
-          </a:fontRef>
-        </p:style>
-        <p:txBody>
-          <a:bodyPr rtlCol="0" anchor="ctr"/>
-          <a:lstStyle/>
-          <a:p>
-            <a:pPr algn="ctr"/>
-          </a:p>
-        </p:txBody>
-      </p:sp>
-      <p:sp>
-        <p:nvSpPr>
-          <p:cNvPr id="22" name="Rounded Rectangle 21"/>
-          <p:cNvSpPr/>
-          <p:nvPr/>
-        </p:nvSpPr>
-        <p:spPr>
-          <a:xfrm>
-            <a:off x="7013448" y="2596896"/>
-            <a:ext cx="1298448" cy="310896"/>
-          </a:xfrm>
-          <a:prstGeom prst="roundRect">
-            <a:avLst>
-              <a:gd name="adj" fmla="val 50000"/>
-            </a:avLst>
-          </a:prstGeom>
-          <a:solidFill>
-            <a:srgbClr val="FCECEC"/>
-          </a:solidFill>
-          <a:ln>
-            <a:noFill/>
-          </a:ln>
-          <a:effectLst/>
-        </p:spPr>
-        <p:style>
-          <a:lnRef idx="1">
-            <a:schemeClr val="accent1"/>
-          </a:lnRef>
-          <a:fillRef idx="3">
-            <a:schemeClr val="accent1"/>
-          </a:fillRef>
-          <a:effectRef idx="2">
-            <a:schemeClr val="accent1"/>
-          </a:effectRef>
-          <a:fontRef idx="minor">
-            <a:schemeClr val="lt1"/>
-          </a:fontRef>
-        </p:style>
-        <p:txBody>
-          <a:bodyPr rtlCol="0" anchor="ctr"/>
-          <a:lstStyle/>
-          <a:p>
-            <a:pPr algn="ctr"/>
-          </a:p>
-        </p:txBody>
-      </p:sp>
-      <p:sp>
-        <p:nvSpPr>
-          <p:cNvPr id="23" name="TextBox 22"/>
-          <p:cNvSpPr txBox="1"/>
-          <p:nvPr/>
-        </p:nvSpPr>
-        <p:spPr>
-          <a:xfrm>
-            <a:off x="7013448" y="2596896"/>
-            <a:ext cx="1298448" cy="310896"/>
-          </a:xfrm>
-          <a:prstGeom prst="rect">
-            <a:avLst/>
-          </a:prstGeom>
-          <a:noFill/>
-        </p:spPr>
-        <p:txBody>
-          <a:bodyPr wrap="none" anchor="ctr" lIns="0" rIns="0" tIns="0" bIns="0">
-            <a:spAutoFit/>
-          </a:bodyPr>
-          <a:lstStyle/>
-          <a:p>
-            <a:pPr algn="ctr">
-              <a:lnSpc>
-                <a:spcPct val="106000"/>
-              </a:lnSpc>
-              <a:spcBef>
-                <a:spcPts val="0"/>
-              </a:spcBef>
-              <a:spcAft>
-                <a:spcPts val="0"/>
-              </a:spcAft>
-            </a:pPr>
-            <a:r>
-              <a:rPr sz="850" b="1">
-                <a:solidFill>
-                  <a:srgbClr val="B80000"/>
-                </a:solidFill>
-                <a:latin typeface="Red Hat Display"/>
-              </a:rPr>
-              <a:t>MEDIA PASS</a:t>
-            </a:r>
-          </a:p>
-        </p:txBody>
-      </p:sp>
-      <p:pic>
-        <p:nvPicPr>
-          <p:cNvPr id="24" name="Picture 23" descr="eye_slate.png"/>
-          <p:cNvPicPr>
-            <a:picLocks noChangeAspect="1"/>
-          </p:cNvPicPr>
-          <p:nvPr/>
-        </p:nvPicPr>
-        <p:blipFill>
-          <a:blip r:embed="rId4"/>
-          <a:stretch>
-            <a:fillRect/>
-          </a:stretch>
-        </p:blipFill>
-        <p:spPr>
-          <a:xfrm>
-            <a:off x="8843619" y="3108960"/>
-            <a:ext cx="475488" cy="475488"/>
-          </a:xfrm>
-          <a:prstGeom prst="rect">
-            <a:avLst/>
-          </a:prstGeom>
-        </p:spPr>
-      </p:pic>
-      <p:sp>
-        <p:nvSpPr>
-          <p:cNvPr id="25" name="TextBox 24"/>
-          <p:cNvSpPr txBox="1"/>
-          <p:nvPr/>
-        </p:nvSpPr>
-        <p:spPr>
-          <a:xfrm>
-            <a:off x="7050024" y="3721608"/>
-            <a:ext cx="4062679" cy="1481328"/>
-          </a:xfrm>
-          <a:prstGeom prst="rect">
-            <a:avLst/>
-          </a:prstGeom>
-          <a:noFill/>
-        </p:spPr>
-        <p:txBody>
-          <a:bodyPr wrap="square" anchor="t" lIns="0" rIns="0" tIns="0" bIns="0">
-            <a:spAutoFit/>
-          </a:bodyPr>
-          <a:lstStyle/>
-          <a:p>
-            <a:pPr algn="l">
-              <a:lnSpc>
-                <a:spcPct val="120000"/>
-              </a:lnSpc>
-              <a:spcBef>
-                <a:spcPts val="0"/>
-              </a:spcBef>
-              <a:spcAft>
-                <a:spcPts val="0"/>
-              </a:spcAft>
-            </a:pPr>
-            <a:r>
-              <a:rPr sz="950" b="0">
-                <a:solidFill>
-                  <a:srgbClr val="8A9099"/>
-                </a:solidFill>
-                <a:latin typeface="Red Hat Text"/>
-              </a:rPr>
-              <a:t>Two Task cards side by side — shipped "maven / openjdk-17 / no image param" (red X on a Java 21 app) vs curated "maven-jdk21 / openjdk-21" (green check).</a:t>
             </a:r>
           </a:p>
         </p:txBody>
@@ -8861,11 +10260,11 @@
         <p:spPr>
           <a:xfrm>
             <a:off x="841248" y="2670048"/>
-            <a:ext cx="5715000" cy="530352"/>
+            <a:ext cx="5138928" cy="786384"/>
           </a:xfrm>
           <a:prstGeom prst="roundRect">
             <a:avLst>
-              <a:gd name="adj" fmla="val 6000"/>
+              <a:gd name="adj" fmla="val 7000"/>
             </a:avLst>
           </a:prstGeom>
           <a:solidFill>
@@ -8900,9 +10299,55 @@
           </a:p>
         </p:txBody>
       </p:sp>
+      <p:sp>
+        <p:nvSpPr>
+          <p:cNvPr id="8" name="Rounded Rectangle 7"/>
+          <p:cNvSpPr/>
+          <p:nvPr/>
+        </p:nvSpPr>
+        <p:spPr>
+          <a:xfrm>
+            <a:off x="987552" y="2807208"/>
+            <a:ext cx="512064" cy="512064"/>
+          </a:xfrm>
+          <a:prstGeom prst="roundRect">
+            <a:avLst>
+              <a:gd name="adj" fmla="val 26000"/>
+            </a:avLst>
+          </a:prstGeom>
+          <a:solidFill>
+            <a:srgbClr val="EE0000"/>
+          </a:solidFill>
+          <a:ln>
+            <a:noFill/>
+          </a:ln>
+          <a:effectLst/>
+        </p:spPr>
+        <p:style>
+          <a:lnRef idx="1">
+            <a:schemeClr val="accent1"/>
+          </a:lnRef>
+          <a:fillRef idx="3">
+            <a:schemeClr val="accent1"/>
+          </a:fillRef>
+          <a:effectRef idx="2">
+            <a:schemeClr val="accent1"/>
+          </a:effectRef>
+          <a:fontRef idx="minor">
+            <a:schemeClr val="lt1"/>
+          </a:fontRef>
+        </p:style>
+        <p:txBody>
+          <a:bodyPr rtlCol="0" anchor="ctr"/>
+          <a:lstStyle/>
+          <a:p>
+            <a:pPr algn="ctr"/>
+          </a:p>
+        </p:txBody>
+      </p:sp>
       <p:pic>
         <p:nvPicPr>
-          <p:cNvPr id="8" name="Picture 7" descr="check_steel.png"/>
+          <p:cNvPr id="9" name="Picture 8" descr="check_white.png"/>
           <p:cNvPicPr>
             <a:picLocks noChangeAspect="1"/>
           </p:cNvPicPr>
@@ -8916,8 +10361,8 @@
         </p:blipFill>
         <p:spPr>
           <a:xfrm>
-            <a:off x="987552" y="2816352"/>
-            <a:ext cx="237744" cy="237744"/>
+            <a:off x="1110447" y="2930103"/>
+            <a:ext cx="266273" cy="266273"/>
           </a:xfrm>
           <a:prstGeom prst="rect">
             <a:avLst/>
@@ -8926,14 +10371,14 @@
       </p:pic>
       <p:sp>
         <p:nvSpPr>
-          <p:cNvPr id="9" name="TextBox 8"/>
+          <p:cNvPr id="10" name="TextBox 9"/>
           <p:cNvSpPr txBox="1"/>
           <p:nvPr/>
         </p:nvSpPr>
         <p:spPr>
           <a:xfrm>
-            <a:off x="1353312" y="2670048"/>
-            <a:ext cx="5029200" cy="530352"/>
+            <a:off x="1627632" y="2670048"/>
+            <a:ext cx="4206240" cy="786384"/>
           </a:xfrm>
           <a:prstGeom prst="rect">
             <a:avLst/>
@@ -8958,7 +10403,7 @@
               </a:spcAft>
             </a:pPr>
             <a:r>
-              <a:rPr sz="1200" b="0">
+              <a:rPr sz="1150" b="0">
                 <a:solidFill>
                   <a:srgbClr val="1A1A1A"/>
                 </a:solidFill>
@@ -8971,18 +10416,18 @@
       </p:sp>
       <p:sp>
         <p:nvSpPr>
-          <p:cNvPr id="10" name="Rounded Rectangle 9"/>
+          <p:cNvPr id="11" name="Rounded Rectangle 10"/>
           <p:cNvSpPr/>
           <p:nvPr/>
         </p:nvSpPr>
         <p:spPr>
           <a:xfrm>
-            <a:off x="841248" y="3273552"/>
-            <a:ext cx="5715000" cy="530352"/>
+            <a:off x="6254496" y="2670048"/>
+            <a:ext cx="5138928" cy="786384"/>
           </a:xfrm>
           <a:prstGeom prst="roundRect">
             <a:avLst>
-              <a:gd name="adj" fmla="val 6000"/>
+              <a:gd name="adj" fmla="val 7000"/>
             </a:avLst>
           </a:prstGeom>
           <a:solidFill>
@@ -9017,9 +10462,55 @@
           </a:p>
         </p:txBody>
       </p:sp>
+      <p:sp>
+        <p:nvSpPr>
+          <p:cNvPr id="12" name="Rounded Rectangle 11"/>
+          <p:cNvSpPr/>
+          <p:nvPr/>
+        </p:nvSpPr>
+        <p:spPr>
+          <a:xfrm>
+            <a:off x="6400800" y="2807208"/>
+            <a:ext cx="512064" cy="512064"/>
+          </a:xfrm>
+          <a:prstGeom prst="roundRect">
+            <a:avLst>
+              <a:gd name="adj" fmla="val 26000"/>
+            </a:avLst>
+          </a:prstGeom>
+          <a:solidFill>
+            <a:srgbClr val="EE0000"/>
+          </a:solidFill>
+          <a:ln>
+            <a:noFill/>
+          </a:ln>
+          <a:effectLst/>
+        </p:spPr>
+        <p:style>
+          <a:lnRef idx="1">
+            <a:schemeClr val="accent1"/>
+          </a:lnRef>
+          <a:fillRef idx="3">
+            <a:schemeClr val="accent1"/>
+          </a:fillRef>
+          <a:effectRef idx="2">
+            <a:schemeClr val="accent1"/>
+          </a:effectRef>
+          <a:fontRef idx="minor">
+            <a:schemeClr val="lt1"/>
+          </a:fontRef>
+        </p:style>
+        <p:txBody>
+          <a:bodyPr rtlCol="0" anchor="ctr"/>
+          <a:lstStyle/>
+          <a:p>
+            <a:pPr algn="ctr"/>
+          </a:p>
+        </p:txBody>
+      </p:sp>
       <p:pic>
         <p:nvPicPr>
-          <p:cNvPr id="11" name="Picture 10" descr="check_steel.png"/>
+          <p:cNvPr id="13" name="Picture 12" descr="check_white.png"/>
           <p:cNvPicPr>
             <a:picLocks noChangeAspect="1"/>
           </p:cNvPicPr>
@@ -9033,8 +10524,8 @@
         </p:blipFill>
         <p:spPr>
           <a:xfrm>
-            <a:off x="987552" y="3419856"/>
-            <a:ext cx="237744" cy="237744"/>
+            <a:off x="6523695" y="2930103"/>
+            <a:ext cx="266273" cy="266273"/>
           </a:xfrm>
           <a:prstGeom prst="rect">
             <a:avLst/>
@@ -9043,14 +10534,14 @@
       </p:pic>
       <p:sp>
         <p:nvSpPr>
-          <p:cNvPr id="12" name="TextBox 11"/>
+          <p:cNvPr id="14" name="TextBox 13"/>
           <p:cNvSpPr txBox="1"/>
           <p:nvPr/>
         </p:nvSpPr>
         <p:spPr>
           <a:xfrm>
-            <a:off x="1353312" y="3273552"/>
-            <a:ext cx="5029200" cy="530352"/>
+            <a:off x="7040880" y="2670048"/>
+            <a:ext cx="4206240" cy="786384"/>
           </a:xfrm>
           <a:prstGeom prst="rect">
             <a:avLst/>
@@ -9075,7 +10566,7 @@
               </a:spcAft>
             </a:pPr>
             <a:r>
-              <a:rPr sz="1200" b="0">
+              <a:rPr sz="1150" b="0">
                 <a:solidFill>
                   <a:srgbClr val="1A1A1A"/>
                 </a:solidFill>
@@ -9088,18 +10579,18 @@
       </p:sp>
       <p:sp>
         <p:nvSpPr>
-          <p:cNvPr id="13" name="Rounded Rectangle 12"/>
+          <p:cNvPr id="15" name="Rounded Rectangle 14"/>
           <p:cNvSpPr/>
           <p:nvPr/>
         </p:nvSpPr>
         <p:spPr>
           <a:xfrm>
-            <a:off x="841248" y="3877056"/>
-            <a:ext cx="5715000" cy="530352"/>
+            <a:off x="841248" y="3602736"/>
+            <a:ext cx="5138928" cy="786384"/>
           </a:xfrm>
           <a:prstGeom prst="roundRect">
             <a:avLst>
-              <a:gd name="adj" fmla="val 6000"/>
+              <a:gd name="adj" fmla="val 7000"/>
             </a:avLst>
           </a:prstGeom>
           <a:solidFill>
@@ -9134,9 +10625,55 @@
           </a:p>
         </p:txBody>
       </p:sp>
+      <p:sp>
+        <p:nvSpPr>
+          <p:cNvPr id="16" name="Rounded Rectangle 15"/>
+          <p:cNvSpPr/>
+          <p:nvPr/>
+        </p:nvSpPr>
+        <p:spPr>
+          <a:xfrm>
+            <a:off x="987552" y="3739896"/>
+            <a:ext cx="512064" cy="512064"/>
+          </a:xfrm>
+          <a:prstGeom prst="roundRect">
+            <a:avLst>
+              <a:gd name="adj" fmla="val 26000"/>
+            </a:avLst>
+          </a:prstGeom>
+          <a:solidFill>
+            <a:srgbClr val="EE0000"/>
+          </a:solidFill>
+          <a:ln>
+            <a:noFill/>
+          </a:ln>
+          <a:effectLst/>
+        </p:spPr>
+        <p:style>
+          <a:lnRef idx="1">
+            <a:schemeClr val="accent1"/>
+          </a:lnRef>
+          <a:fillRef idx="3">
+            <a:schemeClr val="accent1"/>
+          </a:fillRef>
+          <a:effectRef idx="2">
+            <a:schemeClr val="accent1"/>
+          </a:effectRef>
+          <a:fontRef idx="minor">
+            <a:schemeClr val="lt1"/>
+          </a:fontRef>
+        </p:style>
+        <p:txBody>
+          <a:bodyPr rtlCol="0" anchor="ctr"/>
+          <a:lstStyle/>
+          <a:p>
+            <a:pPr algn="ctr"/>
+          </a:p>
+        </p:txBody>
+      </p:sp>
       <p:pic>
         <p:nvPicPr>
-          <p:cNvPr id="14" name="Picture 13" descr="check_steel.png"/>
+          <p:cNvPr id="17" name="Picture 16" descr="check_white.png"/>
           <p:cNvPicPr>
             <a:picLocks noChangeAspect="1"/>
           </p:cNvPicPr>
@@ -9150,8 +10687,8 @@
         </p:blipFill>
         <p:spPr>
           <a:xfrm>
-            <a:off x="987552" y="4023360"/>
-            <a:ext cx="237744" cy="237744"/>
+            <a:off x="1110447" y="3862791"/>
+            <a:ext cx="266273" cy="266273"/>
           </a:xfrm>
           <a:prstGeom prst="rect">
             <a:avLst/>
@@ -9160,14 +10697,14 @@
       </p:pic>
       <p:sp>
         <p:nvSpPr>
-          <p:cNvPr id="15" name="TextBox 14"/>
+          <p:cNvPr id="18" name="TextBox 17"/>
           <p:cNvSpPr txBox="1"/>
           <p:nvPr/>
         </p:nvSpPr>
         <p:spPr>
           <a:xfrm>
-            <a:off x="1353312" y="3877056"/>
-            <a:ext cx="5029200" cy="530352"/>
+            <a:off x="1627632" y="3602736"/>
+            <a:ext cx="4206240" cy="786384"/>
           </a:xfrm>
           <a:prstGeom prst="rect">
             <a:avLst/>
@@ -9192,7 +10729,7 @@
               </a:spcAft>
             </a:pPr>
             <a:r>
-              <a:rPr sz="1200" b="0">
+              <a:rPr sz="1150" b="0">
                 <a:solidFill>
                   <a:srgbClr val="1A1A1A"/>
                 </a:solidFill>
@@ -9205,18 +10742,18 @@
       </p:sp>
       <p:sp>
         <p:nvSpPr>
-          <p:cNvPr id="16" name="Rounded Rectangle 15"/>
+          <p:cNvPr id="19" name="Rounded Rectangle 18"/>
           <p:cNvSpPr/>
           <p:nvPr/>
         </p:nvSpPr>
         <p:spPr>
           <a:xfrm>
-            <a:off x="841248" y="4480560"/>
-            <a:ext cx="5715000" cy="530352"/>
+            <a:off x="6254496" y="3602736"/>
+            <a:ext cx="5138928" cy="786384"/>
           </a:xfrm>
           <a:prstGeom prst="roundRect">
             <a:avLst>
-              <a:gd name="adj" fmla="val 6000"/>
+              <a:gd name="adj" fmla="val 7000"/>
             </a:avLst>
           </a:prstGeom>
           <a:solidFill>
@@ -9251,9 +10788,55 @@
           </a:p>
         </p:txBody>
       </p:sp>
+      <p:sp>
+        <p:nvSpPr>
+          <p:cNvPr id="20" name="Rounded Rectangle 19"/>
+          <p:cNvSpPr/>
+          <p:nvPr/>
+        </p:nvSpPr>
+        <p:spPr>
+          <a:xfrm>
+            <a:off x="6400800" y="3739896"/>
+            <a:ext cx="512064" cy="512064"/>
+          </a:xfrm>
+          <a:prstGeom prst="roundRect">
+            <a:avLst>
+              <a:gd name="adj" fmla="val 26000"/>
+            </a:avLst>
+          </a:prstGeom>
+          <a:solidFill>
+            <a:srgbClr val="EE0000"/>
+          </a:solidFill>
+          <a:ln>
+            <a:noFill/>
+          </a:ln>
+          <a:effectLst/>
+        </p:spPr>
+        <p:style>
+          <a:lnRef idx="1">
+            <a:schemeClr val="accent1"/>
+          </a:lnRef>
+          <a:fillRef idx="3">
+            <a:schemeClr val="accent1"/>
+          </a:fillRef>
+          <a:effectRef idx="2">
+            <a:schemeClr val="accent1"/>
+          </a:effectRef>
+          <a:fontRef idx="minor">
+            <a:schemeClr val="lt1"/>
+          </a:fontRef>
+        </p:style>
+        <p:txBody>
+          <a:bodyPr rtlCol="0" anchor="ctr"/>
+          <a:lstStyle/>
+          <a:p>
+            <a:pPr algn="ctr"/>
+          </a:p>
+        </p:txBody>
+      </p:sp>
       <p:pic>
         <p:nvPicPr>
-          <p:cNvPr id="17" name="Picture 16" descr="check_steel.png"/>
+          <p:cNvPr id="21" name="Picture 20" descr="check_white.png"/>
           <p:cNvPicPr>
             <a:picLocks noChangeAspect="1"/>
           </p:cNvPicPr>
@@ -9267,8 +10850,8 @@
         </p:blipFill>
         <p:spPr>
           <a:xfrm>
-            <a:off x="987552" y="4626864"/>
-            <a:ext cx="237744" cy="237744"/>
+            <a:off x="6523695" y="3862791"/>
+            <a:ext cx="266273" cy="266273"/>
           </a:xfrm>
           <a:prstGeom prst="rect">
             <a:avLst/>
@@ -9277,14 +10860,14 @@
       </p:pic>
       <p:sp>
         <p:nvSpPr>
-          <p:cNvPr id="18" name="TextBox 17"/>
+          <p:cNvPr id="22" name="TextBox 21"/>
           <p:cNvSpPr txBox="1"/>
           <p:nvPr/>
         </p:nvSpPr>
         <p:spPr>
           <a:xfrm>
-            <a:off x="1353312" y="4480560"/>
-            <a:ext cx="5029200" cy="530352"/>
+            <a:off x="7040880" y="3602736"/>
+            <a:ext cx="4206240" cy="786384"/>
           </a:xfrm>
           <a:prstGeom prst="rect">
             <a:avLst/>
@@ -9309,7 +10892,7 @@
               </a:spcAft>
             </a:pPr>
             <a:r>
-              <a:rPr sz="1200" b="0">
+              <a:rPr sz="1150" b="0">
                 <a:solidFill>
                   <a:srgbClr val="1A1A1A"/>
                 </a:solidFill>
@@ -9322,18 +10905,18 @@
       </p:sp>
       <p:sp>
         <p:nvSpPr>
-          <p:cNvPr id="19" name="Rounded Rectangle 18"/>
+          <p:cNvPr id="23" name="Rounded Rectangle 22"/>
           <p:cNvSpPr/>
           <p:nvPr/>
         </p:nvSpPr>
         <p:spPr>
           <a:xfrm>
-            <a:off x="841248" y="5084064"/>
-            <a:ext cx="5715000" cy="530352"/>
+            <a:off x="841248" y="4535424"/>
+            <a:ext cx="5138928" cy="786384"/>
           </a:xfrm>
           <a:prstGeom prst="roundRect">
             <a:avLst>
-              <a:gd name="adj" fmla="val 6000"/>
+              <a:gd name="adj" fmla="val 7000"/>
             </a:avLst>
           </a:prstGeom>
           <a:solidFill>
@@ -9368,9 +10951,55 @@
           </a:p>
         </p:txBody>
       </p:sp>
+      <p:sp>
+        <p:nvSpPr>
+          <p:cNvPr id="24" name="Rounded Rectangle 23"/>
+          <p:cNvSpPr/>
+          <p:nvPr/>
+        </p:nvSpPr>
+        <p:spPr>
+          <a:xfrm>
+            <a:off x="987552" y="4672584"/>
+            <a:ext cx="512064" cy="512064"/>
+          </a:xfrm>
+          <a:prstGeom prst="roundRect">
+            <a:avLst>
+              <a:gd name="adj" fmla="val 26000"/>
+            </a:avLst>
+          </a:prstGeom>
+          <a:solidFill>
+            <a:srgbClr val="EE0000"/>
+          </a:solidFill>
+          <a:ln>
+            <a:noFill/>
+          </a:ln>
+          <a:effectLst/>
+        </p:spPr>
+        <p:style>
+          <a:lnRef idx="1">
+            <a:schemeClr val="accent1"/>
+          </a:lnRef>
+          <a:fillRef idx="3">
+            <a:schemeClr val="accent1"/>
+          </a:fillRef>
+          <a:effectRef idx="2">
+            <a:schemeClr val="accent1"/>
+          </a:effectRef>
+          <a:fontRef idx="minor">
+            <a:schemeClr val="lt1"/>
+          </a:fontRef>
+        </p:style>
+        <p:txBody>
+          <a:bodyPr rtlCol="0" anchor="ctr"/>
+          <a:lstStyle/>
+          <a:p>
+            <a:pPr algn="ctr"/>
+          </a:p>
+        </p:txBody>
+      </p:sp>
       <p:pic>
         <p:nvPicPr>
-          <p:cNvPr id="20" name="Picture 19" descr="check_steel.png"/>
+          <p:cNvPr id="25" name="Picture 24" descr="check_white.png"/>
           <p:cNvPicPr>
             <a:picLocks noChangeAspect="1"/>
           </p:cNvPicPr>
@@ -9384,8 +11013,8 @@
         </p:blipFill>
         <p:spPr>
           <a:xfrm>
-            <a:off x="987552" y="5230368"/>
-            <a:ext cx="237744" cy="237744"/>
+            <a:off x="1110447" y="4795479"/>
+            <a:ext cx="266273" cy="266273"/>
           </a:xfrm>
           <a:prstGeom prst="rect">
             <a:avLst/>
@@ -9394,14 +11023,14 @@
       </p:pic>
       <p:sp>
         <p:nvSpPr>
-          <p:cNvPr id="21" name="TextBox 20"/>
+          <p:cNvPr id="26" name="TextBox 25"/>
           <p:cNvSpPr txBox="1"/>
           <p:nvPr/>
         </p:nvSpPr>
         <p:spPr>
           <a:xfrm>
-            <a:off x="1353312" y="5084064"/>
-            <a:ext cx="5029200" cy="530352"/>
+            <a:off x="1627632" y="4535424"/>
+            <a:ext cx="4206240" cy="786384"/>
           </a:xfrm>
           <a:prstGeom prst="rect">
             <a:avLst/>
@@ -9426,221 +11055,13 @@
               </a:spcAft>
             </a:pPr>
             <a:r>
-              <a:rPr sz="1200" b="0">
+              <a:rPr sz="1150" b="0">
                 <a:solidFill>
                   <a:srgbClr val="1A1A1A"/>
                 </a:solidFill>
                 <a:latin typeface="Red Hat Text"/>
               </a:rPr>
               <a:t>Every push built the same way</a:t>
-            </a:r>
-          </a:p>
-        </p:txBody>
-      </p:sp>
-      <p:sp>
-        <p:nvSpPr>
-          <p:cNvPr id="22" name="Rounded Rectangle 21"/>
-          <p:cNvSpPr/>
-          <p:nvPr/>
-        </p:nvSpPr>
-        <p:spPr>
-          <a:xfrm>
-            <a:off x="6812280" y="2670048"/>
-            <a:ext cx="4538167" cy="2944368"/>
-          </a:xfrm>
-          <a:prstGeom prst="roundRect">
-            <a:avLst>
-              <a:gd name="adj" fmla="val 4000"/>
-            </a:avLst>
-          </a:prstGeom>
-          <a:solidFill>
-            <a:srgbClr val="FFFFFF"/>
-          </a:solidFill>
-          <a:ln w="15240">
-            <a:solidFill>
-              <a:srgbClr val="DDE1E6"/>
-            </a:solidFill>
-          </a:ln>
-          <a:effectLst/>
-        </p:spPr>
-        <p:style>
-          <a:lnRef idx="1">
-            <a:schemeClr val="accent1"/>
-          </a:lnRef>
-          <a:fillRef idx="3">
-            <a:schemeClr val="accent1"/>
-          </a:fillRef>
-          <a:effectRef idx="2">
-            <a:schemeClr val="accent1"/>
-          </a:effectRef>
-          <a:fontRef idx="minor">
-            <a:schemeClr val="lt1"/>
-          </a:fontRef>
-        </p:style>
-        <p:txBody>
-          <a:bodyPr rtlCol="0" anchor="ctr"/>
-          <a:lstStyle/>
-          <a:p>
-            <a:pPr algn="ctr"/>
-          </a:p>
-        </p:txBody>
-      </p:sp>
-      <p:sp>
-        <p:nvSpPr>
-          <p:cNvPr id="23" name="Rounded Rectangle 22"/>
-          <p:cNvSpPr/>
-          <p:nvPr/>
-        </p:nvSpPr>
-        <p:spPr>
-          <a:xfrm>
-            <a:off x="7013448" y="2871216"/>
-            <a:ext cx="1298448" cy="310896"/>
-          </a:xfrm>
-          <a:prstGeom prst="roundRect">
-            <a:avLst>
-              <a:gd name="adj" fmla="val 50000"/>
-            </a:avLst>
-          </a:prstGeom>
-          <a:solidFill>
-            <a:srgbClr val="FCECEC"/>
-          </a:solidFill>
-          <a:ln>
-            <a:noFill/>
-          </a:ln>
-          <a:effectLst/>
-        </p:spPr>
-        <p:style>
-          <a:lnRef idx="1">
-            <a:schemeClr val="accent1"/>
-          </a:lnRef>
-          <a:fillRef idx="3">
-            <a:schemeClr val="accent1"/>
-          </a:fillRef>
-          <a:effectRef idx="2">
-            <a:schemeClr val="accent1"/>
-          </a:effectRef>
-          <a:fontRef idx="minor">
-            <a:schemeClr val="lt1"/>
-          </a:fontRef>
-        </p:style>
-        <p:txBody>
-          <a:bodyPr rtlCol="0" anchor="ctr"/>
-          <a:lstStyle/>
-          <a:p>
-            <a:pPr algn="ctr"/>
-          </a:p>
-        </p:txBody>
-      </p:sp>
-      <p:sp>
-        <p:nvSpPr>
-          <p:cNvPr id="24" name="TextBox 23"/>
-          <p:cNvSpPr txBox="1"/>
-          <p:nvPr/>
-        </p:nvSpPr>
-        <p:spPr>
-          <a:xfrm>
-            <a:off x="7013448" y="2871216"/>
-            <a:ext cx="1298448" cy="310896"/>
-          </a:xfrm>
-          <a:prstGeom prst="rect">
-            <a:avLst/>
-          </a:prstGeom>
-          <a:noFill/>
-        </p:spPr>
-        <p:txBody>
-          <a:bodyPr wrap="none" anchor="ctr" lIns="0" rIns="0" tIns="0" bIns="0">
-            <a:spAutoFit/>
-          </a:bodyPr>
-          <a:lstStyle/>
-          <a:p>
-            <a:pPr algn="ctr">
-              <a:lnSpc>
-                <a:spcPct val="106000"/>
-              </a:lnSpc>
-              <a:spcBef>
-                <a:spcPts val="0"/>
-              </a:spcBef>
-              <a:spcAft>
-                <a:spcPts val="0"/>
-              </a:spcAft>
-            </a:pPr>
-            <a:r>
-              <a:rPr sz="850" b="1">
-                <a:solidFill>
-                  <a:srgbClr val="B80000"/>
-                </a:solidFill>
-                <a:latin typeface="Red Hat Display"/>
-              </a:rPr>
-              <a:t>MEDIA PASS</a:t>
-            </a:r>
-          </a:p>
-        </p:txBody>
-      </p:sp>
-      <p:pic>
-        <p:nvPicPr>
-          <p:cNvPr id="25" name="Picture 24" descr="eye_slate.png"/>
-          <p:cNvPicPr>
-            <a:picLocks noChangeAspect="1"/>
-          </p:cNvPicPr>
-          <p:nvPr/>
-        </p:nvPicPr>
-        <p:blipFill>
-          <a:blip r:embed="rId4"/>
-          <a:stretch>
-            <a:fillRect/>
-          </a:stretch>
-        </p:blipFill>
-        <p:spPr>
-          <a:xfrm>
-            <a:off x="8843619" y="3383280"/>
-            <a:ext cx="475488" cy="475488"/>
-          </a:xfrm>
-          <a:prstGeom prst="rect">
-            <a:avLst/>
-          </a:prstGeom>
-        </p:spPr>
-      </p:pic>
-      <p:sp>
-        <p:nvSpPr>
-          <p:cNvPr id="26" name="TextBox 25"/>
-          <p:cNvSpPr txBox="1"/>
-          <p:nvPr/>
-        </p:nvSpPr>
-        <p:spPr>
-          <a:xfrm>
-            <a:off x="7050024" y="3995928"/>
-            <a:ext cx="4062679" cy="1481328"/>
-          </a:xfrm>
-          <a:prstGeom prst="rect">
-            <a:avLst/>
-          </a:prstGeom>
-          <a:noFill/>
-        </p:spPr>
-        <p:txBody>
-          <a:bodyPr wrap="square" anchor="t" lIns="0" rIns="0" tIns="0" bIns="0">
-            <a:spAutoFit/>
-          </a:bodyPr>
-          <a:lstStyle/>
-          <a:p>
-            <a:pPr algn="l">
-              <a:lnSpc>
-                <a:spcPct val="120000"/>
-              </a:lnSpc>
-              <a:spcBef>
-                <a:spcPts val="0"/>
-              </a:spcBef>
-              <a:spcAft>
-                <a:spcPts val="0"/>
-              </a:spcAft>
-            </a:pPr>
-            <a:r>
-              <a:rPr sz="950" b="0">
-                <a:solidFill>
-                  <a:srgbClr val="8A9099"/>
-                </a:solidFill>
-                <a:latin typeface="Red Hat Text"/>
-              </a:rPr>
-              <a:t>Reuse concept diagram pipelines-fundamentals-...-02 — push → Gitea webhook → PaC controller → new PipelineRun.</a:t>
             </a:r>
           </a:p>
         </p:txBody>
@@ -9948,11 +11369,11 @@
         <p:spPr>
           <a:xfrm>
             <a:off x="841248" y="2395728"/>
-            <a:ext cx="5715000" cy="530352"/>
+            <a:ext cx="5138928" cy="786384"/>
           </a:xfrm>
           <a:prstGeom prst="roundRect">
             <a:avLst>
-              <a:gd name="adj" fmla="val 6000"/>
+              <a:gd name="adj" fmla="val 7000"/>
             </a:avLst>
           </a:prstGeom>
           <a:solidFill>
@@ -9987,9 +11408,55 @@
           </a:p>
         </p:txBody>
       </p:sp>
+      <p:sp>
+        <p:nvSpPr>
+          <p:cNvPr id="7" name="Rounded Rectangle 6"/>
+          <p:cNvSpPr/>
+          <p:nvPr/>
+        </p:nvSpPr>
+        <p:spPr>
+          <a:xfrm>
+            <a:off x="987552" y="2532888"/>
+            <a:ext cx="512064" cy="512064"/>
+          </a:xfrm>
+          <a:prstGeom prst="roundRect">
+            <a:avLst>
+              <a:gd name="adj" fmla="val 26000"/>
+            </a:avLst>
+          </a:prstGeom>
+          <a:solidFill>
+            <a:srgbClr val="EE0000"/>
+          </a:solidFill>
+          <a:ln>
+            <a:noFill/>
+          </a:ln>
+          <a:effectLst/>
+        </p:spPr>
+        <p:style>
+          <a:lnRef idx="1">
+            <a:schemeClr val="accent1"/>
+          </a:lnRef>
+          <a:fillRef idx="3">
+            <a:schemeClr val="accent1"/>
+          </a:fillRef>
+          <a:effectRef idx="2">
+            <a:schemeClr val="accent1"/>
+          </a:effectRef>
+          <a:fontRef idx="minor">
+            <a:schemeClr val="lt1"/>
+          </a:fontRef>
+        </p:style>
+        <p:txBody>
+          <a:bodyPr rtlCol="0" anchor="ctr"/>
+          <a:lstStyle/>
+          <a:p>
+            <a:pPr algn="ctr"/>
+          </a:p>
+        </p:txBody>
+      </p:sp>
       <p:pic>
         <p:nvPicPr>
-          <p:cNvPr id="7" name="Picture 6" descr="check_steel.png"/>
+          <p:cNvPr id="8" name="Picture 7" descr="check_white.png"/>
           <p:cNvPicPr>
             <a:picLocks noChangeAspect="1"/>
           </p:cNvPicPr>
@@ -10003,8 +11470,8 @@
         </p:blipFill>
         <p:spPr>
           <a:xfrm>
-            <a:off x="987552" y="2542032"/>
-            <a:ext cx="237744" cy="237744"/>
+            <a:off x="1110447" y="2655783"/>
+            <a:ext cx="266273" cy="266273"/>
           </a:xfrm>
           <a:prstGeom prst="rect">
             <a:avLst/>
@@ -10013,14 +11480,14 @@
       </p:pic>
       <p:sp>
         <p:nvSpPr>
-          <p:cNvPr id="8" name="TextBox 7"/>
+          <p:cNvPr id="9" name="TextBox 8"/>
           <p:cNvSpPr txBox="1"/>
           <p:nvPr/>
         </p:nvSpPr>
         <p:spPr>
           <a:xfrm>
-            <a:off x="1353312" y="2395728"/>
-            <a:ext cx="5029200" cy="530352"/>
+            <a:off x="1627632" y="2395728"/>
+            <a:ext cx="4206240" cy="786384"/>
           </a:xfrm>
           <a:prstGeom prst="rect">
             <a:avLst/>
@@ -10045,7 +11512,7 @@
               </a:spcAft>
             </a:pPr>
             <a:r>
-              <a:rPr sz="1200" b="0">
+              <a:rPr sz="1150" b="0">
                 <a:solidFill>
                   <a:srgbClr val="1A1A1A"/>
                 </a:solidFill>
@@ -10058,18 +11525,18 @@
       </p:sp>
       <p:sp>
         <p:nvSpPr>
-          <p:cNvPr id="9" name="Rounded Rectangle 8"/>
+          <p:cNvPr id="10" name="Rounded Rectangle 9"/>
           <p:cNvSpPr/>
           <p:nvPr/>
         </p:nvSpPr>
         <p:spPr>
           <a:xfrm>
-            <a:off x="841248" y="2999232"/>
-            <a:ext cx="5715000" cy="530352"/>
+            <a:off x="6254496" y="2395728"/>
+            <a:ext cx="5138928" cy="786384"/>
           </a:xfrm>
           <a:prstGeom prst="roundRect">
             <a:avLst>
-              <a:gd name="adj" fmla="val 6000"/>
+              <a:gd name="adj" fmla="val 7000"/>
             </a:avLst>
           </a:prstGeom>
           <a:solidFill>
@@ -10104,9 +11571,55 @@
           </a:p>
         </p:txBody>
       </p:sp>
+      <p:sp>
+        <p:nvSpPr>
+          <p:cNvPr id="11" name="Rounded Rectangle 10"/>
+          <p:cNvSpPr/>
+          <p:nvPr/>
+        </p:nvSpPr>
+        <p:spPr>
+          <a:xfrm>
+            <a:off x="6400800" y="2532888"/>
+            <a:ext cx="512064" cy="512064"/>
+          </a:xfrm>
+          <a:prstGeom prst="roundRect">
+            <a:avLst>
+              <a:gd name="adj" fmla="val 26000"/>
+            </a:avLst>
+          </a:prstGeom>
+          <a:solidFill>
+            <a:srgbClr val="EE0000"/>
+          </a:solidFill>
+          <a:ln>
+            <a:noFill/>
+          </a:ln>
+          <a:effectLst/>
+        </p:spPr>
+        <p:style>
+          <a:lnRef idx="1">
+            <a:schemeClr val="accent1"/>
+          </a:lnRef>
+          <a:fillRef idx="3">
+            <a:schemeClr val="accent1"/>
+          </a:fillRef>
+          <a:effectRef idx="2">
+            <a:schemeClr val="accent1"/>
+          </a:effectRef>
+          <a:fontRef idx="minor">
+            <a:schemeClr val="lt1"/>
+          </a:fontRef>
+        </p:style>
+        <p:txBody>
+          <a:bodyPr rtlCol="0" anchor="ctr"/>
+          <a:lstStyle/>
+          <a:p>
+            <a:pPr algn="ctr"/>
+          </a:p>
+        </p:txBody>
+      </p:sp>
       <p:pic>
         <p:nvPicPr>
-          <p:cNvPr id="10" name="Picture 9" descr="check_steel.png"/>
+          <p:cNvPr id="12" name="Picture 11" descr="check_white.png"/>
           <p:cNvPicPr>
             <a:picLocks noChangeAspect="1"/>
           </p:cNvPicPr>
@@ -10120,8 +11633,8 @@
         </p:blipFill>
         <p:spPr>
           <a:xfrm>
-            <a:off x="987552" y="3145536"/>
-            <a:ext cx="237744" cy="237744"/>
+            <a:off x="6523695" y="2655783"/>
+            <a:ext cx="266273" cy="266273"/>
           </a:xfrm>
           <a:prstGeom prst="rect">
             <a:avLst/>
@@ -10130,14 +11643,14 @@
       </p:pic>
       <p:sp>
         <p:nvSpPr>
-          <p:cNvPr id="11" name="TextBox 10"/>
+          <p:cNvPr id="13" name="TextBox 12"/>
           <p:cNvSpPr txBox="1"/>
           <p:nvPr/>
         </p:nvSpPr>
         <p:spPr>
           <a:xfrm>
-            <a:off x="1353312" y="2999232"/>
-            <a:ext cx="5029200" cy="530352"/>
+            <a:off x="7040880" y="2395728"/>
+            <a:ext cx="4206240" cy="786384"/>
           </a:xfrm>
           <a:prstGeom prst="rect">
             <a:avLst/>
@@ -10162,7 +11675,7 @@
               </a:spcAft>
             </a:pPr>
             <a:r>
-              <a:rPr sz="1200" b="0">
+              <a:rPr sz="1150" b="0">
                 <a:solidFill>
                   <a:srgbClr val="1A1A1A"/>
                 </a:solidFill>
@@ -10175,18 +11688,18 @@
       </p:sp>
       <p:sp>
         <p:nvSpPr>
-          <p:cNvPr id="12" name="Rounded Rectangle 11"/>
+          <p:cNvPr id="14" name="Rounded Rectangle 13"/>
           <p:cNvSpPr/>
           <p:nvPr/>
         </p:nvSpPr>
         <p:spPr>
           <a:xfrm>
-            <a:off x="841248" y="3602736"/>
-            <a:ext cx="5715000" cy="530352"/>
+            <a:off x="841248" y="3328416"/>
+            <a:ext cx="5138928" cy="786384"/>
           </a:xfrm>
           <a:prstGeom prst="roundRect">
             <a:avLst>
-              <a:gd name="adj" fmla="val 6000"/>
+              <a:gd name="adj" fmla="val 7000"/>
             </a:avLst>
           </a:prstGeom>
           <a:solidFill>
@@ -10221,9 +11734,55 @@
           </a:p>
         </p:txBody>
       </p:sp>
+      <p:sp>
+        <p:nvSpPr>
+          <p:cNvPr id="15" name="Rounded Rectangle 14"/>
+          <p:cNvSpPr/>
+          <p:nvPr/>
+        </p:nvSpPr>
+        <p:spPr>
+          <a:xfrm>
+            <a:off x="987552" y="3465576"/>
+            <a:ext cx="512064" cy="512064"/>
+          </a:xfrm>
+          <a:prstGeom prst="roundRect">
+            <a:avLst>
+              <a:gd name="adj" fmla="val 26000"/>
+            </a:avLst>
+          </a:prstGeom>
+          <a:solidFill>
+            <a:srgbClr val="EE0000"/>
+          </a:solidFill>
+          <a:ln>
+            <a:noFill/>
+          </a:ln>
+          <a:effectLst/>
+        </p:spPr>
+        <p:style>
+          <a:lnRef idx="1">
+            <a:schemeClr val="accent1"/>
+          </a:lnRef>
+          <a:fillRef idx="3">
+            <a:schemeClr val="accent1"/>
+          </a:fillRef>
+          <a:effectRef idx="2">
+            <a:schemeClr val="accent1"/>
+          </a:effectRef>
+          <a:fontRef idx="minor">
+            <a:schemeClr val="lt1"/>
+          </a:fontRef>
+        </p:style>
+        <p:txBody>
+          <a:bodyPr rtlCol="0" anchor="ctr"/>
+          <a:lstStyle/>
+          <a:p>
+            <a:pPr algn="ctr"/>
+          </a:p>
+        </p:txBody>
+      </p:sp>
       <p:pic>
         <p:nvPicPr>
-          <p:cNvPr id="13" name="Picture 12" descr="check_steel.png"/>
+          <p:cNvPr id="16" name="Picture 15" descr="check_white.png"/>
           <p:cNvPicPr>
             <a:picLocks noChangeAspect="1"/>
           </p:cNvPicPr>
@@ -10237,8 +11796,8 @@
         </p:blipFill>
         <p:spPr>
           <a:xfrm>
-            <a:off x="987552" y="3749040"/>
-            <a:ext cx="237744" cy="237744"/>
+            <a:off x="1110447" y="3588471"/>
+            <a:ext cx="266273" cy="266273"/>
           </a:xfrm>
           <a:prstGeom prst="rect">
             <a:avLst/>
@@ -10247,14 +11806,14 @@
       </p:pic>
       <p:sp>
         <p:nvSpPr>
-          <p:cNvPr id="14" name="TextBox 13"/>
+          <p:cNvPr id="17" name="TextBox 16"/>
           <p:cNvSpPr txBox="1"/>
           <p:nvPr/>
         </p:nvSpPr>
         <p:spPr>
           <a:xfrm>
-            <a:off x="1353312" y="3602736"/>
-            <a:ext cx="5029200" cy="530352"/>
+            <a:off x="1627632" y="3328416"/>
+            <a:ext cx="4206240" cy="786384"/>
           </a:xfrm>
           <a:prstGeom prst="rect">
             <a:avLst/>
@@ -10279,7 +11838,7 @@
               </a:spcAft>
             </a:pPr>
             <a:r>
-              <a:rPr sz="1200" b="0">
+              <a:rPr sz="1150" b="0">
                 <a:solidFill>
                   <a:srgbClr val="1A1A1A"/>
                 </a:solidFill>
@@ -10292,18 +11851,18 @@
       </p:sp>
       <p:sp>
         <p:nvSpPr>
-          <p:cNvPr id="15" name="Rounded Rectangle 14"/>
+          <p:cNvPr id="18" name="Rounded Rectangle 17"/>
           <p:cNvSpPr/>
           <p:nvPr/>
         </p:nvSpPr>
         <p:spPr>
           <a:xfrm>
-            <a:off x="841248" y="4206240"/>
-            <a:ext cx="5715000" cy="530352"/>
+            <a:off x="6254496" y="3328416"/>
+            <a:ext cx="5138928" cy="786384"/>
           </a:xfrm>
           <a:prstGeom prst="roundRect">
             <a:avLst>
-              <a:gd name="adj" fmla="val 6000"/>
+              <a:gd name="adj" fmla="val 7000"/>
             </a:avLst>
           </a:prstGeom>
           <a:solidFill>
@@ -10338,9 +11897,55 @@
           </a:p>
         </p:txBody>
       </p:sp>
+      <p:sp>
+        <p:nvSpPr>
+          <p:cNvPr id="19" name="Rounded Rectangle 18"/>
+          <p:cNvSpPr/>
+          <p:nvPr/>
+        </p:nvSpPr>
+        <p:spPr>
+          <a:xfrm>
+            <a:off x="6400800" y="3465576"/>
+            <a:ext cx="512064" cy="512064"/>
+          </a:xfrm>
+          <a:prstGeom prst="roundRect">
+            <a:avLst>
+              <a:gd name="adj" fmla="val 26000"/>
+            </a:avLst>
+          </a:prstGeom>
+          <a:solidFill>
+            <a:srgbClr val="EE0000"/>
+          </a:solidFill>
+          <a:ln>
+            <a:noFill/>
+          </a:ln>
+          <a:effectLst/>
+        </p:spPr>
+        <p:style>
+          <a:lnRef idx="1">
+            <a:schemeClr val="accent1"/>
+          </a:lnRef>
+          <a:fillRef idx="3">
+            <a:schemeClr val="accent1"/>
+          </a:fillRef>
+          <a:effectRef idx="2">
+            <a:schemeClr val="accent1"/>
+          </a:effectRef>
+          <a:fontRef idx="minor">
+            <a:schemeClr val="lt1"/>
+          </a:fontRef>
+        </p:style>
+        <p:txBody>
+          <a:bodyPr rtlCol="0" anchor="ctr"/>
+          <a:lstStyle/>
+          <a:p>
+            <a:pPr algn="ctr"/>
+          </a:p>
+        </p:txBody>
+      </p:sp>
       <p:pic>
         <p:nvPicPr>
-          <p:cNvPr id="16" name="Picture 15" descr="check_steel.png"/>
+          <p:cNvPr id="20" name="Picture 19" descr="check_white.png"/>
           <p:cNvPicPr>
             <a:picLocks noChangeAspect="1"/>
           </p:cNvPicPr>
@@ -10354,8 +11959,8 @@
         </p:blipFill>
         <p:spPr>
           <a:xfrm>
-            <a:off x="987552" y="4352544"/>
-            <a:ext cx="237744" cy="237744"/>
+            <a:off x="6523695" y="3588471"/>
+            <a:ext cx="266273" cy="266273"/>
           </a:xfrm>
           <a:prstGeom prst="rect">
             <a:avLst/>
@@ -10364,14 +11969,14 @@
       </p:pic>
       <p:sp>
         <p:nvSpPr>
-          <p:cNvPr id="17" name="TextBox 16"/>
+          <p:cNvPr id="21" name="TextBox 20"/>
           <p:cNvSpPr txBox="1"/>
           <p:nvPr/>
         </p:nvSpPr>
         <p:spPr>
           <a:xfrm>
-            <a:off x="1353312" y="4206240"/>
-            <a:ext cx="5029200" cy="530352"/>
+            <a:off x="7040880" y="3328416"/>
+            <a:ext cx="4206240" cy="786384"/>
           </a:xfrm>
           <a:prstGeom prst="rect">
             <a:avLst/>
@@ -10396,7 +12001,7 @@
               </a:spcAft>
             </a:pPr>
             <a:r>
-              <a:rPr sz="1200" b="0">
+              <a:rPr sz="1150" b="0">
                 <a:solidFill>
                   <a:srgbClr val="1A1A1A"/>
                 </a:solidFill>
@@ -10409,18 +12014,18 @@
       </p:sp>
       <p:sp>
         <p:nvSpPr>
-          <p:cNvPr id="18" name="Rounded Rectangle 17"/>
+          <p:cNvPr id="22" name="Rounded Rectangle 21"/>
           <p:cNvSpPr/>
           <p:nvPr/>
         </p:nvSpPr>
         <p:spPr>
           <a:xfrm>
-            <a:off x="841248" y="4809744"/>
-            <a:ext cx="5715000" cy="530352"/>
+            <a:off x="841248" y="4261104"/>
+            <a:ext cx="5138928" cy="786384"/>
           </a:xfrm>
           <a:prstGeom prst="roundRect">
             <a:avLst>
-              <a:gd name="adj" fmla="val 6000"/>
+              <a:gd name="adj" fmla="val 7000"/>
             </a:avLst>
           </a:prstGeom>
           <a:solidFill>
@@ -10455,9 +12060,55 @@
           </a:p>
         </p:txBody>
       </p:sp>
+      <p:sp>
+        <p:nvSpPr>
+          <p:cNvPr id="23" name="Rounded Rectangle 22"/>
+          <p:cNvSpPr/>
+          <p:nvPr/>
+        </p:nvSpPr>
+        <p:spPr>
+          <a:xfrm>
+            <a:off x="987552" y="4398264"/>
+            <a:ext cx="512064" cy="512064"/>
+          </a:xfrm>
+          <a:prstGeom prst="roundRect">
+            <a:avLst>
+              <a:gd name="adj" fmla="val 26000"/>
+            </a:avLst>
+          </a:prstGeom>
+          <a:solidFill>
+            <a:srgbClr val="EE0000"/>
+          </a:solidFill>
+          <a:ln>
+            <a:noFill/>
+          </a:ln>
+          <a:effectLst/>
+        </p:spPr>
+        <p:style>
+          <a:lnRef idx="1">
+            <a:schemeClr val="accent1"/>
+          </a:lnRef>
+          <a:fillRef idx="3">
+            <a:schemeClr val="accent1"/>
+          </a:fillRef>
+          <a:effectRef idx="2">
+            <a:schemeClr val="accent1"/>
+          </a:effectRef>
+          <a:fontRef idx="minor">
+            <a:schemeClr val="lt1"/>
+          </a:fontRef>
+        </p:style>
+        <p:txBody>
+          <a:bodyPr rtlCol="0" anchor="ctr"/>
+          <a:lstStyle/>
+          <a:p>
+            <a:pPr algn="ctr"/>
+          </a:p>
+        </p:txBody>
+      </p:sp>
       <p:pic>
         <p:nvPicPr>
-          <p:cNvPr id="19" name="Picture 18" descr="check_steel.png"/>
+          <p:cNvPr id="24" name="Picture 23" descr="check_white.png"/>
           <p:cNvPicPr>
             <a:picLocks noChangeAspect="1"/>
           </p:cNvPicPr>
@@ -10471,8 +12122,8 @@
         </p:blipFill>
         <p:spPr>
           <a:xfrm>
-            <a:off x="987552" y="4956048"/>
-            <a:ext cx="237744" cy="237744"/>
+            <a:off x="1110447" y="4521159"/>
+            <a:ext cx="266273" cy="266273"/>
           </a:xfrm>
           <a:prstGeom prst="rect">
             <a:avLst/>
@@ -10481,14 +12132,14 @@
       </p:pic>
       <p:sp>
         <p:nvSpPr>
-          <p:cNvPr id="20" name="TextBox 19"/>
+          <p:cNvPr id="25" name="TextBox 24"/>
           <p:cNvSpPr txBox="1"/>
           <p:nvPr/>
         </p:nvSpPr>
         <p:spPr>
           <a:xfrm>
-            <a:off x="1353312" y="4809744"/>
-            <a:ext cx="5029200" cy="530352"/>
+            <a:off x="1627632" y="4261104"/>
+            <a:ext cx="4206240" cy="786384"/>
           </a:xfrm>
           <a:prstGeom prst="rect">
             <a:avLst/>
@@ -10513,221 +12164,13 @@
               </a:spcAft>
             </a:pPr>
             <a:r>
-              <a:rPr sz="1200" b="0">
+              <a:rPr sz="1150" b="0">
                 <a:solidFill>
                   <a:srgbClr val="1A1A1A"/>
                 </a:solidFill>
                 <a:latin typeface="Red Hat Text"/>
               </a:rPr>
               <a:t>Next module: sign, attest, scan — same idea</a:t>
-            </a:r>
-          </a:p>
-        </p:txBody>
-      </p:sp>
-      <p:sp>
-        <p:nvSpPr>
-          <p:cNvPr id="21" name="Rounded Rectangle 20"/>
-          <p:cNvSpPr/>
-          <p:nvPr/>
-        </p:nvSpPr>
-        <p:spPr>
-          <a:xfrm>
-            <a:off x="6812280" y="2395728"/>
-            <a:ext cx="4538167" cy="2944368"/>
-          </a:xfrm>
-          <a:prstGeom prst="roundRect">
-            <a:avLst>
-              <a:gd name="adj" fmla="val 4000"/>
-            </a:avLst>
-          </a:prstGeom>
-          <a:solidFill>
-            <a:srgbClr val="FFFFFF"/>
-          </a:solidFill>
-          <a:ln w="15240">
-            <a:solidFill>
-              <a:srgbClr val="DDE1E6"/>
-            </a:solidFill>
-          </a:ln>
-          <a:effectLst/>
-        </p:spPr>
-        <p:style>
-          <a:lnRef idx="1">
-            <a:schemeClr val="accent1"/>
-          </a:lnRef>
-          <a:fillRef idx="3">
-            <a:schemeClr val="accent1"/>
-          </a:fillRef>
-          <a:effectRef idx="2">
-            <a:schemeClr val="accent1"/>
-          </a:effectRef>
-          <a:fontRef idx="minor">
-            <a:schemeClr val="lt1"/>
-          </a:fontRef>
-        </p:style>
-        <p:txBody>
-          <a:bodyPr rtlCol="0" anchor="ctr"/>
-          <a:lstStyle/>
-          <a:p>
-            <a:pPr algn="ctr"/>
-          </a:p>
-        </p:txBody>
-      </p:sp>
-      <p:sp>
-        <p:nvSpPr>
-          <p:cNvPr id="22" name="Rounded Rectangle 21"/>
-          <p:cNvSpPr/>
-          <p:nvPr/>
-        </p:nvSpPr>
-        <p:spPr>
-          <a:xfrm>
-            <a:off x="7013448" y="2596896"/>
-            <a:ext cx="1298448" cy="310896"/>
-          </a:xfrm>
-          <a:prstGeom prst="roundRect">
-            <a:avLst>
-              <a:gd name="adj" fmla="val 50000"/>
-            </a:avLst>
-          </a:prstGeom>
-          <a:solidFill>
-            <a:srgbClr val="FCECEC"/>
-          </a:solidFill>
-          <a:ln>
-            <a:noFill/>
-          </a:ln>
-          <a:effectLst/>
-        </p:spPr>
-        <p:style>
-          <a:lnRef idx="1">
-            <a:schemeClr val="accent1"/>
-          </a:lnRef>
-          <a:fillRef idx="3">
-            <a:schemeClr val="accent1"/>
-          </a:fillRef>
-          <a:effectRef idx="2">
-            <a:schemeClr val="accent1"/>
-          </a:effectRef>
-          <a:fontRef idx="minor">
-            <a:schemeClr val="lt1"/>
-          </a:fontRef>
-        </p:style>
-        <p:txBody>
-          <a:bodyPr rtlCol="0" anchor="ctr"/>
-          <a:lstStyle/>
-          <a:p>
-            <a:pPr algn="ctr"/>
-          </a:p>
-        </p:txBody>
-      </p:sp>
-      <p:sp>
-        <p:nvSpPr>
-          <p:cNvPr id="23" name="TextBox 22"/>
-          <p:cNvSpPr txBox="1"/>
-          <p:nvPr/>
-        </p:nvSpPr>
-        <p:spPr>
-          <a:xfrm>
-            <a:off x="7013448" y="2596896"/>
-            <a:ext cx="1298448" cy="310896"/>
-          </a:xfrm>
-          <a:prstGeom prst="rect">
-            <a:avLst/>
-          </a:prstGeom>
-          <a:noFill/>
-        </p:spPr>
-        <p:txBody>
-          <a:bodyPr wrap="none" anchor="ctr" lIns="0" rIns="0" tIns="0" bIns="0">
-            <a:spAutoFit/>
-          </a:bodyPr>
-          <a:lstStyle/>
-          <a:p>
-            <a:pPr algn="ctr">
-              <a:lnSpc>
-                <a:spcPct val="106000"/>
-              </a:lnSpc>
-              <a:spcBef>
-                <a:spcPts val="0"/>
-              </a:spcBef>
-              <a:spcAft>
-                <a:spcPts val="0"/>
-              </a:spcAft>
-            </a:pPr>
-            <a:r>
-              <a:rPr sz="850" b="1">
-                <a:solidFill>
-                  <a:srgbClr val="B80000"/>
-                </a:solidFill>
-                <a:latin typeface="Red Hat Display"/>
-              </a:rPr>
-              <a:t>MEDIA PASS</a:t>
-            </a:r>
-          </a:p>
-        </p:txBody>
-      </p:sp>
-      <p:pic>
-        <p:nvPicPr>
-          <p:cNvPr id="24" name="Picture 23" descr="eye_slate.png"/>
-          <p:cNvPicPr>
-            <a:picLocks noChangeAspect="1"/>
-          </p:cNvPicPr>
-          <p:nvPr/>
-        </p:nvPicPr>
-        <p:blipFill>
-          <a:blip r:embed="rId4"/>
-          <a:stretch>
-            <a:fillRect/>
-          </a:stretch>
-        </p:blipFill>
-        <p:spPr>
-          <a:xfrm>
-            <a:off x="8843619" y="3108960"/>
-            <a:ext cx="475488" cy="475488"/>
-          </a:xfrm>
-          <a:prstGeom prst="rect">
-            <a:avLst/>
-          </a:prstGeom>
-        </p:spPr>
-      </p:pic>
-      <p:sp>
-        <p:nvSpPr>
-          <p:cNvPr id="25" name="TextBox 24"/>
-          <p:cNvSpPr txBox="1"/>
-          <p:nvPr/>
-        </p:nvSpPr>
-        <p:spPr>
-          <a:xfrm>
-            <a:off x="7050024" y="3721608"/>
-            <a:ext cx="4062679" cy="1481328"/>
-          </a:xfrm>
-          <a:prstGeom prst="rect">
-            <a:avLst/>
-          </a:prstGeom>
-          <a:noFill/>
-        </p:spPr>
-        <p:txBody>
-          <a:bodyPr wrap="square" anchor="t" lIns="0" rIns="0" tIns="0" bIns="0">
-            <a:spAutoFit/>
-          </a:bodyPr>
-          <a:lstStyle/>
-          <a:p>
-            <a:pPr algn="l">
-              <a:lnSpc>
-                <a:spcPct val="120000"/>
-              </a:lnSpc>
-              <a:spcBef>
-                <a:spcPts val="0"/>
-              </a:spcBef>
-              <a:spcAft>
-                <a:spcPts val="0"/>
-              </a:spcAft>
-            </a:pPr>
-            <a:r>
-              <a:rPr sz="950" b="0">
-                <a:solidFill>
-                  <a:srgbClr val="8A9099"/>
-                </a:solidFill>
-                <a:latin typeface="Red Hat Text"/>
-              </a:rPr>
-              <a:t>A PipelineRun "Results" panel card: image-size-mb = 391, image-within-budget = true, with a small arrow to "a later step can gate on this."</a:t>
             </a:r>
           </a:p>
         </p:txBody>
@@ -11035,11 +12478,11 @@
         <p:spPr>
           <a:xfrm>
             <a:off x="841248" y="2395728"/>
-            <a:ext cx="5715000" cy="530352"/>
+            <a:ext cx="5138928" cy="786384"/>
           </a:xfrm>
           <a:prstGeom prst="roundRect">
             <a:avLst>
-              <a:gd name="adj" fmla="val 6000"/>
+              <a:gd name="adj" fmla="val 7000"/>
             </a:avLst>
           </a:prstGeom>
           <a:solidFill>
@@ -11074,9 +12517,55 @@
           </a:p>
         </p:txBody>
       </p:sp>
+      <p:sp>
+        <p:nvSpPr>
+          <p:cNvPr id="7" name="Rounded Rectangle 6"/>
+          <p:cNvSpPr/>
+          <p:nvPr/>
+        </p:nvSpPr>
+        <p:spPr>
+          <a:xfrm>
+            <a:off x="987552" y="2532888"/>
+            <a:ext cx="512064" cy="512064"/>
+          </a:xfrm>
+          <a:prstGeom prst="roundRect">
+            <a:avLst>
+              <a:gd name="adj" fmla="val 26000"/>
+            </a:avLst>
+          </a:prstGeom>
+          <a:solidFill>
+            <a:srgbClr val="EE0000"/>
+          </a:solidFill>
+          <a:ln>
+            <a:noFill/>
+          </a:ln>
+          <a:effectLst/>
+        </p:spPr>
+        <p:style>
+          <a:lnRef idx="1">
+            <a:schemeClr val="accent1"/>
+          </a:lnRef>
+          <a:fillRef idx="3">
+            <a:schemeClr val="accent1"/>
+          </a:fillRef>
+          <a:effectRef idx="2">
+            <a:schemeClr val="accent1"/>
+          </a:effectRef>
+          <a:fontRef idx="minor">
+            <a:schemeClr val="lt1"/>
+          </a:fontRef>
+        </p:style>
+        <p:txBody>
+          <a:bodyPr rtlCol="0" anchor="ctr"/>
+          <a:lstStyle/>
+          <a:p>
+            <a:pPr algn="ctr"/>
+          </a:p>
+        </p:txBody>
+      </p:sp>
       <p:pic>
         <p:nvPicPr>
-          <p:cNvPr id="7" name="Picture 6" descr="check_steel.png"/>
+          <p:cNvPr id="8" name="Picture 7" descr="check_white.png"/>
           <p:cNvPicPr>
             <a:picLocks noChangeAspect="1"/>
           </p:cNvPicPr>
@@ -11090,8 +12579,8 @@
         </p:blipFill>
         <p:spPr>
           <a:xfrm>
-            <a:off x="987552" y="2542032"/>
-            <a:ext cx="237744" cy="237744"/>
+            <a:off x="1110447" y="2655783"/>
+            <a:ext cx="266273" cy="266273"/>
           </a:xfrm>
           <a:prstGeom prst="rect">
             <a:avLst/>
@@ -11100,14 +12589,14 @@
       </p:pic>
       <p:sp>
         <p:nvSpPr>
-          <p:cNvPr id="8" name="TextBox 7"/>
+          <p:cNvPr id="9" name="TextBox 8"/>
           <p:cNvSpPr txBox="1"/>
           <p:nvPr/>
         </p:nvSpPr>
         <p:spPr>
           <a:xfrm>
-            <a:off x="1353312" y="2395728"/>
-            <a:ext cx="5029200" cy="530352"/>
+            <a:off x="1627632" y="2395728"/>
+            <a:ext cx="4206240" cy="786384"/>
           </a:xfrm>
           <a:prstGeom prst="rect">
             <a:avLst/>
@@ -11132,7 +12621,7 @@
               </a:spcAft>
             </a:pPr>
             <a:r>
-              <a:rPr sz="1200" b="0">
+              <a:rPr sz="1150" b="0">
                 <a:solidFill>
                   <a:srgbClr val="1A1A1A"/>
                 </a:solidFill>
@@ -11145,18 +12634,18 @@
       </p:sp>
       <p:sp>
         <p:nvSpPr>
-          <p:cNvPr id="9" name="Rounded Rectangle 8"/>
+          <p:cNvPr id="10" name="Rounded Rectangle 9"/>
           <p:cNvSpPr/>
           <p:nvPr/>
         </p:nvSpPr>
         <p:spPr>
           <a:xfrm>
-            <a:off x="841248" y="2999232"/>
-            <a:ext cx="5715000" cy="530352"/>
+            <a:off x="6254496" y="2395728"/>
+            <a:ext cx="5138928" cy="786384"/>
           </a:xfrm>
           <a:prstGeom prst="roundRect">
             <a:avLst>
-              <a:gd name="adj" fmla="val 6000"/>
+              <a:gd name="adj" fmla="val 7000"/>
             </a:avLst>
           </a:prstGeom>
           <a:solidFill>
@@ -11191,9 +12680,55 @@
           </a:p>
         </p:txBody>
       </p:sp>
+      <p:sp>
+        <p:nvSpPr>
+          <p:cNvPr id="11" name="Rounded Rectangle 10"/>
+          <p:cNvSpPr/>
+          <p:nvPr/>
+        </p:nvSpPr>
+        <p:spPr>
+          <a:xfrm>
+            <a:off x="6400800" y="2532888"/>
+            <a:ext cx="512064" cy="512064"/>
+          </a:xfrm>
+          <a:prstGeom prst="roundRect">
+            <a:avLst>
+              <a:gd name="adj" fmla="val 26000"/>
+            </a:avLst>
+          </a:prstGeom>
+          <a:solidFill>
+            <a:srgbClr val="EE0000"/>
+          </a:solidFill>
+          <a:ln>
+            <a:noFill/>
+          </a:ln>
+          <a:effectLst/>
+        </p:spPr>
+        <p:style>
+          <a:lnRef idx="1">
+            <a:schemeClr val="accent1"/>
+          </a:lnRef>
+          <a:fillRef idx="3">
+            <a:schemeClr val="accent1"/>
+          </a:fillRef>
+          <a:effectRef idx="2">
+            <a:schemeClr val="accent1"/>
+          </a:effectRef>
+          <a:fontRef idx="minor">
+            <a:schemeClr val="lt1"/>
+          </a:fontRef>
+        </p:style>
+        <p:txBody>
+          <a:bodyPr rtlCol="0" anchor="ctr"/>
+          <a:lstStyle/>
+          <a:p>
+            <a:pPr algn="ctr"/>
+          </a:p>
+        </p:txBody>
+      </p:sp>
       <p:pic>
         <p:nvPicPr>
-          <p:cNvPr id="10" name="Picture 9" descr="check_steel.png"/>
+          <p:cNvPr id="12" name="Picture 11" descr="check_white.png"/>
           <p:cNvPicPr>
             <a:picLocks noChangeAspect="1"/>
           </p:cNvPicPr>
@@ -11207,8 +12742,8 @@
         </p:blipFill>
         <p:spPr>
           <a:xfrm>
-            <a:off x="987552" y="3145536"/>
-            <a:ext cx="237744" cy="237744"/>
+            <a:off x="6523695" y="2655783"/>
+            <a:ext cx="266273" cy="266273"/>
           </a:xfrm>
           <a:prstGeom prst="rect">
             <a:avLst/>
@@ -11217,14 +12752,14 @@
       </p:pic>
       <p:sp>
         <p:nvSpPr>
-          <p:cNvPr id="11" name="TextBox 10"/>
+          <p:cNvPr id="13" name="TextBox 12"/>
           <p:cNvSpPr txBox="1"/>
           <p:nvPr/>
         </p:nvSpPr>
         <p:spPr>
           <a:xfrm>
-            <a:off x="1353312" y="2999232"/>
-            <a:ext cx="5029200" cy="530352"/>
+            <a:off x="7040880" y="2395728"/>
+            <a:ext cx="4206240" cy="786384"/>
           </a:xfrm>
           <a:prstGeom prst="rect">
             <a:avLst/>
@@ -11249,7 +12784,7 @@
               </a:spcAft>
             </a:pPr>
             <a:r>
-              <a:rPr sz="1200" b="0">
+              <a:rPr sz="1150" b="0">
                 <a:solidFill>
                   <a:srgbClr val="1A1A1A"/>
                 </a:solidFill>
@@ -11262,18 +12797,18 @@
       </p:sp>
       <p:sp>
         <p:nvSpPr>
-          <p:cNvPr id="12" name="Rounded Rectangle 11"/>
+          <p:cNvPr id="14" name="Rounded Rectangle 13"/>
           <p:cNvSpPr/>
           <p:nvPr/>
         </p:nvSpPr>
         <p:spPr>
           <a:xfrm>
-            <a:off x="841248" y="3602736"/>
-            <a:ext cx="5715000" cy="530352"/>
+            <a:off x="841248" y="3328416"/>
+            <a:ext cx="5138928" cy="786384"/>
           </a:xfrm>
           <a:prstGeom prst="roundRect">
             <a:avLst>
-              <a:gd name="adj" fmla="val 6000"/>
+              <a:gd name="adj" fmla="val 7000"/>
             </a:avLst>
           </a:prstGeom>
           <a:solidFill>
@@ -11308,9 +12843,55 @@
           </a:p>
         </p:txBody>
       </p:sp>
+      <p:sp>
+        <p:nvSpPr>
+          <p:cNvPr id="15" name="Rounded Rectangle 14"/>
+          <p:cNvSpPr/>
+          <p:nvPr/>
+        </p:nvSpPr>
+        <p:spPr>
+          <a:xfrm>
+            <a:off x="987552" y="3465576"/>
+            <a:ext cx="512064" cy="512064"/>
+          </a:xfrm>
+          <a:prstGeom prst="roundRect">
+            <a:avLst>
+              <a:gd name="adj" fmla="val 26000"/>
+            </a:avLst>
+          </a:prstGeom>
+          <a:solidFill>
+            <a:srgbClr val="EE0000"/>
+          </a:solidFill>
+          <a:ln>
+            <a:noFill/>
+          </a:ln>
+          <a:effectLst/>
+        </p:spPr>
+        <p:style>
+          <a:lnRef idx="1">
+            <a:schemeClr val="accent1"/>
+          </a:lnRef>
+          <a:fillRef idx="3">
+            <a:schemeClr val="accent1"/>
+          </a:fillRef>
+          <a:effectRef idx="2">
+            <a:schemeClr val="accent1"/>
+          </a:effectRef>
+          <a:fontRef idx="minor">
+            <a:schemeClr val="lt1"/>
+          </a:fontRef>
+        </p:style>
+        <p:txBody>
+          <a:bodyPr rtlCol="0" anchor="ctr"/>
+          <a:lstStyle/>
+          <a:p>
+            <a:pPr algn="ctr"/>
+          </a:p>
+        </p:txBody>
+      </p:sp>
       <p:pic>
         <p:nvPicPr>
-          <p:cNvPr id="13" name="Picture 12" descr="check_steel.png"/>
+          <p:cNvPr id="16" name="Picture 15" descr="check_white.png"/>
           <p:cNvPicPr>
             <a:picLocks noChangeAspect="1"/>
           </p:cNvPicPr>
@@ -11324,8 +12905,8 @@
         </p:blipFill>
         <p:spPr>
           <a:xfrm>
-            <a:off x="987552" y="3749040"/>
-            <a:ext cx="237744" cy="237744"/>
+            <a:off x="1110447" y="3588471"/>
+            <a:ext cx="266273" cy="266273"/>
           </a:xfrm>
           <a:prstGeom prst="rect">
             <a:avLst/>
@@ -11334,14 +12915,14 @@
       </p:pic>
       <p:sp>
         <p:nvSpPr>
-          <p:cNvPr id="14" name="TextBox 13"/>
+          <p:cNvPr id="17" name="TextBox 16"/>
           <p:cNvSpPr txBox="1"/>
           <p:nvPr/>
         </p:nvSpPr>
         <p:spPr>
           <a:xfrm>
-            <a:off x="1353312" y="3602736"/>
-            <a:ext cx="5029200" cy="530352"/>
+            <a:off x="1627632" y="3328416"/>
+            <a:ext cx="4206240" cy="786384"/>
           </a:xfrm>
           <a:prstGeom prst="rect">
             <a:avLst/>
@@ -11366,7 +12947,7 @@
               </a:spcAft>
             </a:pPr>
             <a:r>
-              <a:rPr sz="1200" b="0">
+              <a:rPr sz="1150" b="0">
                 <a:solidFill>
                   <a:srgbClr val="1A1A1A"/>
                 </a:solidFill>
@@ -11379,18 +12960,18 @@
       </p:sp>
       <p:sp>
         <p:nvSpPr>
-          <p:cNvPr id="15" name="Rounded Rectangle 14"/>
+          <p:cNvPr id="18" name="Rounded Rectangle 17"/>
           <p:cNvSpPr/>
           <p:nvPr/>
         </p:nvSpPr>
         <p:spPr>
           <a:xfrm>
-            <a:off x="841248" y="4206240"/>
-            <a:ext cx="5715000" cy="530352"/>
+            <a:off x="6254496" y="3328416"/>
+            <a:ext cx="5138928" cy="786384"/>
           </a:xfrm>
           <a:prstGeom prst="roundRect">
             <a:avLst>
-              <a:gd name="adj" fmla="val 6000"/>
+              <a:gd name="adj" fmla="val 7000"/>
             </a:avLst>
           </a:prstGeom>
           <a:solidFill>
@@ -11425,9 +13006,55 @@
           </a:p>
         </p:txBody>
       </p:sp>
+      <p:sp>
+        <p:nvSpPr>
+          <p:cNvPr id="19" name="Rounded Rectangle 18"/>
+          <p:cNvSpPr/>
+          <p:nvPr/>
+        </p:nvSpPr>
+        <p:spPr>
+          <a:xfrm>
+            <a:off x="6400800" y="3465576"/>
+            <a:ext cx="512064" cy="512064"/>
+          </a:xfrm>
+          <a:prstGeom prst="roundRect">
+            <a:avLst>
+              <a:gd name="adj" fmla="val 26000"/>
+            </a:avLst>
+          </a:prstGeom>
+          <a:solidFill>
+            <a:srgbClr val="EE0000"/>
+          </a:solidFill>
+          <a:ln>
+            <a:noFill/>
+          </a:ln>
+          <a:effectLst/>
+        </p:spPr>
+        <p:style>
+          <a:lnRef idx="1">
+            <a:schemeClr val="accent1"/>
+          </a:lnRef>
+          <a:fillRef idx="3">
+            <a:schemeClr val="accent1"/>
+          </a:fillRef>
+          <a:effectRef idx="2">
+            <a:schemeClr val="accent1"/>
+          </a:effectRef>
+          <a:fontRef idx="minor">
+            <a:schemeClr val="lt1"/>
+          </a:fontRef>
+        </p:style>
+        <p:txBody>
+          <a:bodyPr rtlCol="0" anchor="ctr"/>
+          <a:lstStyle/>
+          <a:p>
+            <a:pPr algn="ctr"/>
+          </a:p>
+        </p:txBody>
+      </p:sp>
       <p:pic>
         <p:nvPicPr>
-          <p:cNvPr id="16" name="Picture 15" descr="check_steel.png"/>
+          <p:cNvPr id="20" name="Picture 19" descr="check_white.png"/>
           <p:cNvPicPr>
             <a:picLocks noChangeAspect="1"/>
           </p:cNvPicPr>
@@ -11441,8 +13068,8 @@
         </p:blipFill>
         <p:spPr>
           <a:xfrm>
-            <a:off x="987552" y="4352544"/>
-            <a:ext cx="237744" cy="237744"/>
+            <a:off x="6523695" y="3588471"/>
+            <a:ext cx="266273" cy="266273"/>
           </a:xfrm>
           <a:prstGeom prst="rect">
             <a:avLst/>
@@ -11451,14 +13078,14 @@
       </p:pic>
       <p:sp>
         <p:nvSpPr>
-          <p:cNvPr id="17" name="TextBox 16"/>
+          <p:cNvPr id="21" name="TextBox 20"/>
           <p:cNvSpPr txBox="1"/>
           <p:nvPr/>
         </p:nvSpPr>
         <p:spPr>
           <a:xfrm>
-            <a:off x="1353312" y="4206240"/>
-            <a:ext cx="5029200" cy="530352"/>
+            <a:off x="7040880" y="3328416"/>
+            <a:ext cx="4206240" cy="786384"/>
           </a:xfrm>
           <a:prstGeom prst="rect">
             <a:avLst/>
@@ -11483,7 +13110,7 @@
               </a:spcAft>
             </a:pPr>
             <a:r>
-              <a:rPr sz="1200" b="0">
+              <a:rPr sz="1150" b="0">
                 <a:solidFill>
                   <a:srgbClr val="1A1A1A"/>
                 </a:solidFill>
@@ -11496,18 +13123,18 @@
       </p:sp>
       <p:sp>
         <p:nvSpPr>
-          <p:cNvPr id="18" name="Rounded Rectangle 17"/>
+          <p:cNvPr id="22" name="Rounded Rectangle 21"/>
           <p:cNvSpPr/>
           <p:nvPr/>
         </p:nvSpPr>
         <p:spPr>
           <a:xfrm>
-            <a:off x="841248" y="4809744"/>
-            <a:ext cx="5715000" cy="530352"/>
+            <a:off x="841248" y="4261104"/>
+            <a:ext cx="5138928" cy="786384"/>
           </a:xfrm>
           <a:prstGeom prst="roundRect">
             <a:avLst>
-              <a:gd name="adj" fmla="val 6000"/>
+              <a:gd name="adj" fmla="val 7000"/>
             </a:avLst>
           </a:prstGeom>
           <a:solidFill>
@@ -11542,9 +13169,55 @@
           </a:p>
         </p:txBody>
       </p:sp>
+      <p:sp>
+        <p:nvSpPr>
+          <p:cNvPr id="23" name="Rounded Rectangle 22"/>
+          <p:cNvSpPr/>
+          <p:nvPr/>
+        </p:nvSpPr>
+        <p:spPr>
+          <a:xfrm>
+            <a:off x="987552" y="4398264"/>
+            <a:ext cx="512064" cy="512064"/>
+          </a:xfrm>
+          <a:prstGeom prst="roundRect">
+            <a:avLst>
+              <a:gd name="adj" fmla="val 26000"/>
+            </a:avLst>
+          </a:prstGeom>
+          <a:solidFill>
+            <a:srgbClr val="EE0000"/>
+          </a:solidFill>
+          <a:ln>
+            <a:noFill/>
+          </a:ln>
+          <a:effectLst/>
+        </p:spPr>
+        <p:style>
+          <a:lnRef idx="1">
+            <a:schemeClr val="accent1"/>
+          </a:lnRef>
+          <a:fillRef idx="3">
+            <a:schemeClr val="accent1"/>
+          </a:fillRef>
+          <a:effectRef idx="2">
+            <a:schemeClr val="accent1"/>
+          </a:effectRef>
+          <a:fontRef idx="minor">
+            <a:schemeClr val="lt1"/>
+          </a:fontRef>
+        </p:style>
+        <p:txBody>
+          <a:bodyPr rtlCol="0" anchor="ctr"/>
+          <a:lstStyle/>
+          <a:p>
+            <a:pPr algn="ctr"/>
+          </a:p>
+        </p:txBody>
+      </p:sp>
       <p:pic>
         <p:nvPicPr>
-          <p:cNvPr id="19" name="Picture 18" descr="check_steel.png"/>
+          <p:cNvPr id="24" name="Picture 23" descr="check_white.png"/>
           <p:cNvPicPr>
             <a:picLocks noChangeAspect="1"/>
           </p:cNvPicPr>
@@ -11558,8 +13231,8 @@
         </p:blipFill>
         <p:spPr>
           <a:xfrm>
-            <a:off x="987552" y="4956048"/>
-            <a:ext cx="237744" cy="237744"/>
+            <a:off x="1110447" y="4521159"/>
+            <a:ext cx="266273" cy="266273"/>
           </a:xfrm>
           <a:prstGeom prst="rect">
             <a:avLst/>
@@ -11568,14 +13241,14 @@
       </p:pic>
       <p:sp>
         <p:nvSpPr>
-          <p:cNvPr id="20" name="TextBox 19"/>
+          <p:cNvPr id="25" name="TextBox 24"/>
           <p:cNvSpPr txBox="1"/>
           <p:nvPr/>
         </p:nvSpPr>
         <p:spPr>
           <a:xfrm>
-            <a:off x="1353312" y="4809744"/>
-            <a:ext cx="5029200" cy="530352"/>
+            <a:off x="1627632" y="4261104"/>
+            <a:ext cx="4206240" cy="786384"/>
           </a:xfrm>
           <a:prstGeom prst="rect">
             <a:avLst/>
@@ -11600,221 +13273,13 @@
               </a:spcAft>
             </a:pPr>
             <a:r>
-              <a:rPr sz="1200" b="0">
+              <a:rPr sz="1150" b="0">
                 <a:solidFill>
                   <a:srgbClr val="1A1A1A"/>
                 </a:solidFill>
                 <a:latin typeface="Red Hat Text"/>
               </a:rPr>
               <a:t>Read the image-size result the pipeline published</a:t>
-            </a:r>
-          </a:p>
-        </p:txBody>
-      </p:sp>
-      <p:sp>
-        <p:nvSpPr>
-          <p:cNvPr id="21" name="Rounded Rectangle 20"/>
-          <p:cNvSpPr/>
-          <p:nvPr/>
-        </p:nvSpPr>
-        <p:spPr>
-          <a:xfrm>
-            <a:off x="6812280" y="2395728"/>
-            <a:ext cx="4538167" cy="2944368"/>
-          </a:xfrm>
-          <a:prstGeom prst="roundRect">
-            <a:avLst>
-              <a:gd name="adj" fmla="val 4000"/>
-            </a:avLst>
-          </a:prstGeom>
-          <a:solidFill>
-            <a:srgbClr val="FFFFFF"/>
-          </a:solidFill>
-          <a:ln w="15240">
-            <a:solidFill>
-              <a:srgbClr val="DDE1E6"/>
-            </a:solidFill>
-          </a:ln>
-          <a:effectLst/>
-        </p:spPr>
-        <p:style>
-          <a:lnRef idx="1">
-            <a:schemeClr val="accent1"/>
-          </a:lnRef>
-          <a:fillRef idx="3">
-            <a:schemeClr val="accent1"/>
-          </a:fillRef>
-          <a:effectRef idx="2">
-            <a:schemeClr val="accent1"/>
-          </a:effectRef>
-          <a:fontRef idx="minor">
-            <a:schemeClr val="lt1"/>
-          </a:fontRef>
-        </p:style>
-        <p:txBody>
-          <a:bodyPr rtlCol="0" anchor="ctr"/>
-          <a:lstStyle/>
-          <a:p>
-            <a:pPr algn="ctr"/>
-          </a:p>
-        </p:txBody>
-      </p:sp>
-      <p:sp>
-        <p:nvSpPr>
-          <p:cNvPr id="22" name="Rounded Rectangle 21"/>
-          <p:cNvSpPr/>
-          <p:nvPr/>
-        </p:nvSpPr>
-        <p:spPr>
-          <a:xfrm>
-            <a:off x="7013448" y="2596896"/>
-            <a:ext cx="1298448" cy="310896"/>
-          </a:xfrm>
-          <a:prstGeom prst="roundRect">
-            <a:avLst>
-              <a:gd name="adj" fmla="val 50000"/>
-            </a:avLst>
-          </a:prstGeom>
-          <a:solidFill>
-            <a:srgbClr val="FCECEC"/>
-          </a:solidFill>
-          <a:ln>
-            <a:noFill/>
-          </a:ln>
-          <a:effectLst/>
-        </p:spPr>
-        <p:style>
-          <a:lnRef idx="1">
-            <a:schemeClr val="accent1"/>
-          </a:lnRef>
-          <a:fillRef idx="3">
-            <a:schemeClr val="accent1"/>
-          </a:fillRef>
-          <a:effectRef idx="2">
-            <a:schemeClr val="accent1"/>
-          </a:effectRef>
-          <a:fontRef idx="minor">
-            <a:schemeClr val="lt1"/>
-          </a:fontRef>
-        </p:style>
-        <p:txBody>
-          <a:bodyPr rtlCol="0" anchor="ctr"/>
-          <a:lstStyle/>
-          <a:p>
-            <a:pPr algn="ctr"/>
-          </a:p>
-        </p:txBody>
-      </p:sp>
-      <p:sp>
-        <p:nvSpPr>
-          <p:cNvPr id="23" name="TextBox 22"/>
-          <p:cNvSpPr txBox="1"/>
-          <p:nvPr/>
-        </p:nvSpPr>
-        <p:spPr>
-          <a:xfrm>
-            <a:off x="7013448" y="2596896"/>
-            <a:ext cx="1298448" cy="310896"/>
-          </a:xfrm>
-          <a:prstGeom prst="rect">
-            <a:avLst/>
-          </a:prstGeom>
-          <a:noFill/>
-        </p:spPr>
-        <p:txBody>
-          <a:bodyPr wrap="none" anchor="ctr" lIns="0" rIns="0" tIns="0" bIns="0">
-            <a:spAutoFit/>
-          </a:bodyPr>
-          <a:lstStyle/>
-          <a:p>
-            <a:pPr algn="ctr">
-              <a:lnSpc>
-                <a:spcPct val="106000"/>
-              </a:lnSpc>
-              <a:spcBef>
-                <a:spcPts val="0"/>
-              </a:spcBef>
-              <a:spcAft>
-                <a:spcPts val="0"/>
-              </a:spcAft>
-            </a:pPr>
-            <a:r>
-              <a:rPr sz="850" b="1">
-                <a:solidFill>
-                  <a:srgbClr val="B80000"/>
-                </a:solidFill>
-                <a:latin typeface="Red Hat Display"/>
-              </a:rPr>
-              <a:t>MEDIA PASS</a:t>
-            </a:r>
-          </a:p>
-        </p:txBody>
-      </p:sp>
-      <p:pic>
-        <p:nvPicPr>
-          <p:cNvPr id="24" name="Picture 23" descr="eye_slate.png"/>
-          <p:cNvPicPr>
-            <a:picLocks noChangeAspect="1"/>
-          </p:cNvPicPr>
-          <p:nvPr/>
-        </p:nvPicPr>
-        <p:blipFill>
-          <a:blip r:embed="rId4"/>
-          <a:stretch>
-            <a:fillRect/>
-          </a:stretch>
-        </p:blipFill>
-        <p:spPr>
-          <a:xfrm>
-            <a:off x="8843619" y="3108960"/>
-            <a:ext cx="475488" cy="475488"/>
-          </a:xfrm>
-          <a:prstGeom prst="rect">
-            <a:avLst/>
-          </a:prstGeom>
-        </p:spPr>
-      </p:pic>
-      <p:sp>
-        <p:nvSpPr>
-          <p:cNvPr id="25" name="TextBox 24"/>
-          <p:cNvSpPr txBox="1"/>
-          <p:nvPr/>
-        </p:nvSpPr>
-        <p:spPr>
-          <a:xfrm>
-            <a:off x="7050024" y="3721608"/>
-            <a:ext cx="4062679" cy="1481328"/>
-          </a:xfrm>
-          <a:prstGeom prst="rect">
-            <a:avLst/>
-          </a:prstGeom>
-          <a:noFill/>
-        </p:spPr>
-        <p:txBody>
-          <a:bodyPr wrap="square" anchor="t" lIns="0" rIns="0" tIns="0" bIns="0">
-            <a:spAutoFit/>
-          </a:bodyPr>
-          <a:lstStyle/>
-          <a:p>
-            <a:pPr algn="l">
-              <a:lnSpc>
-                <a:spcPct val="120000"/>
-              </a:lnSpc>
-              <a:spcBef>
-                <a:spcPts val="0"/>
-              </a:spcBef>
-              <a:spcAft>
-                <a:spcPts val="0"/>
-              </a:spcAft>
-            </a:pPr>
-            <a:r>
-              <a:rPr sz="950" b="0">
-                <a:solidFill>
-                  <a:srgbClr val="8A9099"/>
-                </a:solidFill>
-                <a:latin typeface="Red Hat Text"/>
-              </a:rPr>
-              <a:t>Numbered arc strip: run → explore library → break/fix → push-to-build → read results.</a:t>
             </a:r>
           </a:p>
         </p:txBody>
@@ -12122,11 +13587,11 @@
         <p:spPr>
           <a:xfrm>
             <a:off x="841248" y="2395728"/>
-            <a:ext cx="5715000" cy="530352"/>
+            <a:ext cx="5138928" cy="786384"/>
           </a:xfrm>
           <a:prstGeom prst="roundRect">
             <a:avLst>
-              <a:gd name="adj" fmla="val 6000"/>
+              <a:gd name="adj" fmla="val 7000"/>
             </a:avLst>
           </a:prstGeom>
           <a:solidFill>
@@ -12161,9 +13626,55 @@
           </a:p>
         </p:txBody>
       </p:sp>
+      <p:sp>
+        <p:nvSpPr>
+          <p:cNvPr id="7" name="Rounded Rectangle 6"/>
+          <p:cNvSpPr/>
+          <p:nvPr/>
+        </p:nvSpPr>
+        <p:spPr>
+          <a:xfrm>
+            <a:off x="987552" y="2532888"/>
+            <a:ext cx="512064" cy="512064"/>
+          </a:xfrm>
+          <a:prstGeom prst="roundRect">
+            <a:avLst>
+              <a:gd name="adj" fmla="val 26000"/>
+            </a:avLst>
+          </a:prstGeom>
+          <a:solidFill>
+            <a:srgbClr val="EE0000"/>
+          </a:solidFill>
+          <a:ln>
+            <a:noFill/>
+          </a:ln>
+          <a:effectLst/>
+        </p:spPr>
+        <p:style>
+          <a:lnRef idx="1">
+            <a:schemeClr val="accent1"/>
+          </a:lnRef>
+          <a:fillRef idx="3">
+            <a:schemeClr val="accent1"/>
+          </a:fillRef>
+          <a:effectRef idx="2">
+            <a:schemeClr val="accent1"/>
+          </a:effectRef>
+          <a:fontRef idx="minor">
+            <a:schemeClr val="lt1"/>
+          </a:fontRef>
+        </p:style>
+        <p:txBody>
+          <a:bodyPr rtlCol="0" anchor="ctr"/>
+          <a:lstStyle/>
+          <a:p>
+            <a:pPr algn="ctr"/>
+          </a:p>
+        </p:txBody>
+      </p:sp>
       <p:pic>
         <p:nvPicPr>
-          <p:cNvPr id="7" name="Picture 6" descr="check_steel.png"/>
+          <p:cNvPr id="8" name="Picture 7" descr="check_white.png"/>
           <p:cNvPicPr>
             <a:picLocks noChangeAspect="1"/>
           </p:cNvPicPr>
@@ -12177,8 +13688,8 @@
         </p:blipFill>
         <p:spPr>
           <a:xfrm>
-            <a:off x="987552" y="2542032"/>
-            <a:ext cx="237744" cy="237744"/>
+            <a:off x="1110447" y="2655783"/>
+            <a:ext cx="266273" cy="266273"/>
           </a:xfrm>
           <a:prstGeom prst="rect">
             <a:avLst/>
@@ -12187,14 +13698,14 @@
       </p:pic>
       <p:sp>
         <p:nvSpPr>
-          <p:cNvPr id="8" name="TextBox 7"/>
+          <p:cNvPr id="9" name="TextBox 8"/>
           <p:cNvSpPr txBox="1"/>
           <p:nvPr/>
         </p:nvSpPr>
         <p:spPr>
           <a:xfrm>
-            <a:off x="1353312" y="2395728"/>
-            <a:ext cx="5029200" cy="530352"/>
+            <a:off x="1627632" y="2395728"/>
+            <a:ext cx="4206240" cy="786384"/>
           </a:xfrm>
           <a:prstGeom prst="rect">
             <a:avLst/>
@@ -12219,7 +13730,7 @@
               </a:spcAft>
             </a:pPr>
             <a:r>
-              <a:rPr sz="1200" b="0">
+              <a:rPr sz="1150" b="0">
                 <a:solidFill>
                   <a:srgbClr val="1A1A1A"/>
                 </a:solidFill>
@@ -12232,18 +13743,18 @@
       </p:sp>
       <p:sp>
         <p:nvSpPr>
-          <p:cNvPr id="9" name="Rounded Rectangle 8"/>
+          <p:cNvPr id="10" name="Rounded Rectangle 9"/>
           <p:cNvSpPr/>
           <p:nvPr/>
         </p:nvSpPr>
         <p:spPr>
           <a:xfrm>
-            <a:off x="841248" y="2999232"/>
-            <a:ext cx="5715000" cy="530352"/>
+            <a:off x="6254496" y="2395728"/>
+            <a:ext cx="5138928" cy="786384"/>
           </a:xfrm>
           <a:prstGeom prst="roundRect">
             <a:avLst>
-              <a:gd name="adj" fmla="val 6000"/>
+              <a:gd name="adj" fmla="val 7000"/>
             </a:avLst>
           </a:prstGeom>
           <a:solidFill>
@@ -12278,9 +13789,55 @@
           </a:p>
         </p:txBody>
       </p:sp>
+      <p:sp>
+        <p:nvSpPr>
+          <p:cNvPr id="11" name="Rounded Rectangle 10"/>
+          <p:cNvSpPr/>
+          <p:nvPr/>
+        </p:nvSpPr>
+        <p:spPr>
+          <a:xfrm>
+            <a:off x="6400800" y="2532888"/>
+            <a:ext cx="512064" cy="512064"/>
+          </a:xfrm>
+          <a:prstGeom prst="roundRect">
+            <a:avLst>
+              <a:gd name="adj" fmla="val 26000"/>
+            </a:avLst>
+          </a:prstGeom>
+          <a:solidFill>
+            <a:srgbClr val="EE0000"/>
+          </a:solidFill>
+          <a:ln>
+            <a:noFill/>
+          </a:ln>
+          <a:effectLst/>
+        </p:spPr>
+        <p:style>
+          <a:lnRef idx="1">
+            <a:schemeClr val="accent1"/>
+          </a:lnRef>
+          <a:fillRef idx="3">
+            <a:schemeClr val="accent1"/>
+          </a:fillRef>
+          <a:effectRef idx="2">
+            <a:schemeClr val="accent1"/>
+          </a:effectRef>
+          <a:fontRef idx="minor">
+            <a:schemeClr val="lt1"/>
+          </a:fontRef>
+        </p:style>
+        <p:txBody>
+          <a:bodyPr rtlCol="0" anchor="ctr"/>
+          <a:lstStyle/>
+          <a:p>
+            <a:pPr algn="ctr"/>
+          </a:p>
+        </p:txBody>
+      </p:sp>
       <p:pic>
         <p:nvPicPr>
-          <p:cNvPr id="10" name="Picture 9" descr="check_steel.png"/>
+          <p:cNvPr id="12" name="Picture 11" descr="check_white.png"/>
           <p:cNvPicPr>
             <a:picLocks noChangeAspect="1"/>
           </p:cNvPicPr>
@@ -12294,8 +13851,8 @@
         </p:blipFill>
         <p:spPr>
           <a:xfrm>
-            <a:off x="987552" y="3145536"/>
-            <a:ext cx="237744" cy="237744"/>
+            <a:off x="6523695" y="2655783"/>
+            <a:ext cx="266273" cy="266273"/>
           </a:xfrm>
           <a:prstGeom prst="rect">
             <a:avLst/>
@@ -12304,14 +13861,14 @@
       </p:pic>
       <p:sp>
         <p:nvSpPr>
-          <p:cNvPr id="11" name="TextBox 10"/>
+          <p:cNvPr id="13" name="TextBox 12"/>
           <p:cNvSpPr txBox="1"/>
           <p:nvPr/>
         </p:nvSpPr>
         <p:spPr>
           <a:xfrm>
-            <a:off x="1353312" y="2999232"/>
-            <a:ext cx="5029200" cy="530352"/>
+            <a:off x="7040880" y="2395728"/>
+            <a:ext cx="4206240" cy="786384"/>
           </a:xfrm>
           <a:prstGeom prst="rect">
             <a:avLst/>
@@ -12336,7 +13893,7 @@
               </a:spcAft>
             </a:pPr>
             <a:r>
-              <a:rPr sz="1200" b="0">
+              <a:rPr sz="1150" b="0">
                 <a:solidFill>
                   <a:srgbClr val="1A1A1A"/>
                 </a:solidFill>
@@ -12349,18 +13906,18 @@
       </p:sp>
       <p:sp>
         <p:nvSpPr>
-          <p:cNvPr id="12" name="Rounded Rectangle 11"/>
+          <p:cNvPr id="14" name="Rounded Rectangle 13"/>
           <p:cNvSpPr/>
           <p:nvPr/>
         </p:nvSpPr>
         <p:spPr>
           <a:xfrm>
-            <a:off x="841248" y="3602736"/>
-            <a:ext cx="5715000" cy="530352"/>
+            <a:off x="841248" y="3328416"/>
+            <a:ext cx="5138928" cy="786384"/>
           </a:xfrm>
           <a:prstGeom prst="roundRect">
             <a:avLst>
-              <a:gd name="adj" fmla="val 6000"/>
+              <a:gd name="adj" fmla="val 7000"/>
             </a:avLst>
           </a:prstGeom>
           <a:solidFill>
@@ -12395,9 +13952,55 @@
           </a:p>
         </p:txBody>
       </p:sp>
+      <p:sp>
+        <p:nvSpPr>
+          <p:cNvPr id="15" name="Rounded Rectangle 14"/>
+          <p:cNvSpPr/>
+          <p:nvPr/>
+        </p:nvSpPr>
+        <p:spPr>
+          <a:xfrm>
+            <a:off x="987552" y="3465576"/>
+            <a:ext cx="512064" cy="512064"/>
+          </a:xfrm>
+          <a:prstGeom prst="roundRect">
+            <a:avLst>
+              <a:gd name="adj" fmla="val 26000"/>
+            </a:avLst>
+          </a:prstGeom>
+          <a:solidFill>
+            <a:srgbClr val="EE0000"/>
+          </a:solidFill>
+          <a:ln>
+            <a:noFill/>
+          </a:ln>
+          <a:effectLst/>
+        </p:spPr>
+        <p:style>
+          <a:lnRef idx="1">
+            <a:schemeClr val="accent1"/>
+          </a:lnRef>
+          <a:fillRef idx="3">
+            <a:schemeClr val="accent1"/>
+          </a:fillRef>
+          <a:effectRef idx="2">
+            <a:schemeClr val="accent1"/>
+          </a:effectRef>
+          <a:fontRef idx="minor">
+            <a:schemeClr val="lt1"/>
+          </a:fontRef>
+        </p:style>
+        <p:txBody>
+          <a:bodyPr rtlCol="0" anchor="ctr"/>
+          <a:lstStyle/>
+          <a:p>
+            <a:pPr algn="ctr"/>
+          </a:p>
+        </p:txBody>
+      </p:sp>
       <p:pic>
         <p:nvPicPr>
-          <p:cNvPr id="13" name="Picture 12" descr="check_steel.png"/>
+          <p:cNvPr id="16" name="Picture 15" descr="check_white.png"/>
           <p:cNvPicPr>
             <a:picLocks noChangeAspect="1"/>
           </p:cNvPicPr>
@@ -12411,8 +14014,8 @@
         </p:blipFill>
         <p:spPr>
           <a:xfrm>
-            <a:off x="987552" y="3749040"/>
-            <a:ext cx="237744" cy="237744"/>
+            <a:off x="1110447" y="3588471"/>
+            <a:ext cx="266273" cy="266273"/>
           </a:xfrm>
           <a:prstGeom prst="rect">
             <a:avLst/>
@@ -12421,14 +14024,14 @@
       </p:pic>
       <p:sp>
         <p:nvSpPr>
-          <p:cNvPr id="14" name="TextBox 13"/>
+          <p:cNvPr id="17" name="TextBox 16"/>
           <p:cNvSpPr txBox="1"/>
           <p:nvPr/>
         </p:nvSpPr>
         <p:spPr>
           <a:xfrm>
-            <a:off x="1353312" y="3602736"/>
-            <a:ext cx="5029200" cy="530352"/>
+            <a:off x="1627632" y="3328416"/>
+            <a:ext cx="4206240" cy="786384"/>
           </a:xfrm>
           <a:prstGeom prst="rect">
             <a:avLst/>
@@ -12453,7 +14056,7 @@
               </a:spcAft>
             </a:pPr>
             <a:r>
-              <a:rPr sz="1200" b="0">
+              <a:rPr sz="1150" b="0">
                 <a:solidFill>
                   <a:srgbClr val="1A1A1A"/>
                 </a:solidFill>
@@ -12466,18 +14069,18 @@
       </p:sp>
       <p:sp>
         <p:nvSpPr>
-          <p:cNvPr id="15" name="Rounded Rectangle 14"/>
+          <p:cNvPr id="18" name="Rounded Rectangle 17"/>
           <p:cNvSpPr/>
           <p:nvPr/>
         </p:nvSpPr>
         <p:spPr>
           <a:xfrm>
-            <a:off x="841248" y="4206240"/>
-            <a:ext cx="5715000" cy="530352"/>
+            <a:off x="6254496" y="3328416"/>
+            <a:ext cx="5138928" cy="786384"/>
           </a:xfrm>
           <a:prstGeom prst="roundRect">
             <a:avLst>
-              <a:gd name="adj" fmla="val 6000"/>
+              <a:gd name="adj" fmla="val 7000"/>
             </a:avLst>
           </a:prstGeom>
           <a:solidFill>
@@ -12512,9 +14115,55 @@
           </a:p>
         </p:txBody>
       </p:sp>
+      <p:sp>
+        <p:nvSpPr>
+          <p:cNvPr id="19" name="Rounded Rectangle 18"/>
+          <p:cNvSpPr/>
+          <p:nvPr/>
+        </p:nvSpPr>
+        <p:spPr>
+          <a:xfrm>
+            <a:off x="6400800" y="3465576"/>
+            <a:ext cx="512064" cy="512064"/>
+          </a:xfrm>
+          <a:prstGeom prst="roundRect">
+            <a:avLst>
+              <a:gd name="adj" fmla="val 26000"/>
+            </a:avLst>
+          </a:prstGeom>
+          <a:solidFill>
+            <a:srgbClr val="EE0000"/>
+          </a:solidFill>
+          <a:ln>
+            <a:noFill/>
+          </a:ln>
+          <a:effectLst/>
+        </p:spPr>
+        <p:style>
+          <a:lnRef idx="1">
+            <a:schemeClr val="accent1"/>
+          </a:lnRef>
+          <a:fillRef idx="3">
+            <a:schemeClr val="accent1"/>
+          </a:fillRef>
+          <a:effectRef idx="2">
+            <a:schemeClr val="accent1"/>
+          </a:effectRef>
+          <a:fontRef idx="minor">
+            <a:schemeClr val="lt1"/>
+          </a:fontRef>
+        </p:style>
+        <p:txBody>
+          <a:bodyPr rtlCol="0" anchor="ctr"/>
+          <a:lstStyle/>
+          <a:p>
+            <a:pPr algn="ctr"/>
+          </a:p>
+        </p:txBody>
+      </p:sp>
       <p:pic>
         <p:nvPicPr>
-          <p:cNvPr id="16" name="Picture 15" descr="check_steel.png"/>
+          <p:cNvPr id="20" name="Picture 19" descr="check_white.png"/>
           <p:cNvPicPr>
             <a:picLocks noChangeAspect="1"/>
           </p:cNvPicPr>
@@ -12528,8 +14177,8 @@
         </p:blipFill>
         <p:spPr>
           <a:xfrm>
-            <a:off x="987552" y="4352544"/>
-            <a:ext cx="237744" cy="237744"/>
+            <a:off x="6523695" y="3588471"/>
+            <a:ext cx="266273" cy="266273"/>
           </a:xfrm>
           <a:prstGeom prst="rect">
             <a:avLst/>
@@ -12538,14 +14187,14 @@
       </p:pic>
       <p:sp>
         <p:nvSpPr>
-          <p:cNvPr id="17" name="TextBox 16"/>
+          <p:cNvPr id="21" name="TextBox 20"/>
           <p:cNvSpPr txBox="1"/>
           <p:nvPr/>
         </p:nvSpPr>
         <p:spPr>
           <a:xfrm>
-            <a:off x="1353312" y="4206240"/>
-            <a:ext cx="5029200" cy="530352"/>
+            <a:off x="7040880" y="3328416"/>
+            <a:ext cx="4206240" cy="786384"/>
           </a:xfrm>
           <a:prstGeom prst="rect">
             <a:avLst/>
@@ -12570,7 +14219,7 @@
               </a:spcAft>
             </a:pPr>
             <a:r>
-              <a:rPr sz="1200" b="0">
+              <a:rPr sz="1150" b="0">
                 <a:solidFill>
                   <a:srgbClr val="1A1A1A"/>
                 </a:solidFill>
@@ -12583,18 +14232,18 @@
       </p:sp>
       <p:sp>
         <p:nvSpPr>
-          <p:cNvPr id="18" name="Rounded Rectangle 17"/>
+          <p:cNvPr id="22" name="Rounded Rectangle 21"/>
           <p:cNvSpPr/>
           <p:nvPr/>
         </p:nvSpPr>
         <p:spPr>
           <a:xfrm>
-            <a:off x="841248" y="4809744"/>
-            <a:ext cx="5715000" cy="530352"/>
+            <a:off x="841248" y="4261104"/>
+            <a:ext cx="5138928" cy="786384"/>
           </a:xfrm>
           <a:prstGeom prst="roundRect">
             <a:avLst>
-              <a:gd name="adj" fmla="val 6000"/>
+              <a:gd name="adj" fmla="val 7000"/>
             </a:avLst>
           </a:prstGeom>
           <a:solidFill>
@@ -12629,9 +14278,55 @@
           </a:p>
         </p:txBody>
       </p:sp>
+      <p:sp>
+        <p:nvSpPr>
+          <p:cNvPr id="23" name="Rounded Rectangle 22"/>
+          <p:cNvSpPr/>
+          <p:nvPr/>
+        </p:nvSpPr>
+        <p:spPr>
+          <a:xfrm>
+            <a:off x="987552" y="4398264"/>
+            <a:ext cx="512064" cy="512064"/>
+          </a:xfrm>
+          <a:prstGeom prst="roundRect">
+            <a:avLst>
+              <a:gd name="adj" fmla="val 26000"/>
+            </a:avLst>
+          </a:prstGeom>
+          <a:solidFill>
+            <a:srgbClr val="EE0000"/>
+          </a:solidFill>
+          <a:ln>
+            <a:noFill/>
+          </a:ln>
+          <a:effectLst/>
+        </p:spPr>
+        <p:style>
+          <a:lnRef idx="1">
+            <a:schemeClr val="accent1"/>
+          </a:lnRef>
+          <a:fillRef idx="3">
+            <a:schemeClr val="accent1"/>
+          </a:fillRef>
+          <a:effectRef idx="2">
+            <a:schemeClr val="accent1"/>
+          </a:effectRef>
+          <a:fontRef idx="minor">
+            <a:schemeClr val="lt1"/>
+          </a:fontRef>
+        </p:style>
+        <p:txBody>
+          <a:bodyPr rtlCol="0" anchor="ctr"/>
+          <a:lstStyle/>
+          <a:p>
+            <a:pPr algn="ctr"/>
+          </a:p>
+        </p:txBody>
+      </p:sp>
       <p:pic>
         <p:nvPicPr>
-          <p:cNvPr id="19" name="Picture 18" descr="check_steel.png"/>
+          <p:cNvPr id="24" name="Picture 23" descr="check_white.png"/>
           <p:cNvPicPr>
             <a:picLocks noChangeAspect="1"/>
           </p:cNvPicPr>
@@ -12645,8 +14340,8 @@
         </p:blipFill>
         <p:spPr>
           <a:xfrm>
-            <a:off x="987552" y="4956048"/>
-            <a:ext cx="237744" cy="237744"/>
+            <a:off x="1110447" y="4521159"/>
+            <a:ext cx="266273" cy="266273"/>
           </a:xfrm>
           <a:prstGeom prst="rect">
             <a:avLst/>
@@ -12655,14 +14350,14 @@
       </p:pic>
       <p:sp>
         <p:nvSpPr>
-          <p:cNvPr id="20" name="TextBox 19"/>
+          <p:cNvPr id="25" name="TextBox 24"/>
           <p:cNvSpPr txBox="1"/>
           <p:nvPr/>
         </p:nvSpPr>
         <p:spPr>
           <a:xfrm>
-            <a:off x="1353312" y="4809744"/>
-            <a:ext cx="5029200" cy="530352"/>
+            <a:off x="1627632" y="4261104"/>
+            <a:ext cx="4206240" cy="786384"/>
           </a:xfrm>
           <a:prstGeom prst="rect">
             <a:avLst/>
@@ -12687,221 +14382,13 @@
               </a:spcAft>
             </a:pPr>
             <a:r>
-              <a:rPr sz="1200" b="0">
+              <a:rPr sz="1150" b="0">
                 <a:solidFill>
                   <a:srgbClr val="1A1A1A"/>
                 </a:solidFill>
                 <a:latin typeface="Red Hat Text"/>
               </a:rPr>
               <a:t>Don't treat a CI-namespace deploy as production</a:t>
-            </a:r>
-          </a:p>
-        </p:txBody>
-      </p:sp>
-      <p:sp>
-        <p:nvSpPr>
-          <p:cNvPr id="21" name="Rounded Rectangle 20"/>
-          <p:cNvSpPr/>
-          <p:nvPr/>
-        </p:nvSpPr>
-        <p:spPr>
-          <a:xfrm>
-            <a:off x="6812280" y="2395728"/>
-            <a:ext cx="4538167" cy="2944368"/>
-          </a:xfrm>
-          <a:prstGeom prst="roundRect">
-            <a:avLst>
-              <a:gd name="adj" fmla="val 4000"/>
-            </a:avLst>
-          </a:prstGeom>
-          <a:solidFill>
-            <a:srgbClr val="FFFFFF"/>
-          </a:solidFill>
-          <a:ln w="15240">
-            <a:solidFill>
-              <a:srgbClr val="DDE1E6"/>
-            </a:solidFill>
-          </a:ln>
-          <a:effectLst/>
-        </p:spPr>
-        <p:style>
-          <a:lnRef idx="1">
-            <a:schemeClr val="accent1"/>
-          </a:lnRef>
-          <a:fillRef idx="3">
-            <a:schemeClr val="accent1"/>
-          </a:fillRef>
-          <a:effectRef idx="2">
-            <a:schemeClr val="accent1"/>
-          </a:effectRef>
-          <a:fontRef idx="minor">
-            <a:schemeClr val="lt1"/>
-          </a:fontRef>
-        </p:style>
-        <p:txBody>
-          <a:bodyPr rtlCol="0" anchor="ctr"/>
-          <a:lstStyle/>
-          <a:p>
-            <a:pPr algn="ctr"/>
-          </a:p>
-        </p:txBody>
-      </p:sp>
-      <p:sp>
-        <p:nvSpPr>
-          <p:cNvPr id="22" name="Rounded Rectangle 21"/>
-          <p:cNvSpPr/>
-          <p:nvPr/>
-        </p:nvSpPr>
-        <p:spPr>
-          <a:xfrm>
-            <a:off x="7013448" y="2596896"/>
-            <a:ext cx="1298448" cy="310896"/>
-          </a:xfrm>
-          <a:prstGeom prst="roundRect">
-            <a:avLst>
-              <a:gd name="adj" fmla="val 50000"/>
-            </a:avLst>
-          </a:prstGeom>
-          <a:solidFill>
-            <a:srgbClr val="FCECEC"/>
-          </a:solidFill>
-          <a:ln>
-            <a:noFill/>
-          </a:ln>
-          <a:effectLst/>
-        </p:spPr>
-        <p:style>
-          <a:lnRef idx="1">
-            <a:schemeClr val="accent1"/>
-          </a:lnRef>
-          <a:fillRef idx="3">
-            <a:schemeClr val="accent1"/>
-          </a:fillRef>
-          <a:effectRef idx="2">
-            <a:schemeClr val="accent1"/>
-          </a:effectRef>
-          <a:fontRef idx="minor">
-            <a:schemeClr val="lt1"/>
-          </a:fontRef>
-        </p:style>
-        <p:txBody>
-          <a:bodyPr rtlCol="0" anchor="ctr"/>
-          <a:lstStyle/>
-          <a:p>
-            <a:pPr algn="ctr"/>
-          </a:p>
-        </p:txBody>
-      </p:sp>
-      <p:sp>
-        <p:nvSpPr>
-          <p:cNvPr id="23" name="TextBox 22"/>
-          <p:cNvSpPr txBox="1"/>
-          <p:nvPr/>
-        </p:nvSpPr>
-        <p:spPr>
-          <a:xfrm>
-            <a:off x="7013448" y="2596896"/>
-            <a:ext cx="1298448" cy="310896"/>
-          </a:xfrm>
-          <a:prstGeom prst="rect">
-            <a:avLst/>
-          </a:prstGeom>
-          <a:noFill/>
-        </p:spPr>
-        <p:txBody>
-          <a:bodyPr wrap="none" anchor="ctr" lIns="0" rIns="0" tIns="0" bIns="0">
-            <a:spAutoFit/>
-          </a:bodyPr>
-          <a:lstStyle/>
-          <a:p>
-            <a:pPr algn="ctr">
-              <a:lnSpc>
-                <a:spcPct val="106000"/>
-              </a:lnSpc>
-              <a:spcBef>
-                <a:spcPts val="0"/>
-              </a:spcBef>
-              <a:spcAft>
-                <a:spcPts val="0"/>
-              </a:spcAft>
-            </a:pPr>
-            <a:r>
-              <a:rPr sz="850" b="1">
-                <a:solidFill>
-                  <a:srgbClr val="B80000"/>
-                </a:solidFill>
-                <a:latin typeface="Red Hat Display"/>
-              </a:rPr>
-              <a:t>MEDIA PASS</a:t>
-            </a:r>
-          </a:p>
-        </p:txBody>
-      </p:sp>
-      <p:pic>
-        <p:nvPicPr>
-          <p:cNvPr id="24" name="Picture 23" descr="eye_slate.png"/>
-          <p:cNvPicPr>
-            <a:picLocks noChangeAspect="1"/>
-          </p:cNvPicPr>
-          <p:nvPr/>
-        </p:nvPicPr>
-        <p:blipFill>
-          <a:blip r:embed="rId4"/>
-          <a:stretch>
-            <a:fillRect/>
-          </a:stretch>
-        </p:blipFill>
-        <p:spPr>
-          <a:xfrm>
-            <a:off x="8843619" y="3108960"/>
-            <a:ext cx="475488" cy="475488"/>
-          </a:xfrm>
-          <a:prstGeom prst="rect">
-            <a:avLst/>
-          </a:prstGeom>
-        </p:spPr>
-      </p:pic>
-      <p:sp>
-        <p:nvSpPr>
-          <p:cNvPr id="25" name="TextBox 24"/>
-          <p:cNvSpPr txBox="1"/>
-          <p:nvPr/>
-        </p:nvSpPr>
-        <p:spPr>
-          <a:xfrm>
-            <a:off x="7050024" y="3721608"/>
-            <a:ext cx="4062679" cy="1481328"/>
-          </a:xfrm>
-          <a:prstGeom prst="rect">
-            <a:avLst/>
-          </a:prstGeom>
-          <a:noFill/>
-        </p:spPr>
-        <p:txBody>
-          <a:bodyPr wrap="square" anchor="t" lIns="0" rIns="0" tIns="0" bIns="0">
-            <a:spAutoFit/>
-          </a:bodyPr>
-          <a:lstStyle/>
-          <a:p>
-            <a:pPr algn="l">
-              <a:lnSpc>
-                <a:spcPct val="120000"/>
-              </a:lnSpc>
-              <a:spcBef>
-                <a:spcPts val="0"/>
-              </a:spcBef>
-              <a:spcAft>
-                <a:spcPts val="0"/>
-              </a:spcAft>
-            </a:pPr>
-            <a:r>
-              <a:rPr sz="950" b="0">
-                <a:solidFill>
-                  <a:srgbClr val="8A9099"/>
-                </a:solidFill>
-                <a:latin typeface="Red Hat Text"/>
-              </a:rPr>
-              <a:t>Two-column card "reach for a pipeline / a terminal is enough", with a footnote pointer to the Supply Chain and GitOps modules.</a:t>
             </a:r>
           </a:p>
         </p:txBody>
